--- a/lecons/F3/12_FORM4_LESSON09_Continental_Drift.pptx
+++ b/lecons/F3/12_FORM4_LESSON09_Continental_Drift.pptx
@@ -50,9 +50,13 @@
     <p:sldId id="298" r:id="rId44"/>
     <p:sldId id="299" r:id="rId45"/>
     <p:sldId id="300" r:id="rId46"/>
+    <p:sldId id="301" r:id="rId47"/>
+    <p:sldId id="302" r:id="rId48"/>
+    <p:sldId id="303" r:id="rId49"/>
+    <p:sldId id="304" r:id="rId50"/>
   </p:sldIdLst>
   <p:notesMasterIdLst>
-    <p:notesMasterId r:id="rId47"/>
+    <p:notesMasterId r:id="rId51"/>
   </p:notesMasterIdLst>
   <p:sldSz cx="12192000" cy="6858000"/>
   <p:notesSz cx="6858000" cy="12192000"/>
@@ -546,7 +550,7 @@
           <a:p>
             <a:r>
               <a:rPr lang="en-US" dirty="0"/>
-              <a:t>Good morning, class, and welcome to our geography lesson. I am your geography teacher, Mr Kamdem. Today we are starting Lesson 9: The Theory of Continental Drift.</a:t>
+              <a:t>Good morning, class, and welcome to our geography lesson. I am your geography teacher, Mr Kamdem. Today we are starting Lesson 9: The Theories of the Earth's Structure: Continental Drift.</a:t>
             </a:r>
             <a:endParaRPr lang="en-US" dirty="0"/>
           </a:p>
@@ -634,7 +638,7 @@
           <a:p>
             <a:r>
               <a:rPr lang="en-US" dirty="0"/>
-              <a:t>Question 1: What is the problem in the situation? Think for a moment, then raise your hand to answer.</a:t>
+              <a:t>Listen carefully to this situation from real life. Djibrilla looks at a map. The coast of Africa and the coast of South America look like two pieces of a puzzle. He wonders if they were once joined. Think about it, because I am going to ask you some questions.</a:t>
             </a:r>
             <a:endParaRPr lang="en-US" dirty="0"/>
           </a:p>
@@ -722,7 +726,7 @@
           <a:p>
             <a:r>
               <a:rPr lang="en-US" dirty="0"/>
-              <a:t>Good. Djibrilla wonders if Africa and South America were once joined.</a:t>
+              <a:t>Question 1: What is the problem in the situation? Think for a moment, then raise your hand to answer.</a:t>
             </a:r>
             <a:endParaRPr lang="en-US" dirty="0"/>
           </a:p>
@@ -810,7 +814,7 @@
           <a:p>
             <a:r>
               <a:rPr lang="en-US" dirty="0"/>
-              <a:t>Question 2: What does he notice? Think for a moment, then raise your hand to answer.</a:t>
+              <a:t>Good. Djibrilla wonders if Africa and South America were once joined.</a:t>
             </a:r>
             <a:endParaRPr lang="en-US" dirty="0"/>
           </a:p>
@@ -898,7 +902,7 @@
           <a:p>
             <a:r>
               <a:rPr lang="en-US" dirty="0"/>
-              <a:t>Good. The two coasts fit like a puzzle.</a:t>
+              <a:t>Question 2: What does he notice? Think for a moment, then raise your hand to answer.</a:t>
             </a:r>
             <a:endParaRPr lang="en-US" dirty="0"/>
           </a:p>
@@ -986,7 +990,7 @@
           <a:p>
             <a:r>
               <a:rPr lang="en-US" dirty="0"/>
-              <a:t>Question 3: Who first explained this? Think for a moment, then raise your hand to answer.</a:t>
+              <a:t>Good. The two coasts fit like a puzzle.</a:t>
             </a:r>
             <a:endParaRPr lang="en-US" dirty="0"/>
           </a:p>
@@ -1074,7 +1078,7 @@
           <a:p>
             <a:r>
               <a:rPr lang="en-US" dirty="0"/>
-              <a:t>Good. Alfred Wegener, in 1912.</a:t>
+              <a:t>Question 3: Who first explained this? Think for a moment, then raise your hand to answer.</a:t>
             </a:r>
             <a:endParaRPr lang="en-US" dirty="0"/>
           </a:p>
@@ -1162,7 +1166,7 @@
           <a:p>
             <a:r>
               <a:rPr lang="en-US" dirty="0"/>
-              <a:t>From this situation, the action we are working towards in this lesson is the following: use maps and evidence to explain how the continents moved.</a:t>
+              <a:t>Good. Alfred Wegener, in 1912.</a:t>
             </a:r>
             <a:endParaRPr lang="en-US" dirty="0"/>
           </a:p>
@@ -1250,7 +1254,7 @@
           <a:p>
             <a:r>
               <a:rPr lang="en-US" dirty="0"/>
-              <a:t>Why is this lesson important for you? This lesson helps us to understand that the continents move.</a:t>
+              <a:t>From this situation, the action we are working towards in this lesson is the following: use maps and evidence to explain how the continents moved.</a:t>
             </a:r>
             <a:endParaRPr lang="en-US" dirty="0"/>
           </a:p>
@@ -1338,7 +1342,7 @@
           <a:p>
             <a:r>
               <a:rPr lang="en-US" dirty="0"/>
-              <a:t>Activity 1. Look carefully at this animation: animation: closing the Atlantic Ocean. Watch the animation to the end; it will play again.</a:t>
+              <a:t>Why is this lesson important for you? This lesson helps us to understand that the continents move.</a:t>
             </a:r>
             <a:endParaRPr lang="en-US" dirty="0"/>
           </a:p>
@@ -1426,7 +1430,7 @@
           <a:p>
             <a:r>
               <a:rPr lang="en-US" dirty="0"/>
-              <a:t>Here is the question for Activity 1: What happens when we bring South America near Africa? Take one minute to think and write your answer in your rough notebook.</a:t>
+              <a:t>Activity 1. Look carefully at this animation: animation: closing the Atlantic Ocean. Watch the animation to the end; it will play again.</a:t>
             </a:r>
             <a:endParaRPr lang="en-US" dirty="0"/>
           </a:p>
@@ -1514,7 +1518,7 @@
           <a:p>
             <a:r>
               <a:rPr lang="en-US" dirty="0"/>
-              <a:t>This lesson is for Form 4. It belongs to The Structure of the Earth: Building Processes and Impacts on Man — Internal Structure of the Earth. We shall need 50 minutes to cover it.</a:t>
+              <a:t>This lesson is for Form 4. It belongs to The Structure of the Earth: Building Processes and Impacts on Man — Structure of the Earth. We shall need 50 minutes to cover it.</a:t>
             </a:r>
             <a:endParaRPr lang="en-US" dirty="0"/>
           </a:p>
@@ -1602,7 +1606,7 @@
           <a:p>
             <a:r>
               <a:rPr lang="en-US" dirty="0"/>
-              <a:t>Let us check the answer together. The two coasts fit together like a puzzle.</a:t>
+              <a:t>Here is the question for Activity 1: What happens when we bring South America near Africa? What did Wegener conclude? Take one minute to think and write your answer in your rough notebook.</a:t>
             </a:r>
             <a:endParaRPr lang="en-US" dirty="0"/>
           </a:p>
@@ -1690,7 +1694,7 @@
           <a:p>
             <a:r>
               <a:rPr lang="en-US" dirty="0"/>
-              <a:t>Activity 2. Look carefully at this picture: a fossil of a fish in rock. Observe every detail before I ask the question.</a:t>
+              <a:t>Let us check the answer together. The two coasts fit together like a puzzle, so the continents were once joined and have drifted apart.</a:t>
             </a:r>
             <a:endParaRPr lang="en-US" dirty="0"/>
           </a:p>
@@ -1778,7 +1782,7 @@
           <a:p>
             <a:r>
               <a:rPr lang="en-US" dirty="0"/>
-              <a:t>Here is the question for Activity 2: The fossils of the same small reptile (Mesosaurus) are found in Brazil and in southern Africa. What does it prove? Take one minute to think and write your answer in your rough notebook.</a:t>
+              <a:t>Activity 2. Look carefully at this diagram: the break-up of Pangaea. Observe every detail before I ask the question.</a:t>
             </a:r>
             <a:endParaRPr lang="en-US" dirty="0"/>
           </a:p>
@@ -1866,7 +1870,7 @@
           <a:p>
             <a:r>
               <a:rPr lang="en-US" dirty="0"/>
-              <a:t>Let us check the answer together. The two continents were once joined.</a:t>
+              <a:t>Here is the question for Activity 2: Describe the drifting of the continents shown on the diagram. Take one minute to think and write your answer in your rough notebook.</a:t>
             </a:r>
             <a:endParaRPr lang="en-US" dirty="0"/>
           </a:p>
@@ -1954,7 +1958,7 @@
           <a:p>
             <a:r>
               <a:rPr lang="en-US" dirty="0"/>
-              <a:t>Activity 3. Look carefully at this picture: a crack in the ground in Iceland, where two plates move apart. Observe every detail before I ask the question.</a:t>
+              <a:t>Let us check the answer together. Pangaea split into Laurasia and Gondwanaland, which broke into the continents of today.</a:t>
             </a:r>
             <a:endParaRPr lang="en-US" dirty="0"/>
           </a:p>
@@ -2042,7 +2046,7 @@
           <a:p>
             <a:r>
               <a:rPr lang="en-US" dirty="0"/>
-              <a:t>Here is the question for Activity 3: The ground here opens a little every year. What does it show? Take one minute to think and write your answer in your rough notebook.</a:t>
+              <a:t>Activity 3. Look carefully at this picture: a fossil of a fish in rock. Observe every detail before I ask the question.</a:t>
             </a:r>
             <a:endParaRPr lang="en-US" dirty="0"/>
           </a:p>
@@ -2130,7 +2134,7 @@
           <a:p>
             <a:r>
               <a:rPr lang="en-US" dirty="0"/>
-              <a:t>Let us check the answer together. The land (the continents) is moving.</a:t>
+              <a:t>Here is the question for Activity 3: The fossils of the same small reptile (Mesosaurus) are found in Brazil and in southern Africa. What does it prove? Take one minute to think and write your answer in your rough notebook.</a:t>
             </a:r>
             <a:endParaRPr lang="en-US" dirty="0"/>
           </a:p>
@@ -2218,7 +2222,7 @@
           <a:p>
             <a:r>
               <a:rPr lang="en-US" dirty="0"/>
-              <a:t>Now we are going to copy the board summary. Write the title and the headings neatly in your notebooks. I will give you enough time for each slide, so do not rush.</a:t>
+              <a:t>Let us check the answer together. The two continents were once joined.</a:t>
             </a:r>
             <a:endParaRPr lang="en-US" dirty="0"/>
           </a:p>
@@ -2306,7 +2310,7 @@
           <a:p>
             <a:r>
               <a:rPr lang="en-US" dirty="0"/>
-              <a:t>Let us copy The Theory of Continental Drift. The main idea of the theory is the following. On this slide we have Continental drift and Author. Write each point on a new line, with the key term first, and explain it in your own words when we revise. When you finish, we go to the next slide.</a:t>
+              <a:t>Now we are going to copy the board summary. Write the title and the headings neatly in your notebooks. I will give you enough time for each slide, so do not rush.</a:t>
             </a:r>
             <a:endParaRPr lang="en-US" dirty="0"/>
           </a:p>
@@ -2394,7 +2398,7 @@
           <a:p>
             <a:r>
               <a:rPr lang="en-US" dirty="0"/>
-              <a:t>We continue with The Theory of Continental Drift. On this slide we have Pangaea and Break-up. Write each point on a new line, with the key term first, and explain it in your own words when we revise.</a:t>
+              <a:t>Let us copy Main Idea of the Theory. The main idea of the theory of continental drift is the following. On this slide we have Continental drift and Author. Write each point on a new line, with the key term first, and explain it in your own words when we revise. When you finish, we go to the next slide.</a:t>
             </a:r>
             <a:endParaRPr lang="en-US" dirty="0"/>
           </a:p>
@@ -2482,7 +2486,7 @@
           <a:p>
             <a:r>
               <a:rPr lang="en-US" dirty="0"/>
-              <a:t>Our topic is The Structure of the Earth: Building Processes and Impacts on Man, and the sub-topic is Internal Structure of the Earth. The key notions we shall use today are: continental drift, Pangaea, Laurasia, Gondwanaland. At the end, you should be able to do this: learners are able to explain, with map evidence, that the continents have moved, and to read the shape of the continents on a world map.</a:t>
+              <a:t>Our topic is The Structure of the Earth: Building Processes and Impacts on Man, and the sub-topic is Structure of the Earth. The key notions we shall use today are: continental drift, Pangaea, Laurasia, Gondwanaland. At the end, you should be able to do this: learners are able to explain, with map evidence, that the continents have moved, and to read the shape of the continents on a world map.</a:t>
             </a:r>
             <a:endParaRPr lang="en-US" dirty="0"/>
           </a:p>
@@ -2570,7 +2574,7 @@
           <a:p>
             <a:r>
               <a:rPr lang="en-US" dirty="0"/>
-              <a:t>Let us copy Evidence of Continental Drift. The following evidence supports the theory. On this slide we have Jigsaw fit and Fossils. Write each point on a new line, with the key term first, and explain it in your own words when we revise. When you finish, we go to the next slide.</a:t>
+              <a:t>We continue with Main Idea of the Theory. On this slide we have Pangaea. Write each point on a new line, with the key term first, and explain it in your own words when we revise.</a:t>
             </a:r>
             <a:endParaRPr lang="en-US" dirty="0"/>
           </a:p>
@@ -2658,7 +2662,7 @@
           <a:p>
             <a:r>
               <a:rPr lang="en-US" dirty="0"/>
-              <a:t>We continue with Evidence of Continental Drift. On this slide we have Rocks and Old ice marks. Write each point on a new line, with the key term first, and explain it in your own words when we revise.</a:t>
+              <a:t>Let us copy Illustration of Drifting. The continents drifted as follows. On this slide we have Break-up and Today's continents. Write each point on a new line, with the key term first, and explain it in your own words when we revise. When you finish, we go to the next slide.</a:t>
             </a:r>
             <a:endParaRPr lang="en-US" dirty="0"/>
           </a:p>
@@ -2746,7 +2750,7 @@
           <a:p>
             <a:r>
               <a:rPr lang="en-US" dirty="0"/>
-              <a:t>Now draw this illustration in your notebook: the jigsaw fit of the continents. Give it a title and label it clearly.</a:t>
+              <a:t>We continue with Illustration of Drifting. On this slide we have Still moving. Write each point on a new line, with the key term first, and explain it in your own words when we revise.</a:t>
             </a:r>
             <a:endParaRPr lang="en-US" dirty="0"/>
           </a:p>
@@ -2834,7 +2838,7 @@
           <a:p>
             <a:r>
               <a:rPr lang="en-US" dirty="0"/>
-              <a:t>Now let us check what you have understood. Question 1: What is Pangaea? Answer in your exercise book.</a:t>
+              <a:t>Now draw this illustration in your notebook: the break-up of Pangaea. Give it a title and label it clearly.</a:t>
             </a:r>
             <a:endParaRPr lang="en-US" dirty="0"/>
           </a:p>
@@ -2922,7 +2926,7 @@
           <a:p>
             <a:r>
               <a:rPr lang="en-US" dirty="0"/>
-              <a:t>The expected answer is: the single big continent of long ago. If you got it right, well done.</a:t>
+              <a:t>Let us copy Evidence of Continental Drift. The following evidence supports the theory. On this slide we have Jigsaw fit and Fossils. Write each point on a new line, with the key term first, and explain it in your own words when we revise. When you finish, we go to the next slide.</a:t>
             </a:r>
             <a:endParaRPr lang="en-US" dirty="0"/>
           </a:p>
@@ -3010,7 +3014,7 @@
           <a:p>
             <a:r>
               <a:rPr lang="en-US" dirty="0"/>
-              <a:t>Now let us check what you have understood. Question 2: Give two pieces of evidence for continental drift. Answer in your exercise book.</a:t>
+              <a:t>We continue with Evidence of Continental Drift. On this slide we have Rocks and Old ice marks. Write each point on a new line, with the key term first, and explain it in your own words when we revise.</a:t>
             </a:r>
             <a:endParaRPr lang="en-US" dirty="0"/>
           </a:p>
@@ -3098,7 +3102,7 @@
           <a:p>
             <a:r>
               <a:rPr lang="en-US" dirty="0"/>
-              <a:t>The expected answer is: the jigsaw fit and the same fossils on both continents. If you got it right, well done.</a:t>
+              <a:t>Now draw this illustration in your notebook: the jigsaw fit of the continents. Give it a title and label it clearly.</a:t>
             </a:r>
             <a:endParaRPr lang="en-US" dirty="0"/>
           </a:p>
@@ -3186,7 +3190,7 @@
           <a:p>
             <a:r>
               <a:rPr lang="en-US" dirty="0"/>
-              <a:t>Take your time to copy this part; we will continue together.</a:t>
+              <a:t>Now let us check what you have understood. Question 1: What is Pangaea? Answer in your exercise book.</a:t>
             </a:r>
             <a:endParaRPr lang="en-US" dirty="0"/>
           </a:p>
@@ -3274,7 +3278,7 @@
           <a:p>
             <a:r>
               <a:rPr lang="en-US" dirty="0"/>
-              <a:t>For those who need more practice, fill in the blanks in your exercise book. The answers are: number 1, Wegener; number 2, Pangaea; number 3, puzzle (jigsaw).</a:t>
+              <a:t>The expected answer is: the single big continent of long ago. If you got it right, well done.</a:t>
             </a:r>
             <a:endParaRPr lang="en-US" dirty="0"/>
           </a:p>
@@ -3362,7 +3366,7 @@
           <a:p>
             <a:r>
               <a:rPr lang="en-US" dirty="0"/>
-              <a:t>For your homework: Listen to the news or ask an adult about a recent earthquake or volcanic eruption in the world. Write the name of the country and what happened. We shall correct it at the beginning of our next lesson.</a:t>
+              <a:t>Now let us check what you have understood. Question 2: Give two pieces of evidence for continental drift. Answer in your exercise book.</a:t>
             </a:r>
             <a:endParaRPr lang="en-US" dirty="0"/>
           </a:p>
@@ -3538,7 +3542,7 @@
           <a:p>
             <a:r>
               <a:rPr lang="en-US" dirty="0"/>
-              <a:t>Our next lesson will be on Lesson 10: The Theory of Plate Tectonics. Thank you for your attention, and see you next time.</a:t>
+              <a:t>The expected answer is: the jigsaw fit and the same fossils on both continents. If you got it right, well done.</a:t>
             </a:r>
             <a:endParaRPr lang="en-US" dirty="0"/>
           </a:p>
@@ -3626,7 +3630,7 @@
           <a:p>
             <a:r>
               <a:rPr lang="en-US" dirty="0"/>
-              <a:t>Let us play the bilingual game. I say a word in English, and you give me the French word. Then we do the reverse.</a:t>
+              <a:t>Take your time to copy this part; we will continue together.</a:t>
             </a:r>
             <a:endParaRPr lang="en-US" dirty="0"/>
           </a:p>
@@ -3714,7 +3718,7 @@
           <a:p>
             <a:r>
               <a:rPr lang="en-US" dirty="0"/>
-              <a:t>I record this information in the official logbook of the class after the lesson.</a:t>
+              <a:t>For those who need more practice, fill in the blanks in your exercise book. The answers are: number 1, Wegener; number 2, Pangaea; number 3, puzzle (jigsaw).</a:t>
             </a:r>
             <a:endParaRPr lang="en-US" dirty="0"/>
           </a:p>
@@ -3802,7 +3806,7 @@
           <a:p>
             <a:r>
               <a:rPr lang="en-US" dirty="0"/>
-              <a:t>I complete the second page of the logbook: the matter taught, the evaluation, the homework and the attendance.</a:t>
+              <a:t>For your homework: Listen to the news or ask an adult about a recent earthquake or volcanic eruption in the world. Write the name of the country and what happened. We shall correct it at the beginning of our next lesson.</a:t>
             </a:r>
             <a:endParaRPr lang="en-US" dirty="0"/>
           </a:p>
@@ -3890,7 +3894,7 @@
           <a:p>
             <a:r>
               <a:rPr lang="en-US" dirty="0"/>
-              <a:t>This slide is for me, the teacher: it gives the timing of the lesson and what to do if the projector is not available.</a:t>
+              <a:t>Our next lesson will be on Lesson 10: Plate Tectonics. Thank you for your attention, and see you next time.</a:t>
             </a:r>
             <a:endParaRPr lang="en-US" dirty="0"/>
           </a:p>
@@ -3978,7 +3982,7 @@
           <a:p>
             <a:r>
               <a:rPr lang="en-US" dirty="0"/>
-              <a:t>These are the references and picture credits used to prepare this lesson.</a:t>
+              <a:t>Let us play the bilingual game. I say a word in English, and you give me the French word. Then we do the reverse.</a:t>
             </a:r>
             <a:endParaRPr lang="en-US" dirty="0"/>
           </a:p>
@@ -4002,6 +4006,358 @@
             <a:fld id="{F7021451-1387-4CA6-816F-3879F97B5CBC}" type="slidenum">
               <a:rPr lang="en-US"/>
               <a:t>45</a:t>
+            </a:fld>
+            <a:endParaRPr lang="en-US"/>
+          </a:p>
+        </p:txBody>
+      </p:sp>
+    </p:spTree>
+    <p:extLst>
+      <p:ext uri="{BB962C8B-B14F-4D97-AF65-F5344CB8AC3E}">
+        <p14:creationId xmlns:p14="http://schemas.microsoft.com/office/powerpoint/2010/main" val="1024086991"/>
+      </p:ext>
+    </p:extLst>
+  </p:cSld>
+  <p:clrMapOvr>
+    <a:masterClrMapping/>
+  </p:clrMapOvr>
+</p:notes>
+</file>
+
+<file path=ppt/notesSlides/notesSlide46.xml><?xml version="1.0" encoding="utf-8"?>
+<p:notes xmlns:a="http://schemas.openxmlformats.org/drawingml/2006/main" xmlns:r="http://schemas.openxmlformats.org/officeDocument/2006/relationships" xmlns:p="http://schemas.openxmlformats.org/presentationml/2006/main">
+  <p:cSld>
+    <p:spTree>
+      <p:nvGrpSpPr>
+        <p:cNvPr id="1" name=""/>
+        <p:cNvGrpSpPr/>
+        <p:nvPr/>
+      </p:nvGrpSpPr>
+      <p:grpSpPr>
+        <a:xfrm>
+          <a:off x="0" y="0"/>
+          <a:ext cx="0" cy="0"/>
+          <a:chOff x="0" y="0"/>
+          <a:chExt cx="0" cy="0"/>
+        </a:xfrm>
+      </p:grpSpPr>
+      <p:sp>
+        <p:nvSpPr>
+          <p:cNvPr id="2" name="Slide Image Placeholder 1"/>
+          <p:cNvSpPr>
+            <a:spLocks noGrp="1" noRot="1" noChangeAspect="1"/>
+          </p:cNvSpPr>
+          <p:nvPr>
+            <p:ph type="sldImg"/>
+          </p:nvPr>
+        </p:nvSpPr>
+        <p:spPr/>
+      </p:sp>
+      <p:sp>
+        <p:nvSpPr>
+          <p:cNvPr id="3" name="Notes Placeholder 2"/>
+          <p:cNvSpPr>
+            <a:spLocks noGrp="1"/>
+          </p:cNvSpPr>
+          <p:nvPr>
+            <p:ph type="body" idx="1"/>
+          </p:nvPr>
+        </p:nvSpPr>
+        <p:spPr/>
+        <p:txBody>
+          <a:bodyPr/>
+          <a:lstStyle/>
+          <a:p>
+            <a:r>
+              <a:rPr lang="en-US" dirty="0"/>
+              <a:t>I record this information in the official logbook of the class after the lesson.</a:t>
+            </a:r>
+            <a:endParaRPr lang="en-US" dirty="0"/>
+          </a:p>
+        </p:txBody>
+      </p:sp>
+      <p:sp>
+        <p:nvSpPr>
+          <p:cNvPr id="4" name="Slide Number Placeholder 3"/>
+          <p:cNvSpPr>
+            <a:spLocks noGrp="1"/>
+          </p:cNvSpPr>
+          <p:nvPr>
+            <p:ph type="sldNum" sz="quarter" idx="10"/>
+          </p:nvPr>
+        </p:nvSpPr>
+        <p:spPr/>
+        <p:txBody>
+          <a:bodyPr/>
+          <a:lstStyle/>
+          <a:p>
+            <a:fld id="{F7021451-1387-4CA6-816F-3879F97B5CBC}" type="slidenum">
+              <a:rPr lang="en-US"/>
+              <a:t>46</a:t>
+            </a:fld>
+            <a:endParaRPr lang="en-US"/>
+          </a:p>
+        </p:txBody>
+      </p:sp>
+    </p:spTree>
+    <p:extLst>
+      <p:ext uri="{BB962C8B-B14F-4D97-AF65-F5344CB8AC3E}">
+        <p14:creationId xmlns:p14="http://schemas.microsoft.com/office/powerpoint/2010/main" val="1024086991"/>
+      </p:ext>
+    </p:extLst>
+  </p:cSld>
+  <p:clrMapOvr>
+    <a:masterClrMapping/>
+  </p:clrMapOvr>
+</p:notes>
+</file>
+
+<file path=ppt/notesSlides/notesSlide47.xml><?xml version="1.0" encoding="utf-8"?>
+<p:notes xmlns:a="http://schemas.openxmlformats.org/drawingml/2006/main" xmlns:r="http://schemas.openxmlformats.org/officeDocument/2006/relationships" xmlns:p="http://schemas.openxmlformats.org/presentationml/2006/main">
+  <p:cSld>
+    <p:spTree>
+      <p:nvGrpSpPr>
+        <p:cNvPr id="1" name=""/>
+        <p:cNvGrpSpPr/>
+        <p:nvPr/>
+      </p:nvGrpSpPr>
+      <p:grpSpPr>
+        <a:xfrm>
+          <a:off x="0" y="0"/>
+          <a:ext cx="0" cy="0"/>
+          <a:chOff x="0" y="0"/>
+          <a:chExt cx="0" cy="0"/>
+        </a:xfrm>
+      </p:grpSpPr>
+      <p:sp>
+        <p:nvSpPr>
+          <p:cNvPr id="2" name="Slide Image Placeholder 1"/>
+          <p:cNvSpPr>
+            <a:spLocks noGrp="1" noRot="1" noChangeAspect="1"/>
+          </p:cNvSpPr>
+          <p:nvPr>
+            <p:ph type="sldImg"/>
+          </p:nvPr>
+        </p:nvSpPr>
+        <p:spPr/>
+      </p:sp>
+      <p:sp>
+        <p:nvSpPr>
+          <p:cNvPr id="3" name="Notes Placeholder 2"/>
+          <p:cNvSpPr>
+            <a:spLocks noGrp="1"/>
+          </p:cNvSpPr>
+          <p:nvPr>
+            <p:ph type="body" idx="1"/>
+          </p:nvPr>
+        </p:nvSpPr>
+        <p:spPr/>
+        <p:txBody>
+          <a:bodyPr/>
+          <a:lstStyle/>
+          <a:p>
+            <a:r>
+              <a:rPr lang="en-US" dirty="0"/>
+              <a:t>I complete the second page of the logbook: the matter taught, the evaluation, the homework and the attendance.</a:t>
+            </a:r>
+            <a:endParaRPr lang="en-US" dirty="0"/>
+          </a:p>
+        </p:txBody>
+      </p:sp>
+      <p:sp>
+        <p:nvSpPr>
+          <p:cNvPr id="4" name="Slide Number Placeholder 3"/>
+          <p:cNvSpPr>
+            <a:spLocks noGrp="1"/>
+          </p:cNvSpPr>
+          <p:nvPr>
+            <p:ph type="sldNum" sz="quarter" idx="10"/>
+          </p:nvPr>
+        </p:nvSpPr>
+        <p:spPr/>
+        <p:txBody>
+          <a:bodyPr/>
+          <a:lstStyle/>
+          <a:p>
+            <a:fld id="{F7021451-1387-4CA6-816F-3879F97B5CBC}" type="slidenum">
+              <a:rPr lang="en-US"/>
+              <a:t>47</a:t>
+            </a:fld>
+            <a:endParaRPr lang="en-US"/>
+          </a:p>
+        </p:txBody>
+      </p:sp>
+    </p:spTree>
+    <p:extLst>
+      <p:ext uri="{BB962C8B-B14F-4D97-AF65-F5344CB8AC3E}">
+        <p14:creationId xmlns:p14="http://schemas.microsoft.com/office/powerpoint/2010/main" val="1024086991"/>
+      </p:ext>
+    </p:extLst>
+  </p:cSld>
+  <p:clrMapOvr>
+    <a:masterClrMapping/>
+  </p:clrMapOvr>
+</p:notes>
+</file>
+
+<file path=ppt/notesSlides/notesSlide48.xml><?xml version="1.0" encoding="utf-8"?>
+<p:notes xmlns:a="http://schemas.openxmlformats.org/drawingml/2006/main" xmlns:r="http://schemas.openxmlformats.org/officeDocument/2006/relationships" xmlns:p="http://schemas.openxmlformats.org/presentationml/2006/main">
+  <p:cSld>
+    <p:spTree>
+      <p:nvGrpSpPr>
+        <p:cNvPr id="1" name=""/>
+        <p:cNvGrpSpPr/>
+        <p:nvPr/>
+      </p:nvGrpSpPr>
+      <p:grpSpPr>
+        <a:xfrm>
+          <a:off x="0" y="0"/>
+          <a:ext cx="0" cy="0"/>
+          <a:chOff x="0" y="0"/>
+          <a:chExt cx="0" cy="0"/>
+        </a:xfrm>
+      </p:grpSpPr>
+      <p:sp>
+        <p:nvSpPr>
+          <p:cNvPr id="2" name="Slide Image Placeholder 1"/>
+          <p:cNvSpPr>
+            <a:spLocks noGrp="1" noRot="1" noChangeAspect="1"/>
+          </p:cNvSpPr>
+          <p:nvPr>
+            <p:ph type="sldImg"/>
+          </p:nvPr>
+        </p:nvSpPr>
+        <p:spPr/>
+      </p:sp>
+      <p:sp>
+        <p:nvSpPr>
+          <p:cNvPr id="3" name="Notes Placeholder 2"/>
+          <p:cNvSpPr>
+            <a:spLocks noGrp="1"/>
+          </p:cNvSpPr>
+          <p:nvPr>
+            <p:ph type="body" idx="1"/>
+          </p:nvPr>
+        </p:nvSpPr>
+        <p:spPr/>
+        <p:txBody>
+          <a:bodyPr/>
+          <a:lstStyle/>
+          <a:p>
+            <a:r>
+              <a:rPr lang="en-US" dirty="0"/>
+              <a:t>This slide is for me, the teacher: it gives the timing of the lesson and what to do if the projector is not available.</a:t>
+            </a:r>
+            <a:endParaRPr lang="en-US" dirty="0"/>
+          </a:p>
+        </p:txBody>
+      </p:sp>
+      <p:sp>
+        <p:nvSpPr>
+          <p:cNvPr id="4" name="Slide Number Placeholder 3"/>
+          <p:cNvSpPr>
+            <a:spLocks noGrp="1"/>
+          </p:cNvSpPr>
+          <p:nvPr>
+            <p:ph type="sldNum" sz="quarter" idx="10"/>
+          </p:nvPr>
+        </p:nvSpPr>
+        <p:spPr/>
+        <p:txBody>
+          <a:bodyPr/>
+          <a:lstStyle/>
+          <a:p>
+            <a:fld id="{F7021451-1387-4CA6-816F-3879F97B5CBC}" type="slidenum">
+              <a:rPr lang="en-US"/>
+              <a:t>48</a:t>
+            </a:fld>
+            <a:endParaRPr lang="en-US"/>
+          </a:p>
+        </p:txBody>
+      </p:sp>
+    </p:spTree>
+    <p:extLst>
+      <p:ext uri="{BB962C8B-B14F-4D97-AF65-F5344CB8AC3E}">
+        <p14:creationId xmlns:p14="http://schemas.microsoft.com/office/powerpoint/2010/main" val="1024086991"/>
+      </p:ext>
+    </p:extLst>
+  </p:cSld>
+  <p:clrMapOvr>
+    <a:masterClrMapping/>
+  </p:clrMapOvr>
+</p:notes>
+</file>
+
+<file path=ppt/notesSlides/notesSlide49.xml><?xml version="1.0" encoding="utf-8"?>
+<p:notes xmlns:a="http://schemas.openxmlformats.org/drawingml/2006/main" xmlns:r="http://schemas.openxmlformats.org/officeDocument/2006/relationships" xmlns:p="http://schemas.openxmlformats.org/presentationml/2006/main">
+  <p:cSld>
+    <p:spTree>
+      <p:nvGrpSpPr>
+        <p:cNvPr id="1" name=""/>
+        <p:cNvGrpSpPr/>
+        <p:nvPr/>
+      </p:nvGrpSpPr>
+      <p:grpSpPr>
+        <a:xfrm>
+          <a:off x="0" y="0"/>
+          <a:ext cx="0" cy="0"/>
+          <a:chOff x="0" y="0"/>
+          <a:chExt cx="0" cy="0"/>
+        </a:xfrm>
+      </p:grpSpPr>
+      <p:sp>
+        <p:nvSpPr>
+          <p:cNvPr id="2" name="Slide Image Placeholder 1"/>
+          <p:cNvSpPr>
+            <a:spLocks noGrp="1" noRot="1" noChangeAspect="1"/>
+          </p:cNvSpPr>
+          <p:nvPr>
+            <p:ph type="sldImg"/>
+          </p:nvPr>
+        </p:nvSpPr>
+        <p:spPr/>
+      </p:sp>
+      <p:sp>
+        <p:nvSpPr>
+          <p:cNvPr id="3" name="Notes Placeholder 2"/>
+          <p:cNvSpPr>
+            <a:spLocks noGrp="1"/>
+          </p:cNvSpPr>
+          <p:nvPr>
+            <p:ph type="body" idx="1"/>
+          </p:nvPr>
+        </p:nvSpPr>
+        <p:spPr/>
+        <p:txBody>
+          <a:bodyPr/>
+          <a:lstStyle/>
+          <a:p>
+            <a:r>
+              <a:rPr lang="en-US" dirty="0"/>
+              <a:t>These are the references and picture credits used to prepare this lesson.</a:t>
+            </a:r>
+            <a:endParaRPr lang="en-US" dirty="0"/>
+          </a:p>
+        </p:txBody>
+      </p:sp>
+      <p:sp>
+        <p:nvSpPr>
+          <p:cNvPr id="4" name="Slide Number Placeholder 3"/>
+          <p:cNvSpPr>
+            <a:spLocks noGrp="1"/>
+          </p:cNvSpPr>
+          <p:nvPr>
+            <p:ph type="sldNum" sz="quarter" idx="10"/>
+          </p:nvPr>
+        </p:nvSpPr>
+        <p:spPr/>
+        <p:txBody>
+          <a:bodyPr/>
+          <a:lstStyle/>
+          <a:p>
+            <a:fld id="{F7021451-1387-4CA6-816F-3879F97B5CBC}" type="slidenum">
+              <a:rPr lang="en-US"/>
+              <a:t>49</a:t>
             </a:fld>
             <a:endParaRPr lang="en-US"/>
           </a:p>
@@ -4242,7 +4598,7 @@
           <a:p>
             <a:r>
               <a:rPr lang="en-US" dirty="0"/>
-              <a:t>By the end of this lesson, you should be able to do three things. Number 1: state the theory of continental drift. Number 2: describe the break-up of Pangaea. Number 3: explain the evidence for continental drift.</a:t>
+              <a:t>Take your time to copy this part; we will continue together.</a:t>
             </a:r>
             <a:endParaRPr lang="en-US" dirty="0"/>
           </a:p>
@@ -4330,7 +4686,7 @@
           <a:p>
             <a:r>
               <a:rPr lang="en-US" dirty="0"/>
-              <a:t>Let us first remember what you already know. The crust is broken and lies on the very hot mantle. The mantle flows very slowly. Fossils are found mainly in sedimentary rocks. Keep this in mind, because we shall build on it today.</a:t>
+              <a:t>By the end of this lesson, you should be able to do three things. Number 1: state the main idea of the theory of continental drift. Number 2: illustrate the drifting of the continents. Number 3: explain the evidence for continental drift.</a:t>
             </a:r>
             <a:endParaRPr lang="en-US" dirty="0"/>
           </a:p>
@@ -4418,7 +4774,7 @@
           <a:p>
             <a:r>
               <a:rPr lang="en-US" dirty="0"/>
-              <a:t>Listen carefully to this situation from real life. Djibrilla looks at a map. The coast of Africa and the coast of South America look like two pieces of a puzzle. He wonders if they were once joined. Think about it, because I am going to ask you some questions.</a:t>
+              <a:t>Let us first remember what you already know. The crust is broken and lies on the very hot mantle. The mantle flows very slowly. Fossils are found mainly in sedimentary rocks. Keep this in mind, because we shall build on it today.</a:t>
             </a:r>
             <a:endParaRPr lang="en-US" dirty="0"/>
           </a:p>
@@ -4615,7 +4971,7 @@
               <a:buNone/>
             </a:pPr>
             <a:r>
-              <a:rPr lang="en-US" sz="1600" b="1" dirty="0">
+              <a:rPr lang="en-US" sz="1200" b="1" dirty="0">
                 <a:solidFill>
                   <a:srgbClr val="FFFFFF"/>
                 </a:solidFill>
@@ -4623,9 +4979,9 @@
                 <a:ea typeface="Calibri" pitchFamily="34" charset="-122"/>
                 <a:cs typeface="Calibri" pitchFamily="34" charset="-120"/>
               </a:rPr>
-              <a:t>LESSON 9: THE THEORY OF CONTINENTAL DRIFT</a:t>
-            </a:r>
-            <a:endParaRPr lang="en-US" sz="1600" dirty="0"/>
+              <a:t>LESSON 9: THE THEORIES OF THE EARTH'S STRUCTURE: CONTINENTAL DRIFT</a:t>
+            </a:r>
+            <a:endParaRPr lang="en-US" sz="1200" dirty="0"/>
           </a:p>
         </p:txBody>
       </p:sp>
@@ -5711,7 +6067,7 @@
                 <a:ea typeface="Times New Roman" pitchFamily="34" charset="-122"/>
                 <a:cs typeface="Times New Roman" pitchFamily="34" charset="-120"/>
               </a:rPr>
-              <a:t>The Theory of Continental Drift</a:t>
+              <a:t>The Theories of the Earth's Structure: Continental Drift</a:t>
             </a:r>
             <a:endParaRPr lang="en-US" sz="2600" dirty="0"/>
           </a:p>
@@ -5840,7 +6196,7 @@
                 <a:ea typeface="Times New Roman" pitchFamily="34" charset="-122"/>
                 <a:cs typeface="Times New Roman" pitchFamily="34" charset="-120"/>
               </a:rPr>
-              <a:t>Situation: Question 1</a:t>
+              <a:t>Situation in Real Life</a:t>
             </a:r>
             <a:endParaRPr lang="en-US" sz="3600" dirty="0"/>
           </a:p>
@@ -5882,7 +6238,7 @@
                 <a:ea typeface="Times New Roman" pitchFamily="34" charset="-122"/>
                 <a:cs typeface="Times New Roman" pitchFamily="34" charset="-120"/>
               </a:rPr>
-              <a:t>What is the problem in the situation?</a:t>
+              <a:t>Djibrilla looks at a map. The coast of Africa and the coast of South America look like two pieces of a puzzle. He wonders if they were once joined.</a:t>
             </a:r>
             <a:endParaRPr lang="en-US" sz="4000" dirty="0"/>
           </a:p>
@@ -6059,7 +6415,7 @@
                 <a:ea typeface="Times New Roman" pitchFamily="34" charset="-122"/>
                 <a:cs typeface="Times New Roman" pitchFamily="34" charset="-120"/>
               </a:rPr>
-              <a:t>Answer</a:t>
+              <a:t>Situation: Question 1</a:t>
             </a:r>
             <a:endParaRPr lang="en-US" sz="3600" dirty="0"/>
           </a:p>
@@ -6101,7 +6457,7 @@
                 <a:ea typeface="Times New Roman" pitchFamily="34" charset="-122"/>
                 <a:cs typeface="Times New Roman" pitchFamily="34" charset="-120"/>
               </a:rPr>
-              <a:t>Djibrilla wonders if Africa and South America were once joined.</a:t>
+              <a:t>What is the problem in the situation?</a:t>
             </a:r>
             <a:endParaRPr lang="en-US" sz="4000" dirty="0"/>
           </a:p>
@@ -6278,7 +6634,7 @@
                 <a:ea typeface="Times New Roman" pitchFamily="34" charset="-122"/>
                 <a:cs typeface="Times New Roman" pitchFamily="34" charset="-120"/>
               </a:rPr>
-              <a:t>Situation: Question 2</a:t>
+              <a:t>Answer</a:t>
             </a:r>
             <a:endParaRPr lang="en-US" sz="3600" dirty="0"/>
           </a:p>
@@ -6320,7 +6676,7 @@
                 <a:ea typeface="Times New Roman" pitchFamily="34" charset="-122"/>
                 <a:cs typeface="Times New Roman" pitchFamily="34" charset="-120"/>
               </a:rPr>
-              <a:t>What does he notice?</a:t>
+              <a:t>Djibrilla wonders if Africa and South America were once joined.</a:t>
             </a:r>
             <a:endParaRPr lang="en-US" sz="4000" dirty="0"/>
           </a:p>
@@ -6497,7 +6853,7 @@
                 <a:ea typeface="Times New Roman" pitchFamily="34" charset="-122"/>
                 <a:cs typeface="Times New Roman" pitchFamily="34" charset="-120"/>
               </a:rPr>
-              <a:t>Answer</a:t>
+              <a:t>Situation: Question 2</a:t>
             </a:r>
             <a:endParaRPr lang="en-US" sz="3600" dirty="0"/>
           </a:p>
@@ -6539,7 +6895,7 @@
                 <a:ea typeface="Times New Roman" pitchFamily="34" charset="-122"/>
                 <a:cs typeface="Times New Roman" pitchFamily="34" charset="-120"/>
               </a:rPr>
-              <a:t>The two coasts fit like a puzzle.</a:t>
+              <a:t>What does he notice?</a:t>
             </a:r>
             <a:endParaRPr lang="en-US" sz="4000" dirty="0"/>
           </a:p>
@@ -6716,7 +7072,7 @@
                 <a:ea typeface="Times New Roman" pitchFamily="34" charset="-122"/>
                 <a:cs typeface="Times New Roman" pitchFamily="34" charset="-120"/>
               </a:rPr>
-              <a:t>Situation: Question 3</a:t>
+              <a:t>Answer</a:t>
             </a:r>
             <a:endParaRPr lang="en-US" sz="3600" dirty="0"/>
           </a:p>
@@ -6758,7 +7114,7 @@
                 <a:ea typeface="Times New Roman" pitchFamily="34" charset="-122"/>
                 <a:cs typeface="Times New Roman" pitchFamily="34" charset="-120"/>
               </a:rPr>
-              <a:t>Who first explained this?</a:t>
+              <a:t>The two coasts fit like a puzzle.</a:t>
             </a:r>
             <a:endParaRPr lang="en-US" sz="4000" dirty="0"/>
           </a:p>
@@ -6935,7 +7291,7 @@
                 <a:ea typeface="Times New Roman" pitchFamily="34" charset="-122"/>
                 <a:cs typeface="Times New Roman" pitchFamily="34" charset="-120"/>
               </a:rPr>
-              <a:t>Possible Answer</a:t>
+              <a:t>Situation: Question 3</a:t>
             </a:r>
             <a:endParaRPr lang="en-US" sz="3600" dirty="0"/>
           </a:p>
@@ -6977,7 +7333,7 @@
                 <a:ea typeface="Times New Roman" pitchFamily="34" charset="-122"/>
                 <a:cs typeface="Times New Roman" pitchFamily="34" charset="-120"/>
               </a:rPr>
-              <a:t>Alfred Wegener, in 1912.</a:t>
+              <a:t>Who first explained this?</a:t>
             </a:r>
             <a:endParaRPr lang="en-US" sz="4000" dirty="0"/>
           </a:p>
@@ -7089,7 +7445,7 @@
                 <a:ea typeface="Calibri" pitchFamily="34" charset="-122"/>
                 <a:cs typeface="Calibri" pitchFamily="34" charset="-120"/>
               </a:rPr>
-              <a:t>ACTION TO TAKE</a:t>
+              <a:t>REAL-LIFE SITUATION</a:t>
             </a:r>
             <a:endParaRPr lang="en-US" sz="1400" dirty="0"/>
           </a:p>
@@ -7154,7 +7510,7 @@
                 <a:ea typeface="Times New Roman" pitchFamily="34" charset="-122"/>
                 <a:cs typeface="Times New Roman" pitchFamily="34" charset="-120"/>
               </a:rPr>
-              <a:t>Action to Take</a:t>
+              <a:t>Possible Answer</a:t>
             </a:r>
             <a:endParaRPr lang="en-US" sz="3600" dirty="0"/>
           </a:p>
@@ -7196,7 +7552,7 @@
                 <a:ea typeface="Times New Roman" pitchFamily="34" charset="-122"/>
                 <a:cs typeface="Times New Roman" pitchFamily="34" charset="-120"/>
               </a:rPr>
-              <a:t>Use maps and evidence to explain how the continents moved.</a:t>
+              <a:t>Alfred Wegener, in 1912.</a:t>
             </a:r>
             <a:endParaRPr lang="en-US" sz="4000" dirty="0"/>
           </a:p>
@@ -7308,7 +7664,7 @@
                 <a:ea typeface="Calibri" pitchFamily="34" charset="-122"/>
                 <a:cs typeface="Calibri" pitchFamily="34" charset="-120"/>
               </a:rPr>
-              <a:t>JUSTIFICATION</a:t>
+              <a:t>ACTION TO TAKE</a:t>
             </a:r>
             <a:endParaRPr lang="en-US" sz="1400" dirty="0"/>
           </a:p>
@@ -7373,7 +7729,7 @@
                 <a:ea typeface="Times New Roman" pitchFamily="34" charset="-122"/>
                 <a:cs typeface="Times New Roman" pitchFamily="34" charset="-120"/>
               </a:rPr>
-              <a:t>Justification of the Lesson</a:t>
+              <a:t>Action to Take</a:t>
             </a:r>
             <a:endParaRPr lang="en-US" sz="3600" dirty="0"/>
           </a:p>
@@ -7415,7 +7771,7 @@
                 <a:ea typeface="Times New Roman" pitchFamily="34" charset="-122"/>
                 <a:cs typeface="Times New Roman" pitchFamily="34" charset="-120"/>
               </a:rPr>
-              <a:t>This lesson helps us to understand that the continents move.</a:t>
+              <a:t>Use maps and evidence to explain how the continents moved.</a:t>
             </a:r>
             <a:endParaRPr lang="en-US" sz="4000" dirty="0"/>
           </a:p>
@@ -7527,54 +7883,15 @@
                 <a:ea typeface="Calibri" pitchFamily="34" charset="-122"/>
                 <a:cs typeface="Calibri" pitchFamily="34" charset="-120"/>
               </a:rPr>
-              <a:t>1. THE THEORY</a:t>
+              <a:t>JUSTIFICATION</a:t>
             </a:r>
             <a:endParaRPr lang="en-US" sz="1400" dirty="0"/>
-          </a:p>
-        </p:txBody>
-      </p:sp>
-      <p:sp>
-        <p:nvSpPr>
-          <p:cNvPr id="3" name="Text 1"/>
-          <p:cNvSpPr/>
-          <p:nvPr/>
-        </p:nvSpPr>
-        <p:spPr>
-          <a:xfrm>
-            <a:off x="457200" y="1005840"/>
-            <a:ext cx="11277295" cy="731520"/>
-          </a:xfrm>
-          <a:prstGeom prst="rect">
-            <a:avLst/>
-          </a:prstGeom>
-          <a:noFill/>
-          <a:ln/>
-        </p:spPr>
-        <p:txBody>
-          <a:bodyPr wrap="square" lIns="0" tIns="0" rIns="0" bIns="0" rtlCol="0" anchor="ctr"/>
-          <a:lstStyle/>
-          <a:p>
-            <a:pPr algn="ctr" indent="0" marL="0">
-              <a:buNone/>
-            </a:pPr>
-            <a:r>
-              <a:rPr lang="en-US" sz="3600" b="1" dirty="0">
-                <a:solidFill>
-                  <a:srgbClr val="990011"/>
-                </a:solidFill>
-                <a:latin typeface="Times New Roman" pitchFamily="34" charset="0"/>
-                <a:ea typeface="Times New Roman" pitchFamily="34" charset="-122"/>
-                <a:cs typeface="Times New Roman" pitchFamily="34" charset="-120"/>
-              </a:rPr>
-              <a:t>Activity 1</a:t>
-            </a:r>
-            <a:endParaRPr lang="en-US" sz="3600" dirty="0"/>
           </a:p>
         </p:txBody>
       </p:sp>
       <p:pic>
         <p:nvPicPr>
-          <p:cNvPr id="4" name="Image 0" descr="/home/claude/f4/img/v2/jigsaw.gif">    </p:cNvPr>
+          <p:cNvPr id="3" name="Image 0" descr="/home/claude/f4/img/minesec_sheet.png">    </p:cNvPr>
           <p:cNvPicPr>
             <a:picLocks noChangeAspect="1"/>
           </p:cNvPicPr>
@@ -7588,8 +7905,8 @@
         </p:blipFill>
         <p:spPr>
           <a:xfrm>
-            <a:off x="1825600" y="1783080"/>
-            <a:ext cx="8540496" cy="4270248"/>
+            <a:off x="0" y="658368"/>
+            <a:ext cx="5120640" cy="5833872"/>
           </a:xfrm>
           <a:prstGeom prst="rect">
             <a:avLst/>
@@ -7598,14 +7915,14 @@
       </p:pic>
       <p:sp>
         <p:nvSpPr>
-          <p:cNvPr id="5" name="Text 2"/>
+          <p:cNvPr id="4" name="Text 1"/>
           <p:cNvSpPr/>
           <p:nvPr/>
         </p:nvSpPr>
         <p:spPr>
           <a:xfrm>
-            <a:off x="457200" y="6089904"/>
-            <a:ext cx="11277295" cy="347472"/>
+            <a:off x="5349240" y="1005840"/>
+            <a:ext cx="6522415" cy="731520"/>
           </a:xfrm>
           <a:prstGeom prst="rect">
             <a:avLst/>
@@ -7614,24 +7931,68 @@
           <a:ln/>
         </p:spPr>
         <p:txBody>
-          <a:bodyPr wrap="square" lIns="0" tIns="0" rIns="0" bIns="0" rtlCol="0" anchor="ctr"/>
+          <a:bodyPr wrap="square" lIns="0" tIns="0" rIns="0" bIns="0" rtlCol="0" anchor="ctr">
+            <a:normAutofit/>
+          </a:bodyPr>
           <a:lstStyle/>
           <a:p>
             <a:pPr algn="ctr" indent="0" marL="0">
               <a:buNone/>
             </a:pPr>
             <a:r>
-              <a:rPr lang="en-US" sz="1800" i="1" dirty="0">
-                <a:solidFill>
-                  <a:srgbClr val="555555"/>
+              <a:rPr lang="en-US" sz="3600" b="1" dirty="0">
+                <a:solidFill>
+                  <a:srgbClr val="990011"/>
                 </a:solidFill>
                 <a:latin typeface="Times New Roman" pitchFamily="34" charset="0"/>
                 <a:ea typeface="Times New Roman" pitchFamily="34" charset="-122"/>
                 <a:cs typeface="Times New Roman" pitchFamily="34" charset="-120"/>
               </a:rPr>
-              <a:t>Animation: closing the Atlantic Ocean.</a:t>
-            </a:r>
-            <a:endParaRPr lang="en-US" sz="1800" dirty="0"/>
+              <a:t>Justification of the Lesson</a:t>
+            </a:r>
+            <a:endParaRPr lang="en-US" sz="3600" dirty="0"/>
+          </a:p>
+        </p:txBody>
+      </p:sp>
+      <p:sp>
+        <p:nvSpPr>
+          <p:cNvPr id="5" name="Text 2"/>
+          <p:cNvSpPr/>
+          <p:nvPr/>
+        </p:nvSpPr>
+        <p:spPr>
+          <a:xfrm>
+            <a:off x="5349240" y="1783080"/>
+            <a:ext cx="6522415" cy="4663440"/>
+          </a:xfrm>
+          <a:prstGeom prst="rect">
+            <a:avLst/>
+          </a:prstGeom>
+          <a:noFill/>
+          <a:ln/>
+        </p:spPr>
+        <p:txBody>
+          <a:bodyPr wrap="square" lIns="0" tIns="0" rIns="0" bIns="0" rtlCol="0" anchor="t"/>
+          <a:lstStyle/>
+          <a:p>
+            <a:pPr algn="l" indent="0" marL="0">
+              <a:spcAft>
+                <a:spcPts val="800"/>
+              </a:spcAft>
+              <a:buNone/>
+            </a:pPr>
+            <a:r>
+              <a:rPr lang="en-US" sz="4000" dirty="0">
+                <a:solidFill>
+                  <a:srgbClr val="111111"/>
+                </a:solidFill>
+                <a:latin typeface="Times New Roman" pitchFamily="34" charset="0"/>
+                <a:ea typeface="Times New Roman" pitchFamily="34" charset="-122"/>
+                <a:cs typeface="Times New Roman" pitchFamily="34" charset="-120"/>
+              </a:rPr>
+              <a:t>This lesson helps us to understand that the continents move.</a:t>
+            </a:r>
+            <a:endParaRPr lang="en-US" sz="4000" dirty="0"/>
           </a:p>
         </p:txBody>
       </p:sp>
@@ -7741,15 +8102,54 @@
                 <a:ea typeface="Calibri" pitchFamily="34" charset="-122"/>
                 <a:cs typeface="Calibri" pitchFamily="34" charset="-120"/>
               </a:rPr>
-              <a:t>1. THE THEORY</a:t>
+              <a:t>1. MAIN IDEA</a:t>
             </a:r>
             <a:endParaRPr lang="en-US" sz="1400" dirty="0"/>
+          </a:p>
+        </p:txBody>
+      </p:sp>
+      <p:sp>
+        <p:nvSpPr>
+          <p:cNvPr id="3" name="Text 1"/>
+          <p:cNvSpPr/>
+          <p:nvPr/>
+        </p:nvSpPr>
+        <p:spPr>
+          <a:xfrm>
+            <a:off x="457200" y="1005840"/>
+            <a:ext cx="11277295" cy="731520"/>
+          </a:xfrm>
+          <a:prstGeom prst="rect">
+            <a:avLst/>
+          </a:prstGeom>
+          <a:noFill/>
+          <a:ln/>
+        </p:spPr>
+        <p:txBody>
+          <a:bodyPr wrap="square" lIns="0" tIns="0" rIns="0" bIns="0" rtlCol="0" anchor="ctr"/>
+          <a:lstStyle/>
+          <a:p>
+            <a:pPr algn="ctr" indent="0" marL="0">
+              <a:buNone/>
+            </a:pPr>
+            <a:r>
+              <a:rPr lang="en-US" sz="3600" b="1" dirty="0">
+                <a:solidFill>
+                  <a:srgbClr val="990011"/>
+                </a:solidFill>
+                <a:latin typeface="Times New Roman" pitchFamily="34" charset="0"/>
+                <a:ea typeface="Times New Roman" pitchFamily="34" charset="-122"/>
+                <a:cs typeface="Times New Roman" pitchFamily="34" charset="-120"/>
+              </a:rPr>
+              <a:t>Activity 1</a:t>
+            </a:r>
+            <a:endParaRPr lang="en-US" sz="3600" dirty="0"/>
           </a:p>
         </p:txBody>
       </p:sp>
       <p:pic>
         <p:nvPicPr>
-          <p:cNvPr id="3" name="Image 0" descr="/home/claude/f4/img/minesec_sheet.png">    </p:cNvPr>
+          <p:cNvPr id="4" name="Image 0" descr="/home/claude/f4/img/v2/jigsaw.gif">    </p:cNvPr>
           <p:cNvPicPr>
             <a:picLocks noChangeAspect="1"/>
           </p:cNvPicPr>
@@ -7763,8 +8163,8 @@
         </p:blipFill>
         <p:spPr>
           <a:xfrm>
-            <a:off x="0" y="658368"/>
-            <a:ext cx="5120640" cy="5833872"/>
+            <a:off x="1825600" y="1783080"/>
+            <a:ext cx="8540496" cy="4270248"/>
           </a:xfrm>
           <a:prstGeom prst="rect">
             <a:avLst/>
@@ -7773,14 +8173,14 @@
       </p:pic>
       <p:sp>
         <p:nvSpPr>
-          <p:cNvPr id="4" name="Text 1"/>
+          <p:cNvPr id="5" name="Text 2"/>
           <p:cNvSpPr/>
           <p:nvPr/>
         </p:nvSpPr>
         <p:spPr>
           <a:xfrm>
-            <a:off x="5349240" y="1005840"/>
-            <a:ext cx="6522415" cy="731520"/>
+            <a:off x="457200" y="6089904"/>
+            <a:ext cx="11277295" cy="347472"/>
           </a:xfrm>
           <a:prstGeom prst="rect">
             <a:avLst/>
@@ -7789,68 +8189,24 @@
           <a:ln/>
         </p:spPr>
         <p:txBody>
-          <a:bodyPr wrap="square" lIns="0" tIns="0" rIns="0" bIns="0" rtlCol="0" anchor="ctr">
-            <a:normAutofit/>
-          </a:bodyPr>
+          <a:bodyPr wrap="square" lIns="0" tIns="0" rIns="0" bIns="0" rtlCol="0" anchor="ctr"/>
           <a:lstStyle/>
           <a:p>
             <a:pPr algn="ctr" indent="0" marL="0">
               <a:buNone/>
             </a:pPr>
             <a:r>
-              <a:rPr lang="en-US" sz="3600" b="1" dirty="0">
-                <a:solidFill>
-                  <a:srgbClr val="990011"/>
+              <a:rPr lang="en-US" sz="1800" i="1" dirty="0">
+                <a:solidFill>
+                  <a:srgbClr val="555555"/>
                 </a:solidFill>
                 <a:latin typeface="Times New Roman" pitchFamily="34" charset="0"/>
                 <a:ea typeface="Times New Roman" pitchFamily="34" charset="-122"/>
                 <a:cs typeface="Times New Roman" pitchFamily="34" charset="-120"/>
               </a:rPr>
-              <a:t>Activity 1: Question</a:t>
-            </a:r>
-            <a:endParaRPr lang="en-US" sz="3600" dirty="0"/>
-          </a:p>
-        </p:txBody>
-      </p:sp>
-      <p:sp>
-        <p:nvSpPr>
-          <p:cNvPr id="5" name="Text 2"/>
-          <p:cNvSpPr/>
-          <p:nvPr/>
-        </p:nvSpPr>
-        <p:spPr>
-          <a:xfrm>
-            <a:off x="5349240" y="1783080"/>
-            <a:ext cx="6522415" cy="4663440"/>
-          </a:xfrm>
-          <a:prstGeom prst="rect">
-            <a:avLst/>
-          </a:prstGeom>
-          <a:noFill/>
-          <a:ln/>
-        </p:spPr>
-        <p:txBody>
-          <a:bodyPr wrap="square" lIns="0" tIns="0" rIns="0" bIns="0" rtlCol="0" anchor="t"/>
-          <a:lstStyle/>
-          <a:p>
-            <a:pPr algn="l" indent="0" marL="0">
-              <a:spcAft>
-                <a:spcPts val="800"/>
-              </a:spcAft>
-              <a:buNone/>
-            </a:pPr>
-            <a:r>
-              <a:rPr lang="en-US" sz="4000" dirty="0">
-                <a:solidFill>
-                  <a:srgbClr val="111111"/>
-                </a:solidFill>
-                <a:latin typeface="Times New Roman" pitchFamily="34" charset="0"/>
-                <a:ea typeface="Times New Roman" pitchFamily="34" charset="-122"/>
-                <a:cs typeface="Times New Roman" pitchFamily="34" charset="-120"/>
-              </a:rPr>
-              <a:t>What happens when we bring South America near Africa?</a:t>
-            </a:r>
-            <a:endParaRPr lang="en-US" sz="4000" dirty="0"/>
+              <a:t>Animation: closing the Atlantic Ocean.</a:t>
+            </a:r>
+            <a:endParaRPr lang="en-US" sz="1800" dirty="0"/>
           </a:p>
         </p:txBody>
       </p:sp>
@@ -8255,7 +8611,7 @@
                           <a:ea typeface="Calibri" pitchFamily="34" charset="-122"/>
                           <a:cs typeface="Calibri" pitchFamily="34" charset="-120"/>
                         </a:rPr>
-                        <a:t>The Structure of the Earth: Building Processes and Impacts on Man — Internal Structure of the Earth</a:t>
+                        <a:t>The Structure of the Earth: Building Processes and Impacts on Man — Structure of the Earth</a:t>
                       </a:r>
                       <a:endParaRPr lang="en-US" sz="2200" dirty="0">
                         <a:latin typeface="Calibri" charset="0"/>
@@ -8555,7 +8911,7 @@
                 <a:ea typeface="Calibri" pitchFamily="34" charset="-122"/>
                 <a:cs typeface="Calibri" pitchFamily="34" charset="-120"/>
               </a:rPr>
-              <a:t>1. THE THEORY</a:t>
+              <a:t>1. MAIN IDEA</a:t>
             </a:r>
             <a:endParaRPr lang="en-US" sz="1400" dirty="0"/>
           </a:p>
@@ -8620,7 +8976,7 @@
                 <a:ea typeface="Times New Roman" pitchFamily="34" charset="-122"/>
                 <a:cs typeface="Times New Roman" pitchFamily="34" charset="-120"/>
               </a:rPr>
-              <a:t>Activity 1: Answer</a:t>
+              <a:t>Activity 1: Question</a:t>
             </a:r>
             <a:endParaRPr lang="en-US" sz="3600" dirty="0"/>
           </a:p>
@@ -8662,7 +9018,7 @@
                 <a:ea typeface="Times New Roman" pitchFamily="34" charset="-122"/>
                 <a:cs typeface="Times New Roman" pitchFamily="34" charset="-120"/>
               </a:rPr>
-              <a:t>The two coasts fit together like a puzzle.</a:t>
+              <a:t>What happens when we bring South America near Africa? What did Wegener conclude?</a:t>
             </a:r>
             <a:endParaRPr lang="en-US" sz="4000" dirty="0"/>
           </a:p>
@@ -8774,54 +9130,15 @@
                 <a:ea typeface="Calibri" pitchFamily="34" charset="-122"/>
                 <a:cs typeface="Calibri" pitchFamily="34" charset="-120"/>
               </a:rPr>
-              <a:t>2. EVIDENCE</a:t>
+              <a:t>1. MAIN IDEA</a:t>
             </a:r>
             <a:endParaRPr lang="en-US" sz="1400" dirty="0"/>
-          </a:p>
-        </p:txBody>
-      </p:sp>
-      <p:sp>
-        <p:nvSpPr>
-          <p:cNvPr id="3" name="Text 1"/>
-          <p:cNvSpPr/>
-          <p:nvPr/>
-        </p:nvSpPr>
-        <p:spPr>
-          <a:xfrm>
-            <a:off x="457200" y="1005840"/>
-            <a:ext cx="11277295" cy="731520"/>
-          </a:xfrm>
-          <a:prstGeom prst="rect">
-            <a:avLst/>
-          </a:prstGeom>
-          <a:noFill/>
-          <a:ln/>
-        </p:spPr>
-        <p:txBody>
-          <a:bodyPr wrap="square" lIns="0" tIns="0" rIns="0" bIns="0" rtlCol="0" anchor="ctr"/>
-          <a:lstStyle/>
-          <a:p>
-            <a:pPr algn="ctr" indent="0" marL="0">
-              <a:buNone/>
-            </a:pPr>
-            <a:r>
-              <a:rPr lang="en-US" sz="3600" b="1" dirty="0">
-                <a:solidFill>
-                  <a:srgbClr val="990011"/>
-                </a:solidFill>
-                <a:latin typeface="Times New Roman" pitchFamily="34" charset="0"/>
-                <a:ea typeface="Times New Roman" pitchFamily="34" charset="-122"/>
-                <a:cs typeface="Times New Roman" pitchFamily="34" charset="-120"/>
-              </a:rPr>
-              <a:t>Activity 2</a:t>
-            </a:r>
-            <a:endParaRPr lang="en-US" sz="3600" dirty="0"/>
           </a:p>
         </p:txBody>
       </p:sp>
       <p:pic>
         <p:nvPicPr>
-          <p:cNvPr id="4" name="Image 0" descr="/home/claude/f4/img/v2/f4_fossil.jpg">    </p:cNvPr>
+          <p:cNvPr id="3" name="Image 0" descr="/home/claude/f4/img/minesec_sheet.png">    </p:cNvPr>
           <p:cNvPicPr>
             <a:picLocks noChangeAspect="1"/>
           </p:cNvPicPr>
@@ -8835,8 +9152,8 @@
         </p:blipFill>
         <p:spPr>
           <a:xfrm>
-            <a:off x="2246610" y="1783080"/>
-            <a:ext cx="7698475" cy="4270248"/>
+            <a:off x="0" y="658368"/>
+            <a:ext cx="5120640" cy="5833872"/>
           </a:xfrm>
           <a:prstGeom prst="rect">
             <a:avLst/>
@@ -8845,14 +9162,14 @@
       </p:pic>
       <p:sp>
         <p:nvSpPr>
-          <p:cNvPr id="5" name="Text 2"/>
+          <p:cNvPr id="4" name="Text 1"/>
           <p:cNvSpPr/>
           <p:nvPr/>
         </p:nvSpPr>
         <p:spPr>
           <a:xfrm>
-            <a:off x="457200" y="6089904"/>
-            <a:ext cx="11277295" cy="347472"/>
+            <a:off x="5349240" y="1005840"/>
+            <a:ext cx="6522415" cy="731520"/>
           </a:xfrm>
           <a:prstGeom prst="rect">
             <a:avLst/>
@@ -8861,24 +9178,68 @@
           <a:ln/>
         </p:spPr>
         <p:txBody>
-          <a:bodyPr wrap="square" lIns="0" tIns="0" rIns="0" bIns="0" rtlCol="0" anchor="ctr"/>
+          <a:bodyPr wrap="square" lIns="0" tIns="0" rIns="0" bIns="0" rtlCol="0" anchor="ctr">
+            <a:normAutofit/>
+          </a:bodyPr>
           <a:lstStyle/>
           <a:p>
             <a:pPr algn="ctr" indent="0" marL="0">
               <a:buNone/>
             </a:pPr>
             <a:r>
-              <a:rPr lang="en-US" sz="1800" i="1" dirty="0">
-                <a:solidFill>
-                  <a:srgbClr val="555555"/>
+              <a:rPr lang="en-US" sz="3600" b="1" dirty="0">
+                <a:solidFill>
+                  <a:srgbClr val="990011"/>
                 </a:solidFill>
                 <a:latin typeface="Times New Roman" pitchFamily="34" charset="0"/>
                 <a:ea typeface="Times New Roman" pitchFamily="34" charset="-122"/>
                 <a:cs typeface="Times New Roman" pitchFamily="34" charset="-120"/>
               </a:rPr>
-              <a:t>A fossil of a fish in rock.</a:t>
-            </a:r>
-            <a:endParaRPr lang="en-US" sz="1800" dirty="0"/>
+              <a:t>Activity 1: Answer</a:t>
+            </a:r>
+            <a:endParaRPr lang="en-US" sz="3600" dirty="0"/>
+          </a:p>
+        </p:txBody>
+      </p:sp>
+      <p:sp>
+        <p:nvSpPr>
+          <p:cNvPr id="5" name="Text 2"/>
+          <p:cNvSpPr/>
+          <p:nvPr/>
+        </p:nvSpPr>
+        <p:spPr>
+          <a:xfrm>
+            <a:off x="5349240" y="1783080"/>
+            <a:ext cx="6522415" cy="4663440"/>
+          </a:xfrm>
+          <a:prstGeom prst="rect">
+            <a:avLst/>
+          </a:prstGeom>
+          <a:noFill/>
+          <a:ln/>
+        </p:spPr>
+        <p:txBody>
+          <a:bodyPr wrap="square" lIns="0" tIns="0" rIns="0" bIns="0" rtlCol="0" anchor="t"/>
+          <a:lstStyle/>
+          <a:p>
+            <a:pPr algn="l" indent="0" marL="0">
+              <a:spcAft>
+                <a:spcPts val="800"/>
+              </a:spcAft>
+              <a:buNone/>
+            </a:pPr>
+            <a:r>
+              <a:rPr lang="en-US" sz="4000" dirty="0">
+                <a:solidFill>
+                  <a:srgbClr val="111111"/>
+                </a:solidFill>
+                <a:latin typeface="Times New Roman" pitchFamily="34" charset="0"/>
+                <a:ea typeface="Times New Roman" pitchFamily="34" charset="-122"/>
+                <a:cs typeface="Times New Roman" pitchFamily="34" charset="-120"/>
+              </a:rPr>
+              <a:t>The two coasts fit together like a puzzle, so the continents were once joined and have drifted apart.</a:t>
+            </a:r>
+            <a:endParaRPr lang="en-US" sz="4000" dirty="0"/>
           </a:p>
         </p:txBody>
       </p:sp>
@@ -8988,15 +9349,54 @@
                 <a:ea typeface="Calibri" pitchFamily="34" charset="-122"/>
                 <a:cs typeface="Calibri" pitchFamily="34" charset="-120"/>
               </a:rPr>
-              <a:t>2. EVIDENCE</a:t>
+              <a:t>2. ILLUSTRATION OF DRIFTING</a:t>
             </a:r>
             <a:endParaRPr lang="en-US" sz="1400" dirty="0"/>
+          </a:p>
+        </p:txBody>
+      </p:sp>
+      <p:sp>
+        <p:nvSpPr>
+          <p:cNvPr id="3" name="Text 1"/>
+          <p:cNvSpPr/>
+          <p:nvPr/>
+        </p:nvSpPr>
+        <p:spPr>
+          <a:xfrm>
+            <a:off x="457200" y="1005840"/>
+            <a:ext cx="11277295" cy="731520"/>
+          </a:xfrm>
+          <a:prstGeom prst="rect">
+            <a:avLst/>
+          </a:prstGeom>
+          <a:noFill/>
+          <a:ln/>
+        </p:spPr>
+        <p:txBody>
+          <a:bodyPr wrap="square" lIns="0" tIns="0" rIns="0" bIns="0" rtlCol="0" anchor="ctr"/>
+          <a:lstStyle/>
+          <a:p>
+            <a:pPr algn="ctr" indent="0" marL="0">
+              <a:buNone/>
+            </a:pPr>
+            <a:r>
+              <a:rPr lang="en-US" sz="3600" b="1" dirty="0">
+                <a:solidFill>
+                  <a:srgbClr val="990011"/>
+                </a:solidFill>
+                <a:latin typeface="Times New Roman" pitchFamily="34" charset="0"/>
+                <a:ea typeface="Times New Roman" pitchFamily="34" charset="-122"/>
+                <a:cs typeface="Times New Roman" pitchFamily="34" charset="-120"/>
+              </a:rPr>
+              <a:t>Activity 2</a:t>
+            </a:r>
+            <a:endParaRPr lang="en-US" sz="3600" dirty="0"/>
           </a:p>
         </p:txBody>
       </p:sp>
       <p:pic>
         <p:nvPicPr>
-          <p:cNvPr id="3" name="Image 0" descr="/home/claude/f4/img/minesec_sheet.png">    </p:cNvPr>
+          <p:cNvPr id="4" name="Image 0" descr="/home/claude/f4/img/v2/drift_stages_big.png">    </p:cNvPr>
           <p:cNvPicPr>
             <a:picLocks noChangeAspect="1"/>
           </p:cNvPicPr>
@@ -9010,8 +9410,8 @@
         </p:blipFill>
         <p:spPr>
           <a:xfrm>
-            <a:off x="0" y="658368"/>
-            <a:ext cx="5120640" cy="5833872"/>
+            <a:off x="629930" y="1783080"/>
+            <a:ext cx="10931835" cy="4270248"/>
           </a:xfrm>
           <a:prstGeom prst="rect">
             <a:avLst/>
@@ -9020,14 +9420,14 @@
       </p:pic>
       <p:sp>
         <p:nvSpPr>
-          <p:cNvPr id="4" name="Text 1"/>
+          <p:cNvPr id="5" name="Text 2"/>
           <p:cNvSpPr/>
           <p:nvPr/>
         </p:nvSpPr>
         <p:spPr>
           <a:xfrm>
-            <a:off x="5349240" y="1005840"/>
-            <a:ext cx="6522415" cy="731520"/>
+            <a:off x="457200" y="6089904"/>
+            <a:ext cx="11277295" cy="347472"/>
           </a:xfrm>
           <a:prstGeom prst="rect">
             <a:avLst/>
@@ -9036,68 +9436,24 @@
           <a:ln/>
         </p:spPr>
         <p:txBody>
-          <a:bodyPr wrap="square" lIns="0" tIns="0" rIns="0" bIns="0" rtlCol="0" anchor="ctr">
-            <a:normAutofit/>
-          </a:bodyPr>
+          <a:bodyPr wrap="square" lIns="0" tIns="0" rIns="0" bIns="0" rtlCol="0" anchor="ctr"/>
           <a:lstStyle/>
           <a:p>
             <a:pPr algn="ctr" indent="0" marL="0">
               <a:buNone/>
             </a:pPr>
             <a:r>
-              <a:rPr lang="en-US" sz="3600" b="1" dirty="0">
-                <a:solidFill>
-                  <a:srgbClr val="990011"/>
+              <a:rPr lang="en-US" sz="1800" i="1" dirty="0">
+                <a:solidFill>
+                  <a:srgbClr val="555555"/>
                 </a:solidFill>
                 <a:latin typeface="Times New Roman" pitchFamily="34" charset="0"/>
                 <a:ea typeface="Times New Roman" pitchFamily="34" charset="-122"/>
                 <a:cs typeface="Times New Roman" pitchFamily="34" charset="-120"/>
               </a:rPr>
-              <a:t>Activity 2: Question</a:t>
-            </a:r>
-            <a:endParaRPr lang="en-US" sz="3600" dirty="0"/>
-          </a:p>
-        </p:txBody>
-      </p:sp>
-      <p:sp>
-        <p:nvSpPr>
-          <p:cNvPr id="5" name="Text 2"/>
-          <p:cNvSpPr/>
-          <p:nvPr/>
-        </p:nvSpPr>
-        <p:spPr>
-          <a:xfrm>
-            <a:off x="5349240" y="1783080"/>
-            <a:ext cx="6522415" cy="4663440"/>
-          </a:xfrm>
-          <a:prstGeom prst="rect">
-            <a:avLst/>
-          </a:prstGeom>
-          <a:noFill/>
-          <a:ln/>
-        </p:spPr>
-        <p:txBody>
-          <a:bodyPr wrap="square" lIns="0" tIns="0" rIns="0" bIns="0" rtlCol="0" anchor="t"/>
-          <a:lstStyle/>
-          <a:p>
-            <a:pPr algn="l" indent="0" marL="0">
-              <a:spcAft>
-                <a:spcPts val="800"/>
-              </a:spcAft>
-              <a:buNone/>
-            </a:pPr>
-            <a:r>
-              <a:rPr lang="en-US" sz="4000" dirty="0">
-                <a:solidFill>
-                  <a:srgbClr val="111111"/>
-                </a:solidFill>
-                <a:latin typeface="Times New Roman" pitchFamily="34" charset="0"/>
-                <a:ea typeface="Times New Roman" pitchFamily="34" charset="-122"/>
-                <a:cs typeface="Times New Roman" pitchFamily="34" charset="-120"/>
-              </a:rPr>
-              <a:t>The fossils of the same small reptile (Mesosaurus) are found in Brazil and in southern Africa. What does it prove?</a:t>
-            </a:r>
-            <a:endParaRPr lang="en-US" sz="4000" dirty="0"/>
+              <a:t>The break-up of Pangaea.</a:t>
+            </a:r>
+            <a:endParaRPr lang="en-US" sz="1800" dirty="0"/>
           </a:p>
         </p:txBody>
       </p:sp>
@@ -9207,7 +9563,7 @@
                 <a:ea typeface="Calibri" pitchFamily="34" charset="-122"/>
                 <a:cs typeface="Calibri" pitchFamily="34" charset="-120"/>
               </a:rPr>
-              <a:t>2. EVIDENCE</a:t>
+              <a:t>2. ILLUSTRATION OF DRIFTING</a:t>
             </a:r>
             <a:endParaRPr lang="en-US" sz="1400" dirty="0"/>
           </a:p>
@@ -9272,7 +9628,7 @@
                 <a:ea typeface="Times New Roman" pitchFamily="34" charset="-122"/>
                 <a:cs typeface="Times New Roman" pitchFamily="34" charset="-120"/>
               </a:rPr>
-              <a:t>Activity 2: Answer</a:t>
+              <a:t>Activity 2: Question</a:t>
             </a:r>
             <a:endParaRPr lang="en-US" sz="3600" dirty="0"/>
           </a:p>
@@ -9314,7 +9670,7 @@
                 <a:ea typeface="Times New Roman" pitchFamily="34" charset="-122"/>
                 <a:cs typeface="Times New Roman" pitchFamily="34" charset="-120"/>
               </a:rPr>
-              <a:t>The two continents were once joined.</a:t>
+              <a:t>Describe the drifting of the continents shown on the diagram.</a:t>
             </a:r>
             <a:endParaRPr lang="en-US" sz="4000" dirty="0"/>
           </a:p>
@@ -9426,54 +9782,15 @@
                 <a:ea typeface="Calibri" pitchFamily="34" charset="-122"/>
                 <a:cs typeface="Calibri" pitchFamily="34" charset="-120"/>
               </a:rPr>
-              <a:t>2. EVIDENCE</a:t>
+              <a:t>2. ILLUSTRATION OF DRIFTING</a:t>
             </a:r>
             <a:endParaRPr lang="en-US" sz="1400" dirty="0"/>
-          </a:p>
-        </p:txBody>
-      </p:sp>
-      <p:sp>
-        <p:nvSpPr>
-          <p:cNvPr id="3" name="Text 1"/>
-          <p:cNvSpPr/>
-          <p:nvPr/>
-        </p:nvSpPr>
-        <p:spPr>
-          <a:xfrm>
-            <a:off x="457200" y="1005840"/>
-            <a:ext cx="11277295" cy="731520"/>
-          </a:xfrm>
-          <a:prstGeom prst="rect">
-            <a:avLst/>
-          </a:prstGeom>
-          <a:noFill/>
-          <a:ln/>
-        </p:spPr>
-        <p:txBody>
-          <a:bodyPr wrap="square" lIns="0" tIns="0" rIns="0" bIns="0" rtlCol="0" anchor="ctr"/>
-          <a:lstStyle/>
-          <a:p>
-            <a:pPr algn="ctr" indent="0" marL="0">
-              <a:buNone/>
-            </a:pPr>
-            <a:r>
-              <a:rPr lang="en-US" sz="3600" b="1" dirty="0">
-                <a:solidFill>
-                  <a:srgbClr val="990011"/>
-                </a:solidFill>
-                <a:latin typeface="Times New Roman" pitchFamily="34" charset="0"/>
-                <a:ea typeface="Times New Roman" pitchFamily="34" charset="-122"/>
-                <a:cs typeface="Times New Roman" pitchFamily="34" charset="-120"/>
-              </a:rPr>
-              <a:t>Activity 3</a:t>
-            </a:r>
-            <a:endParaRPr lang="en-US" sz="3600" dirty="0"/>
           </a:p>
         </p:txBody>
       </p:sp>
       <p:pic>
         <p:nvPicPr>
-          <p:cNvPr id="4" name="Image 0" descr="/home/claude/f4/img/v2/f4_thingvellir.jpg">    </p:cNvPr>
+          <p:cNvPr id="3" name="Image 0" descr="/home/claude/f4/img/minesec_sheet.png">    </p:cNvPr>
           <p:cNvPicPr>
             <a:picLocks noChangeAspect="1"/>
           </p:cNvPicPr>
@@ -9487,8 +9804,8 @@
         </p:blipFill>
         <p:spPr>
           <a:xfrm>
-            <a:off x="2246610" y="1783080"/>
-            <a:ext cx="7698475" cy="4270248"/>
+            <a:off x="0" y="658368"/>
+            <a:ext cx="5120640" cy="5833872"/>
           </a:xfrm>
           <a:prstGeom prst="rect">
             <a:avLst/>
@@ -9497,14 +9814,14 @@
       </p:pic>
       <p:sp>
         <p:nvSpPr>
-          <p:cNvPr id="5" name="Text 2"/>
+          <p:cNvPr id="4" name="Text 1"/>
           <p:cNvSpPr/>
           <p:nvPr/>
         </p:nvSpPr>
         <p:spPr>
           <a:xfrm>
-            <a:off x="457200" y="6089904"/>
-            <a:ext cx="11277295" cy="347472"/>
+            <a:off x="5349240" y="1005840"/>
+            <a:ext cx="6522415" cy="731520"/>
           </a:xfrm>
           <a:prstGeom prst="rect">
             <a:avLst/>
@@ -9513,24 +9830,68 @@
           <a:ln/>
         </p:spPr>
         <p:txBody>
-          <a:bodyPr wrap="square" lIns="0" tIns="0" rIns="0" bIns="0" rtlCol="0" anchor="ctr"/>
+          <a:bodyPr wrap="square" lIns="0" tIns="0" rIns="0" bIns="0" rtlCol="0" anchor="ctr">
+            <a:normAutofit/>
+          </a:bodyPr>
           <a:lstStyle/>
           <a:p>
             <a:pPr algn="ctr" indent="0" marL="0">
               <a:buNone/>
             </a:pPr>
             <a:r>
-              <a:rPr lang="en-US" sz="1800" i="1" dirty="0">
-                <a:solidFill>
-                  <a:srgbClr val="555555"/>
+              <a:rPr lang="en-US" sz="3600" b="1" dirty="0">
+                <a:solidFill>
+                  <a:srgbClr val="990011"/>
                 </a:solidFill>
                 <a:latin typeface="Times New Roman" pitchFamily="34" charset="0"/>
                 <a:ea typeface="Times New Roman" pitchFamily="34" charset="-122"/>
                 <a:cs typeface="Times New Roman" pitchFamily="34" charset="-120"/>
               </a:rPr>
-              <a:t>A crack in the ground in Iceland, where two plates move apart.</a:t>
-            </a:r>
-            <a:endParaRPr lang="en-US" sz="1800" dirty="0"/>
+              <a:t>Activity 2: Answer</a:t>
+            </a:r>
+            <a:endParaRPr lang="en-US" sz="3600" dirty="0"/>
+          </a:p>
+        </p:txBody>
+      </p:sp>
+      <p:sp>
+        <p:nvSpPr>
+          <p:cNvPr id="5" name="Text 2"/>
+          <p:cNvSpPr/>
+          <p:nvPr/>
+        </p:nvSpPr>
+        <p:spPr>
+          <a:xfrm>
+            <a:off x="5349240" y="1783080"/>
+            <a:ext cx="6522415" cy="4663440"/>
+          </a:xfrm>
+          <a:prstGeom prst="rect">
+            <a:avLst/>
+          </a:prstGeom>
+          <a:noFill/>
+          <a:ln/>
+        </p:spPr>
+        <p:txBody>
+          <a:bodyPr wrap="square" lIns="0" tIns="0" rIns="0" bIns="0" rtlCol="0" anchor="t"/>
+          <a:lstStyle/>
+          <a:p>
+            <a:pPr algn="l" indent="0" marL="0">
+              <a:spcAft>
+                <a:spcPts val="800"/>
+              </a:spcAft>
+              <a:buNone/>
+            </a:pPr>
+            <a:r>
+              <a:rPr lang="en-US" sz="4000" dirty="0">
+                <a:solidFill>
+                  <a:srgbClr val="111111"/>
+                </a:solidFill>
+                <a:latin typeface="Times New Roman" pitchFamily="34" charset="0"/>
+                <a:ea typeface="Times New Roman" pitchFamily="34" charset="-122"/>
+                <a:cs typeface="Times New Roman" pitchFamily="34" charset="-120"/>
+              </a:rPr>
+              <a:t>Pangaea split into Laurasia and Gondwanaland, which broke into the continents of today.</a:t>
+            </a:r>
+            <a:endParaRPr lang="en-US" sz="4000" dirty="0"/>
           </a:p>
         </p:txBody>
       </p:sp>
@@ -9640,15 +10001,54 @@
                 <a:ea typeface="Calibri" pitchFamily="34" charset="-122"/>
                 <a:cs typeface="Calibri" pitchFamily="34" charset="-120"/>
               </a:rPr>
-              <a:t>2. EVIDENCE</a:t>
+              <a:t>3. EVIDENCE</a:t>
             </a:r>
             <a:endParaRPr lang="en-US" sz="1400" dirty="0"/>
+          </a:p>
+        </p:txBody>
+      </p:sp>
+      <p:sp>
+        <p:nvSpPr>
+          <p:cNvPr id="3" name="Text 1"/>
+          <p:cNvSpPr/>
+          <p:nvPr/>
+        </p:nvSpPr>
+        <p:spPr>
+          <a:xfrm>
+            <a:off x="457200" y="1005840"/>
+            <a:ext cx="11277295" cy="731520"/>
+          </a:xfrm>
+          <a:prstGeom prst="rect">
+            <a:avLst/>
+          </a:prstGeom>
+          <a:noFill/>
+          <a:ln/>
+        </p:spPr>
+        <p:txBody>
+          <a:bodyPr wrap="square" lIns="0" tIns="0" rIns="0" bIns="0" rtlCol="0" anchor="ctr"/>
+          <a:lstStyle/>
+          <a:p>
+            <a:pPr algn="ctr" indent="0" marL="0">
+              <a:buNone/>
+            </a:pPr>
+            <a:r>
+              <a:rPr lang="en-US" sz="3600" b="1" dirty="0">
+                <a:solidFill>
+                  <a:srgbClr val="990011"/>
+                </a:solidFill>
+                <a:latin typeface="Times New Roman" pitchFamily="34" charset="0"/>
+                <a:ea typeface="Times New Roman" pitchFamily="34" charset="-122"/>
+                <a:cs typeface="Times New Roman" pitchFamily="34" charset="-120"/>
+              </a:rPr>
+              <a:t>Activity 3</a:t>
+            </a:r>
+            <a:endParaRPr lang="en-US" sz="3600" dirty="0"/>
           </a:p>
         </p:txBody>
       </p:sp>
       <p:pic>
         <p:nvPicPr>
-          <p:cNvPr id="3" name="Image 0" descr="/home/claude/f4/img/minesec_sheet.png">    </p:cNvPr>
+          <p:cNvPr id="4" name="Image 0" descr="/home/claude/f4/img/v2/f4_fossil.jpg">    </p:cNvPr>
           <p:cNvPicPr>
             <a:picLocks noChangeAspect="1"/>
           </p:cNvPicPr>
@@ -9662,8 +10062,8 @@
         </p:blipFill>
         <p:spPr>
           <a:xfrm>
-            <a:off x="0" y="658368"/>
-            <a:ext cx="5120640" cy="5833872"/>
+            <a:off x="2246610" y="1783080"/>
+            <a:ext cx="7698475" cy="4270248"/>
           </a:xfrm>
           <a:prstGeom prst="rect">
             <a:avLst/>
@@ -9672,14 +10072,14 @@
       </p:pic>
       <p:sp>
         <p:nvSpPr>
-          <p:cNvPr id="4" name="Text 1"/>
+          <p:cNvPr id="5" name="Text 2"/>
           <p:cNvSpPr/>
           <p:nvPr/>
         </p:nvSpPr>
         <p:spPr>
           <a:xfrm>
-            <a:off x="5349240" y="1005840"/>
-            <a:ext cx="6522415" cy="731520"/>
+            <a:off x="457200" y="6089904"/>
+            <a:ext cx="11277295" cy="347472"/>
           </a:xfrm>
           <a:prstGeom prst="rect">
             <a:avLst/>
@@ -9688,68 +10088,24 @@
           <a:ln/>
         </p:spPr>
         <p:txBody>
-          <a:bodyPr wrap="square" lIns="0" tIns="0" rIns="0" bIns="0" rtlCol="0" anchor="ctr">
-            <a:normAutofit/>
-          </a:bodyPr>
+          <a:bodyPr wrap="square" lIns="0" tIns="0" rIns="0" bIns="0" rtlCol="0" anchor="ctr"/>
           <a:lstStyle/>
           <a:p>
             <a:pPr algn="ctr" indent="0" marL="0">
               <a:buNone/>
             </a:pPr>
             <a:r>
-              <a:rPr lang="en-US" sz="3600" b="1" dirty="0">
-                <a:solidFill>
-                  <a:srgbClr val="990011"/>
+              <a:rPr lang="en-US" sz="1800" i="1" dirty="0">
+                <a:solidFill>
+                  <a:srgbClr val="555555"/>
                 </a:solidFill>
                 <a:latin typeface="Times New Roman" pitchFamily="34" charset="0"/>
                 <a:ea typeface="Times New Roman" pitchFamily="34" charset="-122"/>
                 <a:cs typeface="Times New Roman" pitchFamily="34" charset="-120"/>
               </a:rPr>
-              <a:t>Activity 3: Question</a:t>
-            </a:r>
-            <a:endParaRPr lang="en-US" sz="3600" dirty="0"/>
-          </a:p>
-        </p:txBody>
-      </p:sp>
-      <p:sp>
-        <p:nvSpPr>
-          <p:cNvPr id="5" name="Text 2"/>
-          <p:cNvSpPr/>
-          <p:nvPr/>
-        </p:nvSpPr>
-        <p:spPr>
-          <a:xfrm>
-            <a:off x="5349240" y="1783080"/>
-            <a:ext cx="6522415" cy="4663440"/>
-          </a:xfrm>
-          <a:prstGeom prst="rect">
-            <a:avLst/>
-          </a:prstGeom>
-          <a:noFill/>
-          <a:ln/>
-        </p:spPr>
-        <p:txBody>
-          <a:bodyPr wrap="square" lIns="0" tIns="0" rIns="0" bIns="0" rtlCol="0" anchor="t"/>
-          <a:lstStyle/>
-          <a:p>
-            <a:pPr algn="l" indent="0" marL="0">
-              <a:spcAft>
-                <a:spcPts val="800"/>
-              </a:spcAft>
-              <a:buNone/>
-            </a:pPr>
-            <a:r>
-              <a:rPr lang="en-US" sz="4000" dirty="0">
-                <a:solidFill>
-                  <a:srgbClr val="111111"/>
-                </a:solidFill>
-                <a:latin typeface="Times New Roman" pitchFamily="34" charset="0"/>
-                <a:ea typeface="Times New Roman" pitchFamily="34" charset="-122"/>
-                <a:cs typeface="Times New Roman" pitchFamily="34" charset="-120"/>
-              </a:rPr>
-              <a:t>The ground here opens a little every year. What does it show?</a:t>
-            </a:r>
-            <a:endParaRPr lang="en-US" sz="4000" dirty="0"/>
+              <a:t>A fossil of a fish in rock.</a:t>
+            </a:r>
+            <a:endParaRPr lang="en-US" sz="1800" dirty="0"/>
           </a:p>
         </p:txBody>
       </p:sp>
@@ -9859,7 +10215,7 @@
                 <a:ea typeface="Calibri" pitchFamily="34" charset="-122"/>
                 <a:cs typeface="Calibri" pitchFamily="34" charset="-120"/>
               </a:rPr>
-              <a:t>2. EVIDENCE</a:t>
+              <a:t>3. EVIDENCE</a:t>
             </a:r>
             <a:endParaRPr lang="en-US" sz="1400" dirty="0"/>
           </a:p>
@@ -9924,7 +10280,7 @@
                 <a:ea typeface="Times New Roman" pitchFamily="34" charset="-122"/>
                 <a:cs typeface="Times New Roman" pitchFamily="34" charset="-120"/>
               </a:rPr>
-              <a:t>Activity 3: Answer</a:t>
+              <a:t>Activity 3: Question</a:t>
             </a:r>
             <a:endParaRPr lang="en-US" sz="3600" dirty="0"/>
           </a:p>
@@ -9966,7 +10322,7 @@
                 <a:ea typeface="Times New Roman" pitchFamily="34" charset="-122"/>
                 <a:cs typeface="Times New Roman" pitchFamily="34" charset="-120"/>
               </a:rPr>
-              <a:t>The land (the continents) is moving.</a:t>
+              <a:t>The fossils of the same small reptile (Mesosaurus) are found in Brazil and in southern Africa. What does it prove?</a:t>
             </a:r>
             <a:endParaRPr lang="en-US" sz="4000" dirty="0"/>
           </a:p>
@@ -10078,7 +10434,7 @@
                 <a:ea typeface="Calibri" pitchFamily="34" charset="-122"/>
                 <a:cs typeface="Calibri" pitchFamily="34" charset="-120"/>
               </a:rPr>
-              <a:t>BOARD SUMMARY</a:t>
+              <a:t>3. EVIDENCE</a:t>
             </a:r>
             <a:endParaRPr lang="en-US" sz="1400" dirty="0"/>
           </a:p>
@@ -10143,7 +10499,7 @@
                 <a:ea typeface="Times New Roman" pitchFamily="34" charset="-122"/>
                 <a:cs typeface="Times New Roman" pitchFamily="34" charset="-120"/>
               </a:rPr>
-              <a:t>Board Summary</a:t>
+              <a:t>Activity 3: Answer</a:t>
             </a:r>
             <a:endParaRPr lang="en-US" sz="3600" dirty="0"/>
           </a:p>
@@ -10177,7 +10533,7 @@
               <a:buNone/>
             </a:pPr>
             <a:r>
-              <a:rPr lang="en-US" sz="4000" b="1" dirty="0">
+              <a:rPr lang="en-US" sz="4000" dirty="0">
                 <a:solidFill>
                   <a:srgbClr val="111111"/>
                 </a:solidFill>
@@ -10185,47 +10541,7 @@
                 <a:ea typeface="Times New Roman" pitchFamily="34" charset="-122"/>
                 <a:cs typeface="Times New Roman" pitchFamily="34" charset="-120"/>
               </a:rPr>
-              <a:t>Topic: The Structure of the Earth: Building Processes and Impacts on Man</a:t>
-            </a:r>
-            <a:endParaRPr lang="en-US" sz="4000" dirty="0"/>
-          </a:p>
-          <a:p>
-            <a:pPr algn="l" indent="0" marL="0">
-              <a:spcAft>
-                <a:spcPts val="800"/>
-              </a:spcAft>
-              <a:buNone/>
-            </a:pPr>
-            <a:r>
-              <a:rPr lang="en-US" sz="4000" b="1" dirty="0">
-                <a:solidFill>
-                  <a:srgbClr val="111111"/>
-                </a:solidFill>
-                <a:latin typeface="Times New Roman" pitchFamily="34" charset="0"/>
-                <a:ea typeface="Times New Roman" pitchFamily="34" charset="-122"/>
-                <a:cs typeface="Times New Roman" pitchFamily="34" charset="-120"/>
-              </a:rPr>
-              <a:t>Sub-topic: Internal Structure of the Earth</a:t>
-            </a:r>
-            <a:endParaRPr lang="en-US" sz="4000" dirty="0"/>
-          </a:p>
-          <a:p>
-            <a:pPr algn="l" indent="0" marL="0">
-              <a:spcAft>
-                <a:spcPts val="800"/>
-              </a:spcAft>
-              <a:buNone/>
-            </a:pPr>
-            <a:r>
-              <a:rPr lang="en-US" sz="4000" b="1" dirty="0">
-                <a:solidFill>
-                  <a:srgbClr val="990011"/>
-                </a:solidFill>
-                <a:latin typeface="Times New Roman" pitchFamily="34" charset="0"/>
-                <a:ea typeface="Times New Roman" pitchFamily="34" charset="-122"/>
-                <a:cs typeface="Times New Roman" pitchFamily="34" charset="-120"/>
-              </a:rPr>
-              <a:t>Lesson 9: The Theory of Continental Drift</a:t>
+              <a:t>The two continents were once joined.</a:t>
             </a:r>
             <a:endParaRPr lang="en-US" sz="4000" dirty="0"/>
           </a:p>
@@ -10402,7 +10718,7 @@
                 <a:ea typeface="Times New Roman" pitchFamily="34" charset="-122"/>
                 <a:cs typeface="Times New Roman" pitchFamily="34" charset="-120"/>
               </a:rPr>
-              <a:t>1. The Theory of Continental Drift</a:t>
+              <a:t>Board Summary</a:t>
             </a:r>
             <a:endParaRPr lang="en-US" sz="3600" dirty="0"/>
           </a:p>
@@ -10436,7 +10752,7 @@
               <a:buNone/>
             </a:pPr>
             <a:r>
-              <a:rPr lang="en-US" sz="4000" i="1" dirty="0">
+              <a:rPr lang="en-US" sz="4000" b="1" dirty="0">
                 <a:solidFill>
                   <a:srgbClr val="111111"/>
                 </a:solidFill>
@@ -10444,7 +10760,7 @@
                 <a:ea typeface="Times New Roman" pitchFamily="34" charset="-122"/>
                 <a:cs typeface="Times New Roman" pitchFamily="34" charset="-120"/>
               </a:rPr>
-              <a:t>The main idea of the theory is the following:</a:t>
+              <a:t>Topic: The Structure of the Earth: Building Processes and Impacts on Man</a:t>
             </a:r>
             <a:endParaRPr lang="en-US" sz="4000" dirty="0"/>
           </a:p>
@@ -10464,8 +10780,11 @@
                 <a:ea typeface="Times New Roman" pitchFamily="34" charset="-122"/>
                 <a:cs typeface="Times New Roman" pitchFamily="34" charset="-120"/>
               </a:rPr>
-              <a:t>Continental drift: </a:t>
-            </a:r>
+              <a:t>Sub-topic: Structure of the Earth</a:t>
+            </a:r>
+            <a:endParaRPr lang="en-US" sz="4000" dirty="0"/>
+          </a:p>
+          <a:p>
             <a:pPr algn="l" indent="0" marL="0">
               <a:spcAft>
                 <a:spcPts val="800"/>
@@ -10473,52 +10792,15 @@
               <a:buNone/>
             </a:pPr>
             <a:r>
-              <a:rPr lang="en-US" sz="4000" dirty="0">
-                <a:solidFill>
-                  <a:srgbClr val="111111"/>
+              <a:rPr lang="en-US" sz="4000" b="1" dirty="0">
+                <a:solidFill>
+                  <a:srgbClr val="990011"/>
                 </a:solidFill>
                 <a:latin typeface="Times New Roman" pitchFamily="34" charset="0"/>
                 <a:ea typeface="Times New Roman" pitchFamily="34" charset="-122"/>
                 <a:cs typeface="Times New Roman" pitchFamily="34" charset="-120"/>
               </a:rPr>
-              <a:t>It is the slow movement of the continents over millions of years.</a:t>
-            </a:r>
-            <a:endParaRPr lang="en-US" sz="4000" dirty="0"/>
-          </a:p>
-          <a:p>
-            <a:pPr algn="l" indent="0" marL="0">
-              <a:spcAft>
-                <a:spcPts val="800"/>
-              </a:spcAft>
-              <a:buNone/>
-            </a:pPr>
-            <a:r>
-              <a:rPr lang="en-US" sz="4000" b="1" dirty="0">
-                <a:solidFill>
-                  <a:srgbClr val="111111"/>
-                </a:solidFill>
-                <a:latin typeface="Times New Roman" pitchFamily="34" charset="0"/>
-                <a:ea typeface="Times New Roman" pitchFamily="34" charset="-122"/>
-                <a:cs typeface="Times New Roman" pitchFamily="34" charset="-120"/>
-              </a:rPr>
-              <a:t>Author: </a:t>
-            </a:r>
-            <a:pPr algn="l" indent="0" marL="0">
-              <a:spcAft>
-                <a:spcPts val="800"/>
-              </a:spcAft>
-              <a:buNone/>
-            </a:pPr>
-            <a:r>
-              <a:rPr lang="en-US" sz="4000" dirty="0">
-                <a:solidFill>
-                  <a:srgbClr val="111111"/>
-                </a:solidFill>
-                <a:latin typeface="Times New Roman" pitchFamily="34" charset="0"/>
-                <a:ea typeface="Times New Roman" pitchFamily="34" charset="-122"/>
-                <a:cs typeface="Times New Roman" pitchFamily="34" charset="-120"/>
-              </a:rPr>
-              <a:t>The theory was proposed by Alfred Wegener in 1912.</a:t>
+              <a:t>Lesson 9: The Theories of the Earth's Structure: Continental Drift</a:t>
             </a:r>
             <a:endParaRPr lang="en-US" sz="4000" dirty="0"/>
           </a:p>
@@ -10653,7 +10935,7 @@
         <p:spPr>
           <a:xfrm>
             <a:off x="0" y="658368"/>
-            <a:ext cx="5120640" cy="5833872"/>
+            <a:ext cx="2468880" cy="5833872"/>
           </a:xfrm>
           <a:prstGeom prst="rect">
             <a:avLst/>
@@ -10668,8 +10950,8 @@
         </p:nvSpPr>
         <p:spPr>
           <a:xfrm>
-            <a:off x="5349240" y="1005840"/>
-            <a:ext cx="6522415" cy="731520"/>
+            <a:off x="2697480" y="1005840"/>
+            <a:ext cx="9174175" cy="731520"/>
           </a:xfrm>
           <a:prstGeom prst="rect">
             <a:avLst/>
@@ -10695,7 +10977,7 @@
                 <a:ea typeface="Times New Roman" pitchFamily="34" charset="-122"/>
                 <a:cs typeface="Times New Roman" pitchFamily="34" charset="-120"/>
               </a:rPr>
-              <a:t>1. The Theory of Continental Drift (continued)</a:t>
+              <a:t>1. Main Idea of the Theory</a:t>
             </a:r>
             <a:endParaRPr lang="en-US" sz="3600" dirty="0"/>
           </a:p>
@@ -10709,8 +10991,8 @@
         </p:nvSpPr>
         <p:spPr>
           <a:xfrm>
-            <a:off x="5349240" y="1783080"/>
-            <a:ext cx="6522415" cy="4663440"/>
+            <a:off x="2697480" y="1783080"/>
+            <a:ext cx="9174175" cy="4663440"/>
           </a:xfrm>
           <a:prstGeom prst="rect">
             <a:avLst/>
@@ -10729,7 +11011,7 @@
               <a:buNone/>
             </a:pPr>
             <a:r>
-              <a:rPr lang="en-US" sz="4000" b="1" dirty="0">
+              <a:rPr lang="en-US" sz="4000" i="1" dirty="0">
                 <a:solidFill>
                   <a:srgbClr val="111111"/>
                 </a:solidFill>
@@ -10737,8 +11019,11 @@
                 <a:ea typeface="Times New Roman" pitchFamily="34" charset="-122"/>
                 <a:cs typeface="Times New Roman" pitchFamily="34" charset="-120"/>
               </a:rPr>
-              <a:t>Pangaea: </a:t>
-            </a:r>
+              <a:t>The main idea of the theory of continental drift is the following:</a:t>
+            </a:r>
+            <a:endParaRPr lang="en-US" sz="4000" dirty="0"/>
+          </a:p>
+          <a:p>
             <a:pPr algn="l" indent="0" marL="0">
               <a:spcAft>
                 <a:spcPts val="800"/>
@@ -10746,7 +11031,7 @@
               <a:buNone/>
             </a:pPr>
             <a:r>
-              <a:rPr lang="en-US" sz="4000" dirty="0">
+              <a:rPr lang="en-US" sz="4000" b="1" dirty="0">
                 <a:solidFill>
                   <a:srgbClr val="111111"/>
                 </a:solidFill>
@@ -10754,11 +11039,8 @@
                 <a:ea typeface="Times New Roman" pitchFamily="34" charset="-122"/>
                 <a:cs typeface="Times New Roman" pitchFamily="34" charset="-120"/>
               </a:rPr>
-              <a:t>All the continents were once joined in one big continent called Pangaea.</a:t>
-            </a:r>
-            <a:endParaRPr lang="en-US" sz="4000" dirty="0"/>
-          </a:p>
-          <a:p>
+              <a:t>Continental drift: </a:t>
+            </a:r>
             <a:pPr algn="l" indent="0" marL="0">
               <a:spcAft>
                 <a:spcPts val="800"/>
@@ -10766,7 +11048,7 @@
               <a:buNone/>
             </a:pPr>
             <a:r>
-              <a:rPr lang="en-US" sz="4000" b="1" dirty="0">
+              <a:rPr lang="en-US" sz="4000" dirty="0">
                 <a:solidFill>
                   <a:srgbClr val="111111"/>
                 </a:solidFill>
@@ -10774,8 +11056,11 @@
                 <a:ea typeface="Times New Roman" pitchFamily="34" charset="-122"/>
                 <a:cs typeface="Times New Roman" pitchFamily="34" charset="-120"/>
               </a:rPr>
-              <a:t>Break-up: </a:t>
-            </a:r>
+              <a:t>It is the theory that the continents were once joined and have slowly moved apart.</a:t>
+            </a:r>
+            <a:endParaRPr lang="en-US" sz="4000" dirty="0"/>
+          </a:p>
+          <a:p>
             <a:pPr algn="l" indent="0" marL="0">
               <a:spcAft>
                 <a:spcPts val="800"/>
@@ -10783,7 +11068,7 @@
               <a:buNone/>
             </a:pPr>
             <a:r>
-              <a:rPr lang="en-US" sz="4000" dirty="0">
+              <a:rPr lang="en-US" sz="4000" b="1" dirty="0">
                 <a:solidFill>
                   <a:srgbClr val="111111"/>
                 </a:solidFill>
@@ -10791,7 +11076,24 @@
                 <a:ea typeface="Times New Roman" pitchFamily="34" charset="-122"/>
                 <a:cs typeface="Times New Roman" pitchFamily="34" charset="-120"/>
               </a:rPr>
-              <a:t>Pangaea broke into pieces which slowly moved apart to form today's continents.</a:t>
+              <a:t>Author: </a:t>
+            </a:r>
+            <a:pPr algn="l" indent="0" marL="0">
+              <a:spcAft>
+                <a:spcPts val="800"/>
+              </a:spcAft>
+              <a:buNone/>
+            </a:pPr>
+            <a:r>
+              <a:rPr lang="en-US" sz="4000" dirty="0">
+                <a:solidFill>
+                  <a:srgbClr val="111111"/>
+                </a:solidFill>
+                <a:latin typeface="Times New Roman" pitchFamily="34" charset="0"/>
+                <a:ea typeface="Times New Roman" pitchFamily="34" charset="-122"/>
+                <a:cs typeface="Times New Roman" pitchFamily="34" charset="-120"/>
+              </a:rPr>
+              <a:t>The theory was proposed by Alfred Wegener in 1912.</a:t>
             </a:r>
             <a:endParaRPr lang="en-US" sz="4000" dirty="0"/>
           </a:p>
@@ -11198,7 +11500,7 @@
                           <a:ea typeface="Calibri" pitchFamily="34" charset="-122"/>
                           <a:cs typeface="Calibri" pitchFamily="34" charset="-120"/>
                         </a:rPr>
-                        <a:t>Internal Structure of the Earth</a:t>
+                        <a:t>Structure of the Earth</a:t>
                       </a:r>
                       <a:endParaRPr lang="en-US" sz="1700" dirty="0">
                         <a:latin typeface="Calibri" charset="0"/>
@@ -11336,7 +11638,7 @@
                           <a:ea typeface="Calibri" pitchFamily="34" charset="-122"/>
                           <a:cs typeface="Calibri" pitchFamily="34" charset="-120"/>
                         </a:rPr>
-                        <a:t>Lesson 9: The Theory of Continental Drift</a:t>
+                        <a:t>Lesson 9: The Theories of the Earth's Structure: Continental Drift</a:t>
                       </a:r>
                       <a:endParaRPr lang="en-US" sz="1700" dirty="0">
                         <a:latin typeface="Calibri" charset="0"/>
@@ -11612,7 +11914,7 @@
                           <a:ea typeface="Calibri" pitchFamily="34" charset="-122"/>
                           <a:cs typeface="Calibri" pitchFamily="34" charset="-120"/>
                         </a:rPr>
-                        <a:t>The theory of continental drift: main idea, illustration and evidence.</a:t>
+                        <a:t>Main idea; illustration of drifting; evidence.</a:t>
                       </a:r>
                       <a:endParaRPr lang="en-US" sz="1700" dirty="0">
                         <a:latin typeface="Calibri" charset="0"/>
@@ -11935,7 +12237,7 @@
         <p:spPr>
           <a:xfrm>
             <a:off x="0" y="658368"/>
-            <a:ext cx="1463040" cy="5833872"/>
+            <a:ext cx="5120640" cy="5833872"/>
           </a:xfrm>
           <a:prstGeom prst="rect">
             <a:avLst/>
@@ -11950,8 +12252,8 @@
         </p:nvSpPr>
         <p:spPr>
           <a:xfrm>
-            <a:off x="1691640" y="1005840"/>
-            <a:ext cx="10180015" cy="731520"/>
+            <a:off x="5349240" y="1005840"/>
+            <a:ext cx="6522415" cy="731520"/>
           </a:xfrm>
           <a:prstGeom prst="rect">
             <a:avLst/>
@@ -11977,7 +12279,7 @@
                 <a:ea typeface="Times New Roman" pitchFamily="34" charset="-122"/>
                 <a:cs typeface="Times New Roman" pitchFamily="34" charset="-120"/>
               </a:rPr>
-              <a:t>2. Evidence of Continental Drift</a:t>
+              <a:t>1. Main Idea of the Theory (continued)</a:t>
             </a:r>
             <a:endParaRPr lang="en-US" sz="3600" dirty="0"/>
           </a:p>
@@ -11991,8 +12293,8 @@
         </p:nvSpPr>
         <p:spPr>
           <a:xfrm>
-            <a:off x="1691640" y="1783080"/>
-            <a:ext cx="10180015" cy="4663440"/>
+            <a:off x="5349240" y="1783080"/>
+            <a:ext cx="6522415" cy="4663440"/>
           </a:xfrm>
           <a:prstGeom prst="rect">
             <a:avLst/>
@@ -12011,7 +12313,7 @@
               <a:buNone/>
             </a:pPr>
             <a:r>
-              <a:rPr lang="en-US" sz="4000" i="1" dirty="0">
+              <a:rPr lang="en-US" sz="4000" b="1" dirty="0">
                 <a:solidFill>
                   <a:srgbClr val="111111"/>
                 </a:solidFill>
@@ -12019,11 +12321,8 @@
                 <a:ea typeface="Times New Roman" pitchFamily="34" charset="-122"/>
                 <a:cs typeface="Times New Roman" pitchFamily="34" charset="-120"/>
               </a:rPr>
-              <a:t>The following evidence supports the theory:</a:t>
-            </a:r>
-            <a:endParaRPr lang="en-US" sz="4000" dirty="0"/>
-          </a:p>
-          <a:p>
+              <a:t>Pangaea: </a:t>
+            </a:r>
             <a:pPr algn="l" indent="0" marL="0">
               <a:spcAft>
                 <a:spcPts val="800"/>
@@ -12031,7 +12330,7 @@
               <a:buNone/>
             </a:pPr>
             <a:r>
-              <a:rPr lang="en-US" sz="4000" b="1" dirty="0">
+              <a:rPr lang="en-US" sz="4000" dirty="0">
                 <a:solidFill>
                   <a:srgbClr val="111111"/>
                 </a:solidFill>
@@ -12039,61 +12338,7 @@
                 <a:ea typeface="Times New Roman" pitchFamily="34" charset="-122"/>
                 <a:cs typeface="Times New Roman" pitchFamily="34" charset="-120"/>
               </a:rPr>
-              <a:t>Jigsaw fit: </a:t>
-            </a:r>
-            <a:pPr algn="l" indent="0" marL="0">
-              <a:spcAft>
-                <a:spcPts val="800"/>
-              </a:spcAft>
-              <a:buNone/>
-            </a:pPr>
-            <a:r>
-              <a:rPr lang="en-US" sz="4000" dirty="0">
-                <a:solidFill>
-                  <a:srgbClr val="111111"/>
-                </a:solidFill>
-                <a:latin typeface="Times New Roman" pitchFamily="34" charset="0"/>
-                <a:ea typeface="Times New Roman" pitchFamily="34" charset="-122"/>
-                <a:cs typeface="Times New Roman" pitchFamily="34" charset="-120"/>
-              </a:rPr>
-              <a:t>The coasts of Africa and South America fit together like a puzzle.</a:t>
-            </a:r>
-            <a:endParaRPr lang="en-US" sz="4000" dirty="0"/>
-          </a:p>
-          <a:p>
-            <a:pPr algn="l" indent="0" marL="0">
-              <a:spcAft>
-                <a:spcPts val="800"/>
-              </a:spcAft>
-              <a:buNone/>
-            </a:pPr>
-            <a:r>
-              <a:rPr lang="en-US" sz="4000" b="1" dirty="0">
-                <a:solidFill>
-                  <a:srgbClr val="111111"/>
-                </a:solidFill>
-                <a:latin typeface="Times New Roman" pitchFamily="34" charset="0"/>
-                <a:ea typeface="Times New Roman" pitchFamily="34" charset="-122"/>
-                <a:cs typeface="Times New Roman" pitchFamily="34" charset="-120"/>
-              </a:rPr>
-              <a:t>Fossils: </a:t>
-            </a:r>
-            <a:pPr algn="l" indent="0" marL="0">
-              <a:spcAft>
-                <a:spcPts val="800"/>
-              </a:spcAft>
-              <a:buNone/>
-            </a:pPr>
-            <a:r>
-              <a:rPr lang="en-US" sz="4000" dirty="0">
-                <a:solidFill>
-                  <a:srgbClr val="111111"/>
-                </a:solidFill>
-                <a:latin typeface="Times New Roman" pitchFamily="34" charset="0"/>
-                <a:ea typeface="Times New Roman" pitchFamily="34" charset="-122"/>
-                <a:cs typeface="Times New Roman" pitchFamily="34" charset="-120"/>
-              </a:rPr>
-              <a:t>The same fossils of plants and animals are found on both sides of the Atlantic.</a:t>
+              <a:t>All the continents once formed one big continent called Pangaea, surrounded by one ocean, Panthalassa.</a:t>
             </a:r>
             <a:endParaRPr lang="en-US" sz="4000" dirty="0"/>
           </a:p>
@@ -12228,7 +12473,7 @@
         <p:spPr>
           <a:xfrm>
             <a:off x="0" y="658368"/>
-            <a:ext cx="5120640" cy="5833872"/>
+            <a:ext cx="2468880" cy="5833872"/>
           </a:xfrm>
           <a:prstGeom prst="rect">
             <a:avLst/>
@@ -12243,8 +12488,8 @@
         </p:nvSpPr>
         <p:spPr>
           <a:xfrm>
-            <a:off x="5349240" y="1005840"/>
-            <a:ext cx="6522415" cy="731520"/>
+            <a:off x="2697480" y="1005840"/>
+            <a:ext cx="9174175" cy="731520"/>
           </a:xfrm>
           <a:prstGeom prst="rect">
             <a:avLst/>
@@ -12270,7 +12515,7 @@
                 <a:ea typeface="Times New Roman" pitchFamily="34" charset="-122"/>
                 <a:cs typeface="Times New Roman" pitchFamily="34" charset="-120"/>
               </a:rPr>
-              <a:t>2. Evidence of Continental Drift (continued)</a:t>
+              <a:t>2. Illustration of Drifting</a:t>
             </a:r>
             <a:endParaRPr lang="en-US" sz="3600" dirty="0"/>
           </a:p>
@@ -12284,8 +12529,8 @@
         </p:nvSpPr>
         <p:spPr>
           <a:xfrm>
-            <a:off x="5349240" y="1783080"/>
-            <a:ext cx="6522415" cy="4663440"/>
+            <a:off x="2697480" y="1783080"/>
+            <a:ext cx="9174175" cy="4663440"/>
           </a:xfrm>
           <a:prstGeom prst="rect">
             <a:avLst/>
@@ -12304,7 +12549,7 @@
               <a:buNone/>
             </a:pPr>
             <a:r>
-              <a:rPr lang="en-US" sz="4000" b="1" dirty="0">
+              <a:rPr lang="en-US" sz="4000" i="1" dirty="0">
                 <a:solidFill>
                   <a:srgbClr val="111111"/>
                 </a:solidFill>
@@ -12312,8 +12557,11 @@
                 <a:ea typeface="Times New Roman" pitchFamily="34" charset="-122"/>
                 <a:cs typeface="Times New Roman" pitchFamily="34" charset="-120"/>
               </a:rPr>
-              <a:t>Rocks: </a:t>
-            </a:r>
+              <a:t>The continents drifted as follows:</a:t>
+            </a:r>
+            <a:endParaRPr lang="en-US" sz="4000" dirty="0"/>
+          </a:p>
+          <a:p>
             <a:pPr algn="l" indent="0" marL="0">
               <a:spcAft>
                 <a:spcPts val="800"/>
@@ -12321,7 +12569,7 @@
               <a:buNone/>
             </a:pPr>
             <a:r>
-              <a:rPr lang="en-US" sz="4000" dirty="0">
+              <a:rPr lang="en-US" sz="4000" b="1" dirty="0">
                 <a:solidFill>
                   <a:srgbClr val="111111"/>
                 </a:solidFill>
@@ -12329,11 +12577,8 @@
                 <a:ea typeface="Times New Roman" pitchFamily="34" charset="-122"/>
                 <a:cs typeface="Times New Roman" pitchFamily="34" charset="-120"/>
               </a:rPr>
-              <a:t>The same types and ages of rocks are found on continents now far apart.</a:t>
-            </a:r>
-            <a:endParaRPr lang="en-US" sz="4000" dirty="0"/>
-          </a:p>
-          <a:p>
+              <a:t>Break-up: </a:t>
+            </a:r>
             <a:pPr algn="l" indent="0" marL="0">
               <a:spcAft>
                 <a:spcPts val="800"/>
@@ -12341,7 +12586,7 @@
               <a:buNone/>
             </a:pPr>
             <a:r>
-              <a:rPr lang="en-US" sz="4000" b="1" dirty="0">
+              <a:rPr lang="en-US" sz="4000" dirty="0">
                 <a:solidFill>
                   <a:srgbClr val="111111"/>
                 </a:solidFill>
@@ -12349,8 +12594,11 @@
                 <a:ea typeface="Times New Roman" pitchFamily="34" charset="-122"/>
                 <a:cs typeface="Times New Roman" pitchFamily="34" charset="-120"/>
               </a:rPr>
-              <a:t>Old ice marks: </a:t>
-            </a:r>
+              <a:t>About 200 million years ago, Pangaea split into Laurasia in the north and Gondwanaland in the south.</a:t>
+            </a:r>
+            <a:endParaRPr lang="en-US" sz="4000" dirty="0"/>
+          </a:p>
+          <a:p>
             <a:pPr algn="l" indent="0" marL="0">
               <a:spcAft>
                 <a:spcPts val="800"/>
@@ -12358,7 +12606,7 @@
               <a:buNone/>
             </a:pPr>
             <a:r>
-              <a:rPr lang="en-US" sz="4000" dirty="0">
+              <a:rPr lang="en-US" sz="4000" b="1" dirty="0">
                 <a:solidFill>
                   <a:srgbClr val="111111"/>
                 </a:solidFill>
@@ -12366,7 +12614,24 @@
                 <a:ea typeface="Times New Roman" pitchFamily="34" charset="-122"/>
                 <a:cs typeface="Times New Roman" pitchFamily="34" charset="-120"/>
               </a:rPr>
-              <a:t>Marks of ancient glaciers are found in hot lands such as Africa and India.</a:t>
+              <a:t>Today's continents: </a:t>
+            </a:r>
+            <a:pPr algn="l" indent="0" marL="0">
+              <a:spcAft>
+                <a:spcPts val="800"/>
+              </a:spcAft>
+              <a:buNone/>
+            </a:pPr>
+            <a:r>
+              <a:rPr lang="en-US" sz="4000" dirty="0">
+                <a:solidFill>
+                  <a:srgbClr val="111111"/>
+                </a:solidFill>
+                <a:latin typeface="Times New Roman" pitchFamily="34" charset="0"/>
+                <a:ea typeface="Times New Roman" pitchFamily="34" charset="-122"/>
+                <a:cs typeface="Times New Roman" pitchFamily="34" charset="-120"/>
+              </a:rPr>
+              <a:t>Laurasia and Gondwanaland later broke into the continents we know today.</a:t>
             </a:r>
             <a:endParaRPr lang="en-US" sz="4000" dirty="0"/>
           </a:p>
@@ -12484,48 +12749,9 @@
           </a:p>
         </p:txBody>
       </p:sp>
-      <p:sp>
-        <p:nvSpPr>
-          <p:cNvPr id="3" name="Text 1"/>
-          <p:cNvSpPr/>
-          <p:nvPr/>
-        </p:nvSpPr>
-        <p:spPr>
-          <a:xfrm>
-            <a:off x="457200" y="1005840"/>
-            <a:ext cx="11277295" cy="731520"/>
-          </a:xfrm>
-          <a:prstGeom prst="rect">
-            <a:avLst/>
-          </a:prstGeom>
-          <a:noFill/>
-          <a:ln/>
-        </p:spPr>
-        <p:txBody>
-          <a:bodyPr wrap="square" lIns="0" tIns="0" rIns="0" bIns="0" rtlCol="0" anchor="ctr"/>
-          <a:lstStyle/>
-          <a:p>
-            <a:pPr algn="ctr" indent="0" marL="0">
-              <a:buNone/>
-            </a:pPr>
-            <a:r>
-              <a:rPr lang="en-US" sz="3600" b="1" dirty="0">
-                <a:solidFill>
-                  <a:srgbClr val="990011"/>
-                </a:solidFill>
-                <a:latin typeface="Times New Roman" pitchFamily="34" charset="0"/>
-                <a:ea typeface="Times New Roman" pitchFamily="34" charset="-122"/>
-                <a:cs typeface="Times New Roman" pitchFamily="34" charset="-120"/>
-              </a:rPr>
-              <a:t>2. Evidence of Continental Drift</a:t>
-            </a:r>
-            <a:endParaRPr lang="en-US" sz="3600" dirty="0"/>
-          </a:p>
-        </p:txBody>
-      </p:sp>
       <p:pic>
         <p:nvPicPr>
-          <p:cNvPr id="4" name="Image 0" descr="/home/claude/f4/img/v2/jigsaw_last.png">    </p:cNvPr>
+          <p:cNvPr id="3" name="Image 0" descr="/home/claude/f4/img/minesec_sheet.png">    </p:cNvPr>
           <p:cNvPicPr>
             <a:picLocks noChangeAspect="1"/>
           </p:cNvPicPr>
@@ -12539,8 +12765,8 @@
         </p:blipFill>
         <p:spPr>
           <a:xfrm>
-            <a:off x="1825600" y="1783080"/>
-            <a:ext cx="8540496" cy="4270248"/>
+            <a:off x="0" y="658368"/>
+            <a:ext cx="5120640" cy="5833872"/>
           </a:xfrm>
           <a:prstGeom prst="rect">
             <a:avLst/>
@@ -12549,14 +12775,14 @@
       </p:pic>
       <p:sp>
         <p:nvSpPr>
-          <p:cNvPr id="5" name="Text 2"/>
+          <p:cNvPr id="4" name="Text 1"/>
           <p:cNvSpPr/>
           <p:nvPr/>
         </p:nvSpPr>
         <p:spPr>
           <a:xfrm>
-            <a:off x="457200" y="6089904"/>
-            <a:ext cx="11277295" cy="347472"/>
+            <a:off x="5349240" y="1005840"/>
+            <a:ext cx="6522415" cy="731520"/>
           </a:xfrm>
           <a:prstGeom prst="rect">
             <a:avLst/>
@@ -12565,24 +12791,85 @@
           <a:ln/>
         </p:spPr>
         <p:txBody>
-          <a:bodyPr wrap="square" lIns="0" tIns="0" rIns="0" bIns="0" rtlCol="0" anchor="ctr"/>
+          <a:bodyPr wrap="square" lIns="0" tIns="0" rIns="0" bIns="0" rtlCol="0" anchor="ctr">
+            <a:normAutofit/>
+          </a:bodyPr>
           <a:lstStyle/>
           <a:p>
             <a:pPr algn="ctr" indent="0" marL="0">
               <a:buNone/>
             </a:pPr>
             <a:r>
-              <a:rPr lang="en-US" sz="1800" i="1" dirty="0">
-                <a:solidFill>
-                  <a:srgbClr val="555555"/>
+              <a:rPr lang="en-US" sz="3600" b="1" dirty="0">
+                <a:solidFill>
+                  <a:srgbClr val="990011"/>
                 </a:solidFill>
                 <a:latin typeface="Times New Roman" pitchFamily="34" charset="0"/>
                 <a:ea typeface="Times New Roman" pitchFamily="34" charset="-122"/>
                 <a:cs typeface="Times New Roman" pitchFamily="34" charset="-120"/>
               </a:rPr>
-              <a:t>Illustration: the jigsaw fit of the continents</a:t>
-            </a:r>
-            <a:endParaRPr lang="en-US" sz="1800" dirty="0"/>
+              <a:t>2. Illustration of Drifting (continued)</a:t>
+            </a:r>
+            <a:endParaRPr lang="en-US" sz="3600" dirty="0"/>
+          </a:p>
+        </p:txBody>
+      </p:sp>
+      <p:sp>
+        <p:nvSpPr>
+          <p:cNvPr id="5" name="Text 2"/>
+          <p:cNvSpPr/>
+          <p:nvPr/>
+        </p:nvSpPr>
+        <p:spPr>
+          <a:xfrm>
+            <a:off x="5349240" y="1783080"/>
+            <a:ext cx="6522415" cy="4663440"/>
+          </a:xfrm>
+          <a:prstGeom prst="rect">
+            <a:avLst/>
+          </a:prstGeom>
+          <a:noFill/>
+          <a:ln/>
+        </p:spPr>
+        <p:txBody>
+          <a:bodyPr wrap="square" lIns="0" tIns="0" rIns="0" bIns="0" rtlCol="0" anchor="t"/>
+          <a:lstStyle/>
+          <a:p>
+            <a:pPr algn="l" indent="0" marL="0">
+              <a:spcAft>
+                <a:spcPts val="800"/>
+              </a:spcAft>
+              <a:buNone/>
+            </a:pPr>
+            <a:r>
+              <a:rPr lang="en-US" sz="4000" b="1" dirty="0">
+                <a:solidFill>
+                  <a:srgbClr val="111111"/>
+                </a:solidFill>
+                <a:latin typeface="Times New Roman" pitchFamily="34" charset="0"/>
+                <a:ea typeface="Times New Roman" pitchFamily="34" charset="-122"/>
+                <a:cs typeface="Times New Roman" pitchFamily="34" charset="-120"/>
+              </a:rPr>
+              <a:t>Still moving: </a:t>
+            </a:r>
+            <a:pPr algn="l" indent="0" marL="0">
+              <a:spcAft>
+                <a:spcPts val="800"/>
+              </a:spcAft>
+              <a:buNone/>
+            </a:pPr>
+            <a:r>
+              <a:rPr lang="en-US" sz="4000" dirty="0">
+                <a:solidFill>
+                  <a:srgbClr val="111111"/>
+                </a:solidFill>
+                <a:latin typeface="Times New Roman" pitchFamily="34" charset="0"/>
+                <a:ea typeface="Times New Roman" pitchFamily="34" charset="-122"/>
+                <a:cs typeface="Times New Roman" pitchFamily="34" charset="-120"/>
+              </a:rPr>
+              <a:t>The continents still move a few centimetres each year.</a:t>
+            </a:r>
+            <a:endParaRPr lang="en-US" sz="4000" dirty="0"/>
           </a:p>
         </p:txBody>
       </p:sp>
@@ -12692,15 +12979,54 @@
                 <a:ea typeface="Calibri" pitchFamily="34" charset="-122"/>
                 <a:cs typeface="Calibri" pitchFamily="34" charset="-120"/>
               </a:rPr>
-              <a:t>FORMATIVE EVALUATION</a:t>
+              <a:t>BOARD SUMMARY</a:t>
             </a:r>
             <a:endParaRPr lang="en-US" sz="1400" dirty="0"/>
+          </a:p>
+        </p:txBody>
+      </p:sp>
+      <p:sp>
+        <p:nvSpPr>
+          <p:cNvPr id="3" name="Text 1"/>
+          <p:cNvSpPr/>
+          <p:nvPr/>
+        </p:nvSpPr>
+        <p:spPr>
+          <a:xfrm>
+            <a:off x="457200" y="1005840"/>
+            <a:ext cx="11277295" cy="731520"/>
+          </a:xfrm>
+          <a:prstGeom prst="rect">
+            <a:avLst/>
+          </a:prstGeom>
+          <a:noFill/>
+          <a:ln/>
+        </p:spPr>
+        <p:txBody>
+          <a:bodyPr wrap="square" lIns="0" tIns="0" rIns="0" bIns="0" rtlCol="0" anchor="ctr"/>
+          <a:lstStyle/>
+          <a:p>
+            <a:pPr algn="ctr" indent="0" marL="0">
+              <a:buNone/>
+            </a:pPr>
+            <a:r>
+              <a:rPr lang="en-US" sz="3600" b="1" dirty="0">
+                <a:solidFill>
+                  <a:srgbClr val="990011"/>
+                </a:solidFill>
+                <a:latin typeface="Times New Roman" pitchFamily="34" charset="0"/>
+                <a:ea typeface="Times New Roman" pitchFamily="34" charset="-122"/>
+                <a:cs typeface="Times New Roman" pitchFamily="34" charset="-120"/>
+              </a:rPr>
+              <a:t>2. Illustration of Drifting</a:t>
+            </a:r>
+            <a:endParaRPr lang="en-US" sz="3600" dirty="0"/>
           </a:p>
         </p:txBody>
       </p:sp>
       <p:pic>
         <p:nvPicPr>
-          <p:cNvPr id="3" name="Image 0" descr="/home/claude/f4/img/minesec_sheet.png">    </p:cNvPr>
+          <p:cNvPr id="4" name="Image 0" descr="/home/claude/f4/img/v2/drift_stages_big.png">    </p:cNvPr>
           <p:cNvPicPr>
             <a:picLocks noChangeAspect="1"/>
           </p:cNvPicPr>
@@ -12714,8 +13040,8 @@
         </p:blipFill>
         <p:spPr>
           <a:xfrm>
-            <a:off x="0" y="658368"/>
-            <a:ext cx="5120640" cy="5833872"/>
+            <a:off x="629930" y="1783080"/>
+            <a:ext cx="10931835" cy="4270248"/>
           </a:xfrm>
           <a:prstGeom prst="rect">
             <a:avLst/>
@@ -12724,14 +13050,14 @@
       </p:pic>
       <p:sp>
         <p:nvSpPr>
-          <p:cNvPr id="4" name="Text 1"/>
+          <p:cNvPr id="5" name="Text 2"/>
           <p:cNvSpPr/>
           <p:nvPr/>
         </p:nvSpPr>
         <p:spPr>
           <a:xfrm>
-            <a:off x="5349240" y="1005840"/>
-            <a:ext cx="6522415" cy="731520"/>
+            <a:off x="457200" y="6089904"/>
+            <a:ext cx="11277295" cy="347472"/>
           </a:xfrm>
           <a:prstGeom prst="rect">
             <a:avLst/>
@@ -12740,68 +13066,24 @@
           <a:ln/>
         </p:spPr>
         <p:txBody>
-          <a:bodyPr wrap="square" lIns="0" tIns="0" rIns="0" bIns="0" rtlCol="0" anchor="ctr">
-            <a:normAutofit/>
-          </a:bodyPr>
+          <a:bodyPr wrap="square" lIns="0" tIns="0" rIns="0" bIns="0" rtlCol="0" anchor="ctr"/>
           <a:lstStyle/>
           <a:p>
             <a:pPr algn="ctr" indent="0" marL="0">
               <a:buNone/>
             </a:pPr>
             <a:r>
-              <a:rPr lang="en-US" sz="3600" b="1" dirty="0">
-                <a:solidFill>
-                  <a:srgbClr val="990011"/>
+              <a:rPr lang="en-US" sz="1800" i="1" dirty="0">
+                <a:solidFill>
+                  <a:srgbClr val="555555"/>
                 </a:solidFill>
                 <a:latin typeface="Times New Roman" pitchFamily="34" charset="0"/>
                 <a:ea typeface="Times New Roman" pitchFamily="34" charset="-122"/>
                 <a:cs typeface="Times New Roman" pitchFamily="34" charset="-120"/>
               </a:rPr>
-              <a:t>Evaluation 1</a:t>
-            </a:r>
-            <a:endParaRPr lang="en-US" sz="3600" dirty="0"/>
-          </a:p>
-        </p:txBody>
-      </p:sp>
-      <p:sp>
-        <p:nvSpPr>
-          <p:cNvPr id="5" name="Text 2"/>
-          <p:cNvSpPr/>
-          <p:nvPr/>
-        </p:nvSpPr>
-        <p:spPr>
-          <a:xfrm>
-            <a:off x="5349240" y="1783080"/>
-            <a:ext cx="6522415" cy="4663440"/>
-          </a:xfrm>
-          <a:prstGeom prst="rect">
-            <a:avLst/>
-          </a:prstGeom>
-          <a:noFill/>
-          <a:ln/>
-        </p:spPr>
-        <p:txBody>
-          <a:bodyPr wrap="square" lIns="0" tIns="0" rIns="0" bIns="0" rtlCol="0" anchor="t"/>
-          <a:lstStyle/>
-          <a:p>
-            <a:pPr algn="l" indent="0" marL="0">
-              <a:spcAft>
-                <a:spcPts val="800"/>
-              </a:spcAft>
-              <a:buNone/>
-            </a:pPr>
-            <a:r>
-              <a:rPr lang="en-US" sz="4000" dirty="0">
-                <a:solidFill>
-                  <a:srgbClr val="111111"/>
-                </a:solidFill>
-                <a:latin typeface="Times New Roman" pitchFamily="34" charset="0"/>
-                <a:ea typeface="Times New Roman" pitchFamily="34" charset="-122"/>
-                <a:cs typeface="Times New Roman" pitchFamily="34" charset="-120"/>
-              </a:rPr>
-              <a:t>What is Pangaea?</a:t>
-            </a:r>
-            <a:endParaRPr lang="en-US" sz="4000" dirty="0"/>
+              <a:t>Illustration: the break-up of Pangaea</a:t>
+            </a:r>
+            <a:endParaRPr lang="en-US" sz="1800" dirty="0"/>
           </a:p>
         </p:txBody>
       </p:sp>
@@ -12911,7 +13193,7 @@
                 <a:ea typeface="Calibri" pitchFamily="34" charset="-122"/>
                 <a:cs typeface="Calibri" pitchFamily="34" charset="-120"/>
               </a:rPr>
-              <a:t>FORMATIVE EVALUATION</a:t>
+              <a:t>BOARD SUMMARY</a:t>
             </a:r>
             <a:endParaRPr lang="en-US" sz="1400" dirty="0"/>
           </a:p>
@@ -12934,7 +13216,7 @@
         <p:spPr>
           <a:xfrm>
             <a:off x="0" y="658368"/>
-            <a:ext cx="5120640" cy="5833872"/>
+            <a:ext cx="1463040" cy="5833872"/>
           </a:xfrm>
           <a:prstGeom prst="rect">
             <a:avLst/>
@@ -12949,8 +13231,8 @@
         </p:nvSpPr>
         <p:spPr>
           <a:xfrm>
-            <a:off x="5349240" y="1005840"/>
-            <a:ext cx="6522415" cy="731520"/>
+            <a:off x="1691640" y="1005840"/>
+            <a:ext cx="10180015" cy="731520"/>
           </a:xfrm>
           <a:prstGeom prst="rect">
             <a:avLst/>
@@ -12976,7 +13258,7 @@
                 <a:ea typeface="Times New Roman" pitchFamily="34" charset="-122"/>
                 <a:cs typeface="Times New Roman" pitchFamily="34" charset="-120"/>
               </a:rPr>
-              <a:t>Expected Answer</a:t>
+              <a:t>3. Evidence of Continental Drift</a:t>
             </a:r>
             <a:endParaRPr lang="en-US" sz="3600" dirty="0"/>
           </a:p>
@@ -12990,8 +13272,8 @@
         </p:nvSpPr>
         <p:spPr>
           <a:xfrm>
-            <a:off x="5349240" y="1783080"/>
-            <a:ext cx="6522415" cy="4663440"/>
+            <a:off x="1691640" y="1783080"/>
+            <a:ext cx="10180015" cy="4663440"/>
           </a:xfrm>
           <a:prstGeom prst="rect">
             <a:avLst/>
@@ -13010,7 +13292,7 @@
               <a:buNone/>
             </a:pPr>
             <a:r>
-              <a:rPr lang="en-US" sz="4000" dirty="0">
+              <a:rPr lang="en-US" sz="4000" i="1" dirty="0">
                 <a:solidFill>
                   <a:srgbClr val="111111"/>
                 </a:solidFill>
@@ -13018,7 +13300,81 @@
                 <a:ea typeface="Times New Roman" pitchFamily="34" charset="-122"/>
                 <a:cs typeface="Times New Roman" pitchFamily="34" charset="-120"/>
               </a:rPr>
-              <a:t>The single big continent of long ago.</a:t>
+              <a:t>The following evidence supports the theory:</a:t>
+            </a:r>
+            <a:endParaRPr lang="en-US" sz="4000" dirty="0"/>
+          </a:p>
+          <a:p>
+            <a:pPr algn="l" indent="0" marL="0">
+              <a:spcAft>
+                <a:spcPts val="800"/>
+              </a:spcAft>
+              <a:buNone/>
+            </a:pPr>
+            <a:r>
+              <a:rPr lang="en-US" sz="4000" b="1" dirty="0">
+                <a:solidFill>
+                  <a:srgbClr val="111111"/>
+                </a:solidFill>
+                <a:latin typeface="Times New Roman" pitchFamily="34" charset="0"/>
+                <a:ea typeface="Times New Roman" pitchFamily="34" charset="-122"/>
+                <a:cs typeface="Times New Roman" pitchFamily="34" charset="-120"/>
+              </a:rPr>
+              <a:t>Jigsaw fit: </a:t>
+            </a:r>
+            <a:pPr algn="l" indent="0" marL="0">
+              <a:spcAft>
+                <a:spcPts val="800"/>
+              </a:spcAft>
+              <a:buNone/>
+            </a:pPr>
+            <a:r>
+              <a:rPr lang="en-US" sz="4000" dirty="0">
+                <a:solidFill>
+                  <a:srgbClr val="111111"/>
+                </a:solidFill>
+                <a:latin typeface="Times New Roman" pitchFamily="34" charset="0"/>
+                <a:ea typeface="Times New Roman" pitchFamily="34" charset="-122"/>
+                <a:cs typeface="Times New Roman" pitchFamily="34" charset="-120"/>
+              </a:rPr>
+              <a:t>The coasts of Africa and South America fit together like a puzzle.</a:t>
+            </a:r>
+            <a:endParaRPr lang="en-US" sz="4000" dirty="0"/>
+          </a:p>
+          <a:p>
+            <a:pPr algn="l" indent="0" marL="0">
+              <a:spcAft>
+                <a:spcPts val="800"/>
+              </a:spcAft>
+              <a:buNone/>
+            </a:pPr>
+            <a:r>
+              <a:rPr lang="en-US" sz="4000" b="1" dirty="0">
+                <a:solidFill>
+                  <a:srgbClr val="111111"/>
+                </a:solidFill>
+                <a:latin typeface="Times New Roman" pitchFamily="34" charset="0"/>
+                <a:ea typeface="Times New Roman" pitchFamily="34" charset="-122"/>
+                <a:cs typeface="Times New Roman" pitchFamily="34" charset="-120"/>
+              </a:rPr>
+              <a:t>Fossils: </a:t>
+            </a:r>
+            <a:pPr algn="l" indent="0" marL="0">
+              <a:spcAft>
+                <a:spcPts val="800"/>
+              </a:spcAft>
+              <a:buNone/>
+            </a:pPr>
+            <a:r>
+              <a:rPr lang="en-US" sz="4000" dirty="0">
+                <a:solidFill>
+                  <a:srgbClr val="111111"/>
+                </a:solidFill>
+                <a:latin typeface="Times New Roman" pitchFamily="34" charset="0"/>
+                <a:ea typeface="Times New Roman" pitchFamily="34" charset="-122"/>
+                <a:cs typeface="Times New Roman" pitchFamily="34" charset="-120"/>
+              </a:rPr>
+              <a:t>The same fossils of plants and animals are found on both sides of the Atlantic.</a:t>
             </a:r>
             <a:endParaRPr lang="en-US" sz="4000" dirty="0"/>
           </a:p>
@@ -13130,7 +13486,7 @@
                 <a:ea typeface="Calibri" pitchFamily="34" charset="-122"/>
                 <a:cs typeface="Calibri" pitchFamily="34" charset="-120"/>
               </a:rPr>
-              <a:t>FORMATIVE EVALUATION</a:t>
+              <a:t>BOARD SUMMARY</a:t>
             </a:r>
             <a:endParaRPr lang="en-US" sz="1400" dirty="0"/>
           </a:p>
@@ -13195,7 +13551,7 @@
                 <a:ea typeface="Times New Roman" pitchFamily="34" charset="-122"/>
                 <a:cs typeface="Times New Roman" pitchFamily="34" charset="-120"/>
               </a:rPr>
-              <a:t>Evaluation 2</a:t>
+              <a:t>3. Evidence of Continental Drift (continued)</a:t>
             </a:r>
             <a:endParaRPr lang="en-US" sz="3600" dirty="0"/>
           </a:p>
@@ -13229,7 +13585,7 @@
               <a:buNone/>
             </a:pPr>
             <a:r>
-              <a:rPr lang="en-US" sz="4000" dirty="0">
+              <a:rPr lang="en-US" sz="4000" b="1" dirty="0">
                 <a:solidFill>
                   <a:srgbClr val="111111"/>
                 </a:solidFill>
@@ -13237,7 +13593,61 @@
                 <a:ea typeface="Times New Roman" pitchFamily="34" charset="-122"/>
                 <a:cs typeface="Times New Roman" pitchFamily="34" charset="-120"/>
               </a:rPr>
-              <a:t>Give two pieces of evidence for continental drift.</a:t>
+              <a:t>Rocks: </a:t>
+            </a:r>
+            <a:pPr algn="l" indent="0" marL="0">
+              <a:spcAft>
+                <a:spcPts val="800"/>
+              </a:spcAft>
+              <a:buNone/>
+            </a:pPr>
+            <a:r>
+              <a:rPr lang="en-US" sz="4000" dirty="0">
+                <a:solidFill>
+                  <a:srgbClr val="111111"/>
+                </a:solidFill>
+                <a:latin typeface="Times New Roman" pitchFamily="34" charset="0"/>
+                <a:ea typeface="Times New Roman" pitchFamily="34" charset="-122"/>
+                <a:cs typeface="Times New Roman" pitchFamily="34" charset="-120"/>
+              </a:rPr>
+              <a:t>The same types and ages of rocks are found on continents now far apart.</a:t>
+            </a:r>
+            <a:endParaRPr lang="en-US" sz="4000" dirty="0"/>
+          </a:p>
+          <a:p>
+            <a:pPr algn="l" indent="0" marL="0">
+              <a:spcAft>
+                <a:spcPts val="800"/>
+              </a:spcAft>
+              <a:buNone/>
+            </a:pPr>
+            <a:r>
+              <a:rPr lang="en-US" sz="4000" b="1" dirty="0">
+                <a:solidFill>
+                  <a:srgbClr val="111111"/>
+                </a:solidFill>
+                <a:latin typeface="Times New Roman" pitchFamily="34" charset="0"/>
+                <a:ea typeface="Times New Roman" pitchFamily="34" charset="-122"/>
+                <a:cs typeface="Times New Roman" pitchFamily="34" charset="-120"/>
+              </a:rPr>
+              <a:t>Old ice marks: </a:t>
+            </a:r>
+            <a:pPr algn="l" indent="0" marL="0">
+              <a:spcAft>
+                <a:spcPts val="800"/>
+              </a:spcAft>
+              <a:buNone/>
+            </a:pPr>
+            <a:r>
+              <a:rPr lang="en-US" sz="4000" dirty="0">
+                <a:solidFill>
+                  <a:srgbClr val="111111"/>
+                </a:solidFill>
+                <a:latin typeface="Times New Roman" pitchFamily="34" charset="0"/>
+                <a:ea typeface="Times New Roman" pitchFamily="34" charset="-122"/>
+                <a:cs typeface="Times New Roman" pitchFamily="34" charset="-120"/>
+              </a:rPr>
+              <a:t>Marks of ancient glaciers are found in hot lands such as Africa and India.</a:t>
             </a:r>
             <a:endParaRPr lang="en-US" sz="4000" dirty="0"/>
           </a:p>
@@ -13349,15 +13759,54 @@
                 <a:ea typeface="Calibri" pitchFamily="34" charset="-122"/>
                 <a:cs typeface="Calibri" pitchFamily="34" charset="-120"/>
               </a:rPr>
-              <a:t>FORMATIVE EVALUATION</a:t>
+              <a:t>BOARD SUMMARY</a:t>
             </a:r>
             <a:endParaRPr lang="en-US" sz="1400" dirty="0"/>
+          </a:p>
+        </p:txBody>
+      </p:sp>
+      <p:sp>
+        <p:nvSpPr>
+          <p:cNvPr id="3" name="Text 1"/>
+          <p:cNvSpPr/>
+          <p:nvPr/>
+        </p:nvSpPr>
+        <p:spPr>
+          <a:xfrm>
+            <a:off x="457200" y="1005840"/>
+            <a:ext cx="11277295" cy="731520"/>
+          </a:xfrm>
+          <a:prstGeom prst="rect">
+            <a:avLst/>
+          </a:prstGeom>
+          <a:noFill/>
+          <a:ln/>
+        </p:spPr>
+        <p:txBody>
+          <a:bodyPr wrap="square" lIns="0" tIns="0" rIns="0" bIns="0" rtlCol="0" anchor="ctr"/>
+          <a:lstStyle/>
+          <a:p>
+            <a:pPr algn="ctr" indent="0" marL="0">
+              <a:buNone/>
+            </a:pPr>
+            <a:r>
+              <a:rPr lang="en-US" sz="3600" b="1" dirty="0">
+                <a:solidFill>
+                  <a:srgbClr val="990011"/>
+                </a:solidFill>
+                <a:latin typeface="Times New Roman" pitchFamily="34" charset="0"/>
+                <a:ea typeface="Times New Roman" pitchFamily="34" charset="-122"/>
+                <a:cs typeface="Times New Roman" pitchFamily="34" charset="-120"/>
+              </a:rPr>
+              <a:t>3. Evidence of Continental Drift</a:t>
+            </a:r>
+            <a:endParaRPr lang="en-US" sz="3600" dirty="0"/>
           </a:p>
         </p:txBody>
       </p:sp>
       <p:pic>
         <p:nvPicPr>
-          <p:cNvPr id="3" name="Image 0" descr="/home/claude/f4/img/minesec_sheet.png">    </p:cNvPr>
+          <p:cNvPr id="4" name="Image 0" descr="/home/claude/f4/img/v2/jigsaw_last.png">    </p:cNvPr>
           <p:cNvPicPr>
             <a:picLocks noChangeAspect="1"/>
           </p:cNvPicPr>
@@ -13371,8 +13820,8 @@
         </p:blipFill>
         <p:spPr>
           <a:xfrm>
-            <a:off x="0" y="658368"/>
-            <a:ext cx="5120640" cy="5833872"/>
+            <a:off x="1825600" y="1783080"/>
+            <a:ext cx="8540496" cy="4270248"/>
           </a:xfrm>
           <a:prstGeom prst="rect">
             <a:avLst/>
@@ -13381,14 +13830,14 @@
       </p:pic>
       <p:sp>
         <p:nvSpPr>
-          <p:cNvPr id="4" name="Text 1"/>
+          <p:cNvPr id="5" name="Text 2"/>
           <p:cNvSpPr/>
           <p:nvPr/>
         </p:nvSpPr>
         <p:spPr>
           <a:xfrm>
-            <a:off x="5349240" y="1005840"/>
-            <a:ext cx="6522415" cy="731520"/>
+            <a:off x="457200" y="6089904"/>
+            <a:ext cx="11277295" cy="347472"/>
           </a:xfrm>
           <a:prstGeom prst="rect">
             <a:avLst/>
@@ -13397,68 +13846,24 @@
           <a:ln/>
         </p:spPr>
         <p:txBody>
-          <a:bodyPr wrap="square" lIns="0" tIns="0" rIns="0" bIns="0" rtlCol="0" anchor="ctr">
-            <a:normAutofit/>
-          </a:bodyPr>
+          <a:bodyPr wrap="square" lIns="0" tIns="0" rIns="0" bIns="0" rtlCol="0" anchor="ctr"/>
           <a:lstStyle/>
           <a:p>
             <a:pPr algn="ctr" indent="0" marL="0">
               <a:buNone/>
             </a:pPr>
             <a:r>
-              <a:rPr lang="en-US" sz="3600" b="1" dirty="0">
-                <a:solidFill>
-                  <a:srgbClr val="990011"/>
+              <a:rPr lang="en-US" sz="1800" i="1" dirty="0">
+                <a:solidFill>
+                  <a:srgbClr val="555555"/>
                 </a:solidFill>
                 <a:latin typeface="Times New Roman" pitchFamily="34" charset="0"/>
                 <a:ea typeface="Times New Roman" pitchFamily="34" charset="-122"/>
                 <a:cs typeface="Times New Roman" pitchFamily="34" charset="-120"/>
               </a:rPr>
-              <a:t>Expected Answer</a:t>
-            </a:r>
-            <a:endParaRPr lang="en-US" sz="3600" dirty="0"/>
-          </a:p>
-        </p:txBody>
-      </p:sp>
-      <p:sp>
-        <p:nvSpPr>
-          <p:cNvPr id="5" name="Text 2"/>
-          <p:cNvSpPr/>
-          <p:nvPr/>
-        </p:nvSpPr>
-        <p:spPr>
-          <a:xfrm>
-            <a:off x="5349240" y="1783080"/>
-            <a:ext cx="6522415" cy="4663440"/>
-          </a:xfrm>
-          <a:prstGeom prst="rect">
-            <a:avLst/>
-          </a:prstGeom>
-          <a:noFill/>
-          <a:ln/>
-        </p:spPr>
-        <p:txBody>
-          <a:bodyPr wrap="square" lIns="0" tIns="0" rIns="0" bIns="0" rtlCol="0" anchor="t"/>
-          <a:lstStyle/>
-          <a:p>
-            <a:pPr algn="l" indent="0" marL="0">
-              <a:spcAft>
-                <a:spcPts val="800"/>
-              </a:spcAft>
-              <a:buNone/>
-            </a:pPr>
-            <a:r>
-              <a:rPr lang="en-US" sz="4000" dirty="0">
-                <a:solidFill>
-                  <a:srgbClr val="111111"/>
-                </a:solidFill>
-                <a:latin typeface="Times New Roman" pitchFamily="34" charset="0"/>
-                <a:ea typeface="Times New Roman" pitchFamily="34" charset="-122"/>
-                <a:cs typeface="Times New Roman" pitchFamily="34" charset="-120"/>
-              </a:rPr>
-              <a:t>The jigsaw fit and the same fossils on both continents.</a:t>
-            </a:r>
-            <a:endParaRPr lang="en-US" sz="4000" dirty="0"/>
+              <a:t>Illustration: the jigsaw fit of the continents</a:t>
+            </a:r>
+            <a:endParaRPr lang="en-US" sz="1800" dirty="0"/>
           </a:p>
         </p:txBody>
       </p:sp>
@@ -13568,7 +13973,7 @@
                 <a:ea typeface="Calibri" pitchFamily="34" charset="-122"/>
                 <a:cs typeface="Calibri" pitchFamily="34" charset="-120"/>
               </a:rPr>
-              <a:t>REMEDIATION</a:t>
+              <a:t>FORMATIVE EVALUATION</a:t>
             </a:r>
             <a:endParaRPr lang="en-US" sz="1400" dirty="0"/>
           </a:p>
@@ -13633,7 +14038,7 @@
                 <a:ea typeface="Times New Roman" pitchFamily="34" charset="-122"/>
                 <a:cs typeface="Times New Roman" pitchFamily="34" charset="-120"/>
               </a:rPr>
-              <a:t>Remediation</a:t>
+              <a:t>Evaluation 1</a:t>
             </a:r>
             <a:endParaRPr lang="en-US" sz="3600" dirty="0"/>
           </a:p>
@@ -13667,7 +14072,7 @@
               <a:buNone/>
             </a:pPr>
             <a:r>
-              <a:rPr lang="en-US" sz="4000" b="1" dirty="0">
+              <a:rPr lang="en-US" sz="4000" dirty="0">
                 <a:solidFill>
                   <a:srgbClr val="111111"/>
                 </a:solidFill>
@@ -13675,51 +14080,7 @@
                 <a:ea typeface="Times New Roman" pitchFamily="34" charset="-122"/>
                 <a:cs typeface="Times New Roman" pitchFamily="34" charset="-120"/>
               </a:rPr>
-              <a:t>Fill in the blanks:</a:t>
-            </a:r>
-            <a:endParaRPr lang="en-US" sz="4000" dirty="0"/>
-          </a:p>
-          <a:p>
-            <a:pPr algn="l" marL="342900" indent="-342900">
-              <a:spcAft>
-                <a:spcPts val="800"/>
-              </a:spcAft>
-              <a:buSzPct val="100000"/>
-              <a:buFont typeface="+mj-lt"/>
-              <a:buAutoNum type="arabicPeriod" startAt="1"/>
-            </a:pPr>
-            <a:r>
-              <a:rPr lang="en-US" sz="4000" dirty="0">
-                <a:solidFill>
-                  <a:srgbClr val="111111"/>
-                </a:solidFill>
-                <a:latin typeface="Times New Roman" pitchFamily="34" charset="0"/>
-                <a:ea typeface="Times New Roman" pitchFamily="34" charset="-122"/>
-                <a:cs typeface="Times New Roman" pitchFamily="34" charset="-120"/>
-              </a:rPr>
-              <a:t>The theory of continental drift was given by ______.</a:t>
-            </a:r>
-            <a:endParaRPr lang="en-US" sz="4000" dirty="0"/>
-          </a:p>
-          <a:p>
-            <a:pPr algn="l" marL="342900" indent="-342900">
-              <a:spcAft>
-                <a:spcPts val="800"/>
-              </a:spcAft>
-              <a:buSzPct val="100000"/>
-              <a:buFont typeface="+mj-lt"/>
-              <a:buAutoNum type="arabicPeriod" startAt="1"/>
-            </a:pPr>
-            <a:r>
-              <a:rPr lang="en-US" sz="4000" dirty="0">
-                <a:solidFill>
-                  <a:srgbClr val="111111"/>
-                </a:solidFill>
-                <a:latin typeface="Times New Roman" pitchFamily="34" charset="0"/>
-                <a:ea typeface="Times New Roman" pitchFamily="34" charset="-122"/>
-                <a:cs typeface="Times New Roman" pitchFamily="34" charset="-120"/>
-              </a:rPr>
-              <a:t>The single big continent was called ______.</a:t>
+              <a:t>What is Pangaea?</a:t>
             </a:r>
             <a:endParaRPr lang="en-US" sz="4000" dirty="0"/>
           </a:p>
@@ -13831,7 +14192,7 @@
                 <a:ea typeface="Calibri" pitchFamily="34" charset="-122"/>
                 <a:cs typeface="Calibri" pitchFamily="34" charset="-120"/>
               </a:rPr>
-              <a:t>REMEDIATION</a:t>
+              <a:t>FORMATIVE EVALUATION</a:t>
             </a:r>
             <a:endParaRPr lang="en-US" sz="1400" dirty="0"/>
           </a:p>
@@ -13896,7 +14257,7 @@
                 <a:ea typeface="Times New Roman" pitchFamily="34" charset="-122"/>
                 <a:cs typeface="Times New Roman" pitchFamily="34" charset="-120"/>
               </a:rPr>
-              <a:t>Remediation (continued)</a:t>
+              <a:t>Expected Answer</a:t>
             </a:r>
             <a:endParaRPr lang="en-US" sz="3600" dirty="0"/>
           </a:p>
@@ -13923,13 +14284,11 @@
           <a:bodyPr wrap="square" lIns="0" tIns="0" rIns="0" bIns="0" rtlCol="0" anchor="t"/>
           <a:lstStyle/>
           <a:p>
-            <a:pPr algn="l" marL="342900" indent="-342900">
+            <a:pPr algn="l" indent="0" marL="0">
               <a:spcAft>
                 <a:spcPts val="800"/>
               </a:spcAft>
-              <a:buSzPct val="100000"/>
-              <a:buFont typeface="+mj-lt"/>
-              <a:buAutoNum type="arabicPeriod" startAt="1"/>
+              <a:buNone/>
             </a:pPr>
             <a:r>
               <a:rPr lang="en-US" sz="4000" dirty="0">
@@ -13940,7 +14299,7 @@
                 <a:ea typeface="Times New Roman" pitchFamily="34" charset="-122"/>
                 <a:cs typeface="Times New Roman" pitchFamily="34" charset="-120"/>
               </a:rPr>
-              <a:t>Africa and South America fit like a ______.</a:t>
+              <a:t>The single big continent of long ago.</a:t>
             </a:r>
             <a:endParaRPr lang="en-US" sz="4000" dirty="0"/>
           </a:p>
@@ -14052,7 +14411,7 @@
                 <a:ea typeface="Calibri" pitchFamily="34" charset="-122"/>
                 <a:cs typeface="Calibri" pitchFamily="34" charset="-120"/>
               </a:rPr>
-              <a:t>HOMEWORK</a:t>
+              <a:t>FORMATIVE EVALUATION</a:t>
             </a:r>
             <a:endParaRPr lang="en-US" sz="1400" dirty="0"/>
           </a:p>
@@ -14117,7 +14476,7 @@
                 <a:ea typeface="Times New Roman" pitchFamily="34" charset="-122"/>
                 <a:cs typeface="Times New Roman" pitchFamily="34" charset="-120"/>
               </a:rPr>
-              <a:t>Homework</a:t>
+              <a:t>Evaluation 2</a:t>
             </a:r>
             <a:endParaRPr lang="en-US" sz="3600" dirty="0"/>
           </a:p>
@@ -14159,7 +14518,7 @@
                 <a:ea typeface="Times New Roman" pitchFamily="34" charset="-122"/>
                 <a:cs typeface="Times New Roman" pitchFamily="34" charset="-120"/>
               </a:rPr>
-              <a:t>Listen to the news or ask an adult about a recent earthquake or volcanic eruption in the world. Write the name of the country and what happened.</a:t>
+              <a:t>Give two pieces of evidence for continental drift.</a:t>
             </a:r>
             <a:endParaRPr lang="en-US" sz="4000" dirty="0"/>
           </a:p>
@@ -14510,7 +14869,7 @@
                 <a:ea typeface="Calibri" pitchFamily="34" charset="-122"/>
                 <a:cs typeface="Calibri" pitchFamily="34" charset="-120"/>
               </a:rPr>
-              <a:t>NEXT LESSON</a:t>
+              <a:t>FORMATIVE EVALUATION</a:t>
             </a:r>
             <a:endParaRPr lang="en-US" sz="1400" dirty="0"/>
           </a:p>
@@ -14575,7 +14934,7 @@
                 <a:ea typeface="Times New Roman" pitchFamily="34" charset="-122"/>
                 <a:cs typeface="Times New Roman" pitchFamily="34" charset="-120"/>
               </a:rPr>
-              <a:t>Next Lesson</a:t>
+              <a:t>Expected Answer</a:t>
             </a:r>
             <a:endParaRPr lang="en-US" sz="3600" dirty="0"/>
           </a:p>
@@ -14599,17 +14958,17 @@
           <a:ln/>
         </p:spPr>
         <p:txBody>
-          <a:bodyPr wrap="square" lIns="0" tIns="0" rIns="0" bIns="0" rtlCol="0" anchor="ctr"/>
-          <a:lstStyle/>
-          <a:p>
-            <a:pPr algn="ctr" indent="0" marL="0">
+          <a:bodyPr wrap="square" lIns="0" tIns="0" rIns="0" bIns="0" rtlCol="0" anchor="t"/>
+          <a:lstStyle/>
+          <a:p>
+            <a:pPr algn="l" indent="0" marL="0">
               <a:spcAft>
                 <a:spcPts val="800"/>
               </a:spcAft>
               <a:buNone/>
             </a:pPr>
             <a:r>
-              <a:rPr lang="en-US" sz="4000" b="1" dirty="0">
+              <a:rPr lang="en-US" sz="4000" dirty="0">
                 <a:solidFill>
                   <a:srgbClr val="111111"/>
                 </a:solidFill>
@@ -14617,27 +14976,7 @@
                 <a:ea typeface="Times New Roman" pitchFamily="34" charset="-122"/>
                 <a:cs typeface="Times New Roman" pitchFamily="34" charset="-120"/>
               </a:rPr>
-              <a:t>Our next lesson will be on:</a:t>
-            </a:r>
-            <a:endParaRPr lang="en-US" sz="4000" dirty="0"/>
-          </a:p>
-          <a:p>
-            <a:pPr algn="ctr" indent="0" marL="0">
-              <a:spcAft>
-                <a:spcPts val="800"/>
-              </a:spcAft>
-              <a:buNone/>
-            </a:pPr>
-            <a:r>
-              <a:rPr lang="en-US" sz="4000" b="1" dirty="0">
-                <a:solidFill>
-                  <a:srgbClr val="990011"/>
-                </a:solidFill>
-                <a:latin typeface="Times New Roman" pitchFamily="34" charset="0"/>
-                <a:ea typeface="Times New Roman" pitchFamily="34" charset="-122"/>
-                <a:cs typeface="Times New Roman" pitchFamily="34" charset="-120"/>
-              </a:rPr>
-              <a:t>Lesson 10: The Theory of Plate Tectonics</a:t>
+              <a:t>The jigsaw fit and the same fossils on both continents.</a:t>
             </a:r>
             <a:endParaRPr lang="en-US" sz="4000" dirty="0"/>
           </a:p>
@@ -14749,6 +15088,948 @@
                 <a:ea typeface="Calibri" pitchFamily="34" charset="-122"/>
                 <a:cs typeface="Calibri" pitchFamily="34" charset="-120"/>
               </a:rPr>
+              <a:t>REMEDIATION</a:t>
+            </a:r>
+            <a:endParaRPr lang="en-US" sz="1400" dirty="0"/>
+          </a:p>
+        </p:txBody>
+      </p:sp>
+      <p:pic>
+        <p:nvPicPr>
+          <p:cNvPr id="3" name="Image 0" descr="/home/claude/f4/img/minesec_sheet.png">    </p:cNvPr>
+          <p:cNvPicPr>
+            <a:picLocks noChangeAspect="1"/>
+          </p:cNvPicPr>
+          <p:nvPr/>
+        </p:nvPicPr>
+        <p:blipFill>
+          <a:blip r:embed="rId1"/>
+          <a:stretch>
+            <a:fillRect/>
+          </a:stretch>
+        </p:blipFill>
+        <p:spPr>
+          <a:xfrm>
+            <a:off x="0" y="658368"/>
+            <a:ext cx="5120640" cy="5833872"/>
+          </a:xfrm>
+          <a:prstGeom prst="rect">
+            <a:avLst/>
+          </a:prstGeom>
+        </p:spPr>
+      </p:pic>
+      <p:sp>
+        <p:nvSpPr>
+          <p:cNvPr id="4" name="Text 1"/>
+          <p:cNvSpPr/>
+          <p:nvPr/>
+        </p:nvSpPr>
+        <p:spPr>
+          <a:xfrm>
+            <a:off x="5349240" y="1005840"/>
+            <a:ext cx="6522415" cy="731520"/>
+          </a:xfrm>
+          <a:prstGeom prst="rect">
+            <a:avLst/>
+          </a:prstGeom>
+          <a:noFill/>
+          <a:ln/>
+        </p:spPr>
+        <p:txBody>
+          <a:bodyPr wrap="square" lIns="0" tIns="0" rIns="0" bIns="0" rtlCol="0" anchor="ctr">
+            <a:normAutofit/>
+          </a:bodyPr>
+          <a:lstStyle/>
+          <a:p>
+            <a:pPr algn="ctr" indent="0" marL="0">
+              <a:buNone/>
+            </a:pPr>
+            <a:r>
+              <a:rPr lang="en-US" sz="3600" b="1" dirty="0">
+                <a:solidFill>
+                  <a:srgbClr val="990011"/>
+                </a:solidFill>
+                <a:latin typeface="Times New Roman" pitchFamily="34" charset="0"/>
+                <a:ea typeface="Times New Roman" pitchFamily="34" charset="-122"/>
+                <a:cs typeface="Times New Roman" pitchFamily="34" charset="-120"/>
+              </a:rPr>
+              <a:t>Remediation</a:t>
+            </a:r>
+            <a:endParaRPr lang="en-US" sz="3600" dirty="0"/>
+          </a:p>
+        </p:txBody>
+      </p:sp>
+      <p:sp>
+        <p:nvSpPr>
+          <p:cNvPr id="5" name="Text 2"/>
+          <p:cNvSpPr/>
+          <p:nvPr/>
+        </p:nvSpPr>
+        <p:spPr>
+          <a:xfrm>
+            <a:off x="5349240" y="1783080"/>
+            <a:ext cx="6522415" cy="4663440"/>
+          </a:xfrm>
+          <a:prstGeom prst="rect">
+            <a:avLst/>
+          </a:prstGeom>
+          <a:noFill/>
+          <a:ln/>
+        </p:spPr>
+        <p:txBody>
+          <a:bodyPr wrap="square" lIns="0" tIns="0" rIns="0" bIns="0" rtlCol="0" anchor="t"/>
+          <a:lstStyle/>
+          <a:p>
+            <a:pPr algn="l" indent="0" marL="0">
+              <a:spcAft>
+                <a:spcPts val="800"/>
+              </a:spcAft>
+              <a:buNone/>
+            </a:pPr>
+            <a:r>
+              <a:rPr lang="en-US" sz="4000" b="1" dirty="0">
+                <a:solidFill>
+                  <a:srgbClr val="111111"/>
+                </a:solidFill>
+                <a:latin typeface="Times New Roman" pitchFamily="34" charset="0"/>
+                <a:ea typeface="Times New Roman" pitchFamily="34" charset="-122"/>
+                <a:cs typeface="Times New Roman" pitchFamily="34" charset="-120"/>
+              </a:rPr>
+              <a:t>Fill in the blanks:</a:t>
+            </a:r>
+            <a:endParaRPr lang="en-US" sz="4000" dirty="0"/>
+          </a:p>
+          <a:p>
+            <a:pPr algn="l" marL="342900" indent="-342900">
+              <a:spcAft>
+                <a:spcPts val="800"/>
+              </a:spcAft>
+              <a:buSzPct val="100000"/>
+              <a:buFont typeface="+mj-lt"/>
+              <a:buAutoNum type="arabicPeriod" startAt="1"/>
+            </a:pPr>
+            <a:r>
+              <a:rPr lang="en-US" sz="4000" dirty="0">
+                <a:solidFill>
+                  <a:srgbClr val="111111"/>
+                </a:solidFill>
+                <a:latin typeface="Times New Roman" pitchFamily="34" charset="0"/>
+                <a:ea typeface="Times New Roman" pitchFamily="34" charset="-122"/>
+                <a:cs typeface="Times New Roman" pitchFamily="34" charset="-120"/>
+              </a:rPr>
+              <a:t>The theory of continental drift was given by ______.</a:t>
+            </a:r>
+            <a:endParaRPr lang="en-US" sz="4000" dirty="0"/>
+          </a:p>
+          <a:p>
+            <a:pPr algn="l" marL="342900" indent="-342900">
+              <a:spcAft>
+                <a:spcPts val="800"/>
+              </a:spcAft>
+              <a:buSzPct val="100000"/>
+              <a:buFont typeface="+mj-lt"/>
+              <a:buAutoNum type="arabicPeriod" startAt="1"/>
+            </a:pPr>
+            <a:r>
+              <a:rPr lang="en-US" sz="4000" dirty="0">
+                <a:solidFill>
+                  <a:srgbClr val="111111"/>
+                </a:solidFill>
+                <a:latin typeface="Times New Roman" pitchFamily="34" charset="0"/>
+                <a:ea typeface="Times New Roman" pitchFamily="34" charset="-122"/>
+                <a:cs typeface="Times New Roman" pitchFamily="34" charset="-120"/>
+              </a:rPr>
+              <a:t>The single big continent was called ______.</a:t>
+            </a:r>
+            <a:endParaRPr lang="en-US" sz="4000" dirty="0"/>
+          </a:p>
+        </p:txBody>
+      </p:sp>
+      <p:sp>
+        <p:nvSpPr>
+          <p:cNvPr id="25" name="Slide Number Placeholder 0"/>
+          <p:cNvSpPr>
+            <a:spLocks noGrp="1"/>
+          </p:cNvSpPr>
+          <p:nvPr>
+            <p:ph type="sldNum" sz="quarter" idx="4294967295"/>
+          </p:nvPr>
+        </p:nvSpPr>
+        <p:spPr>
+          <a:xfrm>
+            <a:off x="27432" y="91440"/>
+            <a:ext cx="585216" cy="475488"/>
+          </a:xfrm>
+          <a:prstGeom prst="rect">
+            <a:avLst/>
+          </a:prstGeom>
+          <a:extLst>
+            <a:ext uri="{C572A759-6A51-4108-AA02-DFA0A04FC94B}">
+              <ma14:wrappingTextBoxFlag xmlns:ma14="http://schemas.microsoft.com/office/mac/drawingml/2011/main" val="0"/>
+            </a:ext>
+          </a:extLst>
+        </p:spPr>
+        <p:txBody>
+          <a:bodyPr/>
+          <a:lstStyle>
+            <a:lvl1pPr>
+              <a:defRPr sz="2000">
+                <a:solidFill>
+                  <a:srgbClr val="FFFFFF"/>
+                </a:solidFill>
+                <a:latin typeface="Calibri"/>
+                <a:ea typeface="Calibri"/>
+                <a:cs typeface="Calibri"/>
+              </a:defRPr>
+            </a:lvl1pPr>
+          </a:lstStyle>
+          <a:p>
+            <a:pPr algn="ctr"/>
+            <a:fld id="{F7021451-1387-4CA6-816F-3879F97B5CBC}" type="slidenum">
+              <a:rPr b="1" lang="en-US"/>
+              <a:t>41</a:t>
+            </a:fld>
+            <a:endParaRPr lang="en-US"/>
+          </a:p>
+        </p:txBody>
+      </p:sp>
+    </p:spTree>
+  </p:cSld>
+  <p:clrMapOvr>
+    <a:masterClrMapping/>
+  </p:clrMapOvr>
+</p:sld>
+</file>
+
+<file path=ppt/slides/slide42.xml><?xml version="1.0" encoding="utf-8"?>
+<p:sld xmlns:a="http://schemas.openxmlformats.org/drawingml/2006/main" xmlns:r="http://schemas.openxmlformats.org/officeDocument/2006/relationships" xmlns:p="http://schemas.openxmlformats.org/presentationml/2006/main">
+  <p:cSld name="Slide 42">
+    <p:spTree>
+      <p:nvGrpSpPr>
+        <p:cNvPr id="1" name=""/>
+        <p:cNvGrpSpPr/>
+        <p:nvPr/>
+      </p:nvGrpSpPr>
+      <p:grpSpPr>
+        <a:xfrm>
+          <a:off x="0" y="0"/>
+          <a:ext cx="0" cy="0"/>
+          <a:chOff x="0" y="0"/>
+          <a:chExt cx="0" cy="0"/>
+        </a:xfrm>
+      </p:grpSpPr>
+      <p:sp>
+        <p:nvSpPr>
+          <p:cNvPr id="2" name="Text 0"/>
+          <p:cNvSpPr/>
+          <p:nvPr/>
+        </p:nvSpPr>
+        <p:spPr>
+          <a:xfrm>
+            <a:off x="457200" y="713232"/>
+            <a:ext cx="11368735" cy="274320"/>
+          </a:xfrm>
+          <a:prstGeom prst="rect">
+            <a:avLst/>
+          </a:prstGeom>
+          <a:noFill/>
+          <a:ln/>
+        </p:spPr>
+        <p:txBody>
+          <a:bodyPr wrap="square" lIns="0" tIns="0" rIns="0" bIns="0" rtlCol="0" anchor="ctr"/>
+          <a:lstStyle/>
+          <a:p>
+            <a:pPr algn="r" indent="0" marL="0">
+              <a:buNone/>
+            </a:pPr>
+            <a:r>
+              <a:rPr lang="en-US" sz="1400" b="1" dirty="0">
+                <a:solidFill>
+                  <a:srgbClr val="1C3F6E"/>
+                </a:solidFill>
+                <a:latin typeface="Calibri" pitchFamily="34" charset="0"/>
+                <a:ea typeface="Calibri" pitchFamily="34" charset="-122"/>
+                <a:cs typeface="Calibri" pitchFamily="34" charset="-120"/>
+              </a:rPr>
+              <a:t>REMEDIATION</a:t>
+            </a:r>
+            <a:endParaRPr lang="en-US" sz="1400" dirty="0"/>
+          </a:p>
+        </p:txBody>
+      </p:sp>
+      <p:pic>
+        <p:nvPicPr>
+          <p:cNvPr id="3" name="Image 0" descr="/home/claude/f4/img/minesec_sheet.png">    </p:cNvPr>
+          <p:cNvPicPr>
+            <a:picLocks noChangeAspect="1"/>
+          </p:cNvPicPr>
+          <p:nvPr/>
+        </p:nvPicPr>
+        <p:blipFill>
+          <a:blip r:embed="rId1"/>
+          <a:stretch>
+            <a:fillRect/>
+          </a:stretch>
+        </p:blipFill>
+        <p:spPr>
+          <a:xfrm>
+            <a:off x="0" y="658368"/>
+            <a:ext cx="5120640" cy="5833872"/>
+          </a:xfrm>
+          <a:prstGeom prst="rect">
+            <a:avLst/>
+          </a:prstGeom>
+        </p:spPr>
+      </p:pic>
+      <p:sp>
+        <p:nvSpPr>
+          <p:cNvPr id="4" name="Text 1"/>
+          <p:cNvSpPr/>
+          <p:nvPr/>
+        </p:nvSpPr>
+        <p:spPr>
+          <a:xfrm>
+            <a:off x="5349240" y="1005840"/>
+            <a:ext cx="6522415" cy="731520"/>
+          </a:xfrm>
+          <a:prstGeom prst="rect">
+            <a:avLst/>
+          </a:prstGeom>
+          <a:noFill/>
+          <a:ln/>
+        </p:spPr>
+        <p:txBody>
+          <a:bodyPr wrap="square" lIns="0" tIns="0" rIns="0" bIns="0" rtlCol="0" anchor="ctr">
+            <a:normAutofit/>
+          </a:bodyPr>
+          <a:lstStyle/>
+          <a:p>
+            <a:pPr algn="ctr" indent="0" marL="0">
+              <a:buNone/>
+            </a:pPr>
+            <a:r>
+              <a:rPr lang="en-US" sz="3600" b="1" dirty="0">
+                <a:solidFill>
+                  <a:srgbClr val="990011"/>
+                </a:solidFill>
+                <a:latin typeface="Times New Roman" pitchFamily="34" charset="0"/>
+                <a:ea typeface="Times New Roman" pitchFamily="34" charset="-122"/>
+                <a:cs typeface="Times New Roman" pitchFamily="34" charset="-120"/>
+              </a:rPr>
+              <a:t>Remediation (continued)</a:t>
+            </a:r>
+            <a:endParaRPr lang="en-US" sz="3600" dirty="0"/>
+          </a:p>
+        </p:txBody>
+      </p:sp>
+      <p:sp>
+        <p:nvSpPr>
+          <p:cNvPr id="5" name="Text 2"/>
+          <p:cNvSpPr/>
+          <p:nvPr/>
+        </p:nvSpPr>
+        <p:spPr>
+          <a:xfrm>
+            <a:off x="5349240" y="1783080"/>
+            <a:ext cx="6522415" cy="4663440"/>
+          </a:xfrm>
+          <a:prstGeom prst="rect">
+            <a:avLst/>
+          </a:prstGeom>
+          <a:noFill/>
+          <a:ln/>
+        </p:spPr>
+        <p:txBody>
+          <a:bodyPr wrap="square" lIns="0" tIns="0" rIns="0" bIns="0" rtlCol="0" anchor="t"/>
+          <a:lstStyle/>
+          <a:p>
+            <a:pPr algn="l" marL="342900" indent="-342900">
+              <a:spcAft>
+                <a:spcPts val="800"/>
+              </a:spcAft>
+              <a:buSzPct val="100000"/>
+              <a:buFont typeface="+mj-lt"/>
+              <a:buAutoNum type="arabicPeriod" startAt="1"/>
+            </a:pPr>
+            <a:r>
+              <a:rPr lang="en-US" sz="4000" dirty="0">
+                <a:solidFill>
+                  <a:srgbClr val="111111"/>
+                </a:solidFill>
+                <a:latin typeface="Times New Roman" pitchFamily="34" charset="0"/>
+                <a:ea typeface="Times New Roman" pitchFamily="34" charset="-122"/>
+                <a:cs typeface="Times New Roman" pitchFamily="34" charset="-120"/>
+              </a:rPr>
+              <a:t>Africa and South America fit like a ______.</a:t>
+            </a:r>
+            <a:endParaRPr lang="en-US" sz="4000" dirty="0"/>
+          </a:p>
+        </p:txBody>
+      </p:sp>
+      <p:sp>
+        <p:nvSpPr>
+          <p:cNvPr id="25" name="Slide Number Placeholder 0"/>
+          <p:cNvSpPr>
+            <a:spLocks noGrp="1"/>
+          </p:cNvSpPr>
+          <p:nvPr>
+            <p:ph type="sldNum" sz="quarter" idx="4294967295"/>
+          </p:nvPr>
+        </p:nvSpPr>
+        <p:spPr>
+          <a:xfrm>
+            <a:off x="27432" y="91440"/>
+            <a:ext cx="585216" cy="475488"/>
+          </a:xfrm>
+          <a:prstGeom prst="rect">
+            <a:avLst/>
+          </a:prstGeom>
+          <a:extLst>
+            <a:ext uri="{C572A759-6A51-4108-AA02-DFA0A04FC94B}">
+              <ma14:wrappingTextBoxFlag xmlns:ma14="http://schemas.microsoft.com/office/mac/drawingml/2011/main" val="0"/>
+            </a:ext>
+          </a:extLst>
+        </p:spPr>
+        <p:txBody>
+          <a:bodyPr/>
+          <a:lstStyle>
+            <a:lvl1pPr>
+              <a:defRPr sz="2000">
+                <a:solidFill>
+                  <a:srgbClr val="FFFFFF"/>
+                </a:solidFill>
+                <a:latin typeface="Calibri"/>
+                <a:ea typeface="Calibri"/>
+                <a:cs typeface="Calibri"/>
+              </a:defRPr>
+            </a:lvl1pPr>
+          </a:lstStyle>
+          <a:p>
+            <a:pPr algn="ctr"/>
+            <a:fld id="{F7021451-1387-4CA6-816F-3879F97B5CBC}" type="slidenum">
+              <a:rPr b="1" lang="en-US"/>
+              <a:t>42</a:t>
+            </a:fld>
+            <a:endParaRPr lang="en-US"/>
+          </a:p>
+        </p:txBody>
+      </p:sp>
+    </p:spTree>
+  </p:cSld>
+  <p:clrMapOvr>
+    <a:masterClrMapping/>
+  </p:clrMapOvr>
+</p:sld>
+</file>
+
+<file path=ppt/slides/slide43.xml><?xml version="1.0" encoding="utf-8"?>
+<p:sld xmlns:a="http://schemas.openxmlformats.org/drawingml/2006/main" xmlns:r="http://schemas.openxmlformats.org/officeDocument/2006/relationships" xmlns:p="http://schemas.openxmlformats.org/presentationml/2006/main">
+  <p:cSld name="Slide 43">
+    <p:spTree>
+      <p:nvGrpSpPr>
+        <p:cNvPr id="1" name=""/>
+        <p:cNvGrpSpPr/>
+        <p:nvPr/>
+      </p:nvGrpSpPr>
+      <p:grpSpPr>
+        <a:xfrm>
+          <a:off x="0" y="0"/>
+          <a:ext cx="0" cy="0"/>
+          <a:chOff x="0" y="0"/>
+          <a:chExt cx="0" cy="0"/>
+        </a:xfrm>
+      </p:grpSpPr>
+      <p:sp>
+        <p:nvSpPr>
+          <p:cNvPr id="2" name="Text 0"/>
+          <p:cNvSpPr/>
+          <p:nvPr/>
+        </p:nvSpPr>
+        <p:spPr>
+          <a:xfrm>
+            <a:off x="457200" y="713232"/>
+            <a:ext cx="11368735" cy="274320"/>
+          </a:xfrm>
+          <a:prstGeom prst="rect">
+            <a:avLst/>
+          </a:prstGeom>
+          <a:noFill/>
+          <a:ln/>
+        </p:spPr>
+        <p:txBody>
+          <a:bodyPr wrap="square" lIns="0" tIns="0" rIns="0" bIns="0" rtlCol="0" anchor="ctr"/>
+          <a:lstStyle/>
+          <a:p>
+            <a:pPr algn="r" indent="0" marL="0">
+              <a:buNone/>
+            </a:pPr>
+            <a:r>
+              <a:rPr lang="en-US" sz="1400" b="1" dirty="0">
+                <a:solidFill>
+                  <a:srgbClr val="1C3F6E"/>
+                </a:solidFill>
+                <a:latin typeface="Calibri" pitchFamily="34" charset="0"/>
+                <a:ea typeface="Calibri" pitchFamily="34" charset="-122"/>
+                <a:cs typeface="Calibri" pitchFamily="34" charset="-120"/>
+              </a:rPr>
+              <a:t>HOMEWORK</a:t>
+            </a:r>
+            <a:endParaRPr lang="en-US" sz="1400" dirty="0"/>
+          </a:p>
+        </p:txBody>
+      </p:sp>
+      <p:pic>
+        <p:nvPicPr>
+          <p:cNvPr id="3" name="Image 0" descr="/home/claude/f4/img/minesec_sheet.png">    </p:cNvPr>
+          <p:cNvPicPr>
+            <a:picLocks noChangeAspect="1"/>
+          </p:cNvPicPr>
+          <p:nvPr/>
+        </p:nvPicPr>
+        <p:blipFill>
+          <a:blip r:embed="rId1"/>
+          <a:stretch>
+            <a:fillRect/>
+          </a:stretch>
+        </p:blipFill>
+        <p:spPr>
+          <a:xfrm>
+            <a:off x="0" y="658368"/>
+            <a:ext cx="5120640" cy="5833872"/>
+          </a:xfrm>
+          <a:prstGeom prst="rect">
+            <a:avLst/>
+          </a:prstGeom>
+        </p:spPr>
+      </p:pic>
+      <p:sp>
+        <p:nvSpPr>
+          <p:cNvPr id="4" name="Text 1"/>
+          <p:cNvSpPr/>
+          <p:nvPr/>
+        </p:nvSpPr>
+        <p:spPr>
+          <a:xfrm>
+            <a:off x="5349240" y="1005840"/>
+            <a:ext cx="6522415" cy="731520"/>
+          </a:xfrm>
+          <a:prstGeom prst="rect">
+            <a:avLst/>
+          </a:prstGeom>
+          <a:noFill/>
+          <a:ln/>
+        </p:spPr>
+        <p:txBody>
+          <a:bodyPr wrap="square" lIns="0" tIns="0" rIns="0" bIns="0" rtlCol="0" anchor="ctr">
+            <a:normAutofit/>
+          </a:bodyPr>
+          <a:lstStyle/>
+          <a:p>
+            <a:pPr algn="ctr" indent="0" marL="0">
+              <a:buNone/>
+            </a:pPr>
+            <a:r>
+              <a:rPr lang="en-US" sz="3600" b="1" dirty="0">
+                <a:solidFill>
+                  <a:srgbClr val="990011"/>
+                </a:solidFill>
+                <a:latin typeface="Times New Roman" pitchFamily="34" charset="0"/>
+                <a:ea typeface="Times New Roman" pitchFamily="34" charset="-122"/>
+                <a:cs typeface="Times New Roman" pitchFamily="34" charset="-120"/>
+              </a:rPr>
+              <a:t>Homework</a:t>
+            </a:r>
+            <a:endParaRPr lang="en-US" sz="3600" dirty="0"/>
+          </a:p>
+        </p:txBody>
+      </p:sp>
+      <p:sp>
+        <p:nvSpPr>
+          <p:cNvPr id="5" name="Text 2"/>
+          <p:cNvSpPr/>
+          <p:nvPr/>
+        </p:nvSpPr>
+        <p:spPr>
+          <a:xfrm>
+            <a:off x="5349240" y="1783080"/>
+            <a:ext cx="6522415" cy="4663440"/>
+          </a:xfrm>
+          <a:prstGeom prst="rect">
+            <a:avLst/>
+          </a:prstGeom>
+          <a:noFill/>
+          <a:ln/>
+        </p:spPr>
+        <p:txBody>
+          <a:bodyPr wrap="square" lIns="0" tIns="0" rIns="0" bIns="0" rtlCol="0" anchor="t"/>
+          <a:lstStyle/>
+          <a:p>
+            <a:pPr algn="l" indent="0" marL="0">
+              <a:spcAft>
+                <a:spcPts val="800"/>
+              </a:spcAft>
+              <a:buNone/>
+            </a:pPr>
+            <a:r>
+              <a:rPr lang="en-US" sz="4000" dirty="0">
+                <a:solidFill>
+                  <a:srgbClr val="111111"/>
+                </a:solidFill>
+                <a:latin typeface="Times New Roman" pitchFamily="34" charset="0"/>
+                <a:ea typeface="Times New Roman" pitchFamily="34" charset="-122"/>
+                <a:cs typeface="Times New Roman" pitchFamily="34" charset="-120"/>
+              </a:rPr>
+              <a:t>Listen to the news or ask an adult about a recent earthquake or volcanic eruption in the world. Write the name of the country and what happened.</a:t>
+            </a:r>
+            <a:endParaRPr lang="en-US" sz="4000" dirty="0"/>
+          </a:p>
+        </p:txBody>
+      </p:sp>
+      <p:sp>
+        <p:nvSpPr>
+          <p:cNvPr id="25" name="Slide Number Placeholder 0"/>
+          <p:cNvSpPr>
+            <a:spLocks noGrp="1"/>
+          </p:cNvSpPr>
+          <p:nvPr>
+            <p:ph type="sldNum" sz="quarter" idx="4294967295"/>
+          </p:nvPr>
+        </p:nvSpPr>
+        <p:spPr>
+          <a:xfrm>
+            <a:off x="27432" y="91440"/>
+            <a:ext cx="585216" cy="475488"/>
+          </a:xfrm>
+          <a:prstGeom prst="rect">
+            <a:avLst/>
+          </a:prstGeom>
+          <a:extLst>
+            <a:ext uri="{C572A759-6A51-4108-AA02-DFA0A04FC94B}">
+              <ma14:wrappingTextBoxFlag xmlns:ma14="http://schemas.microsoft.com/office/mac/drawingml/2011/main" val="0"/>
+            </a:ext>
+          </a:extLst>
+        </p:spPr>
+        <p:txBody>
+          <a:bodyPr/>
+          <a:lstStyle>
+            <a:lvl1pPr>
+              <a:defRPr sz="2000">
+                <a:solidFill>
+                  <a:srgbClr val="FFFFFF"/>
+                </a:solidFill>
+                <a:latin typeface="Calibri"/>
+                <a:ea typeface="Calibri"/>
+                <a:cs typeface="Calibri"/>
+              </a:defRPr>
+            </a:lvl1pPr>
+          </a:lstStyle>
+          <a:p>
+            <a:pPr algn="ctr"/>
+            <a:fld id="{F7021451-1387-4CA6-816F-3879F97B5CBC}" type="slidenum">
+              <a:rPr b="1" lang="en-US"/>
+              <a:t>43</a:t>
+            </a:fld>
+            <a:endParaRPr lang="en-US"/>
+          </a:p>
+        </p:txBody>
+      </p:sp>
+    </p:spTree>
+  </p:cSld>
+  <p:clrMapOvr>
+    <a:masterClrMapping/>
+  </p:clrMapOvr>
+</p:sld>
+</file>
+
+<file path=ppt/slides/slide44.xml><?xml version="1.0" encoding="utf-8"?>
+<p:sld xmlns:a="http://schemas.openxmlformats.org/drawingml/2006/main" xmlns:r="http://schemas.openxmlformats.org/officeDocument/2006/relationships" xmlns:p="http://schemas.openxmlformats.org/presentationml/2006/main">
+  <p:cSld name="Slide 44">
+    <p:spTree>
+      <p:nvGrpSpPr>
+        <p:cNvPr id="1" name=""/>
+        <p:cNvGrpSpPr/>
+        <p:nvPr/>
+      </p:nvGrpSpPr>
+      <p:grpSpPr>
+        <a:xfrm>
+          <a:off x="0" y="0"/>
+          <a:ext cx="0" cy="0"/>
+          <a:chOff x="0" y="0"/>
+          <a:chExt cx="0" cy="0"/>
+        </a:xfrm>
+      </p:grpSpPr>
+      <p:sp>
+        <p:nvSpPr>
+          <p:cNvPr id="2" name="Text 0"/>
+          <p:cNvSpPr/>
+          <p:nvPr/>
+        </p:nvSpPr>
+        <p:spPr>
+          <a:xfrm>
+            <a:off x="457200" y="713232"/>
+            <a:ext cx="11368735" cy="274320"/>
+          </a:xfrm>
+          <a:prstGeom prst="rect">
+            <a:avLst/>
+          </a:prstGeom>
+          <a:noFill/>
+          <a:ln/>
+        </p:spPr>
+        <p:txBody>
+          <a:bodyPr wrap="square" lIns="0" tIns="0" rIns="0" bIns="0" rtlCol="0" anchor="ctr"/>
+          <a:lstStyle/>
+          <a:p>
+            <a:pPr algn="r" indent="0" marL="0">
+              <a:buNone/>
+            </a:pPr>
+            <a:r>
+              <a:rPr lang="en-US" sz="1400" b="1" dirty="0">
+                <a:solidFill>
+                  <a:srgbClr val="1C3F6E"/>
+                </a:solidFill>
+                <a:latin typeface="Calibri" pitchFamily="34" charset="0"/>
+                <a:ea typeface="Calibri" pitchFamily="34" charset="-122"/>
+                <a:cs typeface="Calibri" pitchFamily="34" charset="-120"/>
+              </a:rPr>
+              <a:t>NEXT LESSON</a:t>
+            </a:r>
+            <a:endParaRPr lang="en-US" sz="1400" dirty="0"/>
+          </a:p>
+        </p:txBody>
+      </p:sp>
+      <p:pic>
+        <p:nvPicPr>
+          <p:cNvPr id="3" name="Image 0" descr="/home/claude/f4/img/minesec_sheet.png">    </p:cNvPr>
+          <p:cNvPicPr>
+            <a:picLocks noChangeAspect="1"/>
+          </p:cNvPicPr>
+          <p:nvPr/>
+        </p:nvPicPr>
+        <p:blipFill>
+          <a:blip r:embed="rId1"/>
+          <a:stretch>
+            <a:fillRect/>
+          </a:stretch>
+        </p:blipFill>
+        <p:spPr>
+          <a:xfrm>
+            <a:off x="0" y="658368"/>
+            <a:ext cx="5120640" cy="5833872"/>
+          </a:xfrm>
+          <a:prstGeom prst="rect">
+            <a:avLst/>
+          </a:prstGeom>
+        </p:spPr>
+      </p:pic>
+      <p:sp>
+        <p:nvSpPr>
+          <p:cNvPr id="4" name="Text 1"/>
+          <p:cNvSpPr/>
+          <p:nvPr/>
+        </p:nvSpPr>
+        <p:spPr>
+          <a:xfrm>
+            <a:off x="5349240" y="1005840"/>
+            <a:ext cx="6522415" cy="731520"/>
+          </a:xfrm>
+          <a:prstGeom prst="rect">
+            <a:avLst/>
+          </a:prstGeom>
+          <a:noFill/>
+          <a:ln/>
+        </p:spPr>
+        <p:txBody>
+          <a:bodyPr wrap="square" lIns="0" tIns="0" rIns="0" bIns="0" rtlCol="0" anchor="ctr">
+            <a:normAutofit/>
+          </a:bodyPr>
+          <a:lstStyle/>
+          <a:p>
+            <a:pPr algn="ctr" indent="0" marL="0">
+              <a:buNone/>
+            </a:pPr>
+            <a:r>
+              <a:rPr lang="en-US" sz="3600" b="1" dirty="0">
+                <a:solidFill>
+                  <a:srgbClr val="990011"/>
+                </a:solidFill>
+                <a:latin typeface="Times New Roman" pitchFamily="34" charset="0"/>
+                <a:ea typeface="Times New Roman" pitchFamily="34" charset="-122"/>
+                <a:cs typeface="Times New Roman" pitchFamily="34" charset="-120"/>
+              </a:rPr>
+              <a:t>Next Lesson</a:t>
+            </a:r>
+            <a:endParaRPr lang="en-US" sz="3600" dirty="0"/>
+          </a:p>
+        </p:txBody>
+      </p:sp>
+      <p:sp>
+        <p:nvSpPr>
+          <p:cNvPr id="5" name="Text 2"/>
+          <p:cNvSpPr/>
+          <p:nvPr/>
+        </p:nvSpPr>
+        <p:spPr>
+          <a:xfrm>
+            <a:off x="5349240" y="1783080"/>
+            <a:ext cx="6522415" cy="4663440"/>
+          </a:xfrm>
+          <a:prstGeom prst="rect">
+            <a:avLst/>
+          </a:prstGeom>
+          <a:noFill/>
+          <a:ln/>
+        </p:spPr>
+        <p:txBody>
+          <a:bodyPr wrap="square" lIns="0" tIns="0" rIns="0" bIns="0" rtlCol="0" anchor="ctr"/>
+          <a:lstStyle/>
+          <a:p>
+            <a:pPr algn="ctr" indent="0" marL="0">
+              <a:spcAft>
+                <a:spcPts val="800"/>
+              </a:spcAft>
+              <a:buNone/>
+            </a:pPr>
+            <a:r>
+              <a:rPr lang="en-US" sz="4000" b="1" dirty="0">
+                <a:solidFill>
+                  <a:srgbClr val="111111"/>
+                </a:solidFill>
+                <a:latin typeface="Times New Roman" pitchFamily="34" charset="0"/>
+                <a:ea typeface="Times New Roman" pitchFamily="34" charset="-122"/>
+                <a:cs typeface="Times New Roman" pitchFamily="34" charset="-120"/>
+              </a:rPr>
+              <a:t>Our next lesson will be on:</a:t>
+            </a:r>
+            <a:endParaRPr lang="en-US" sz="4000" dirty="0"/>
+          </a:p>
+          <a:p>
+            <a:pPr algn="ctr" indent="0" marL="0">
+              <a:spcAft>
+                <a:spcPts val="800"/>
+              </a:spcAft>
+              <a:buNone/>
+            </a:pPr>
+            <a:r>
+              <a:rPr lang="en-US" sz="4000" b="1" dirty="0">
+                <a:solidFill>
+                  <a:srgbClr val="990011"/>
+                </a:solidFill>
+                <a:latin typeface="Times New Roman" pitchFamily="34" charset="0"/>
+                <a:ea typeface="Times New Roman" pitchFamily="34" charset="-122"/>
+                <a:cs typeface="Times New Roman" pitchFamily="34" charset="-120"/>
+              </a:rPr>
+              <a:t>Lesson 10: Plate Tectonics</a:t>
+            </a:r>
+            <a:endParaRPr lang="en-US" sz="4000" dirty="0"/>
+          </a:p>
+        </p:txBody>
+      </p:sp>
+      <p:sp>
+        <p:nvSpPr>
+          <p:cNvPr id="25" name="Slide Number Placeholder 0"/>
+          <p:cNvSpPr>
+            <a:spLocks noGrp="1"/>
+          </p:cNvSpPr>
+          <p:nvPr>
+            <p:ph type="sldNum" sz="quarter" idx="4294967295"/>
+          </p:nvPr>
+        </p:nvSpPr>
+        <p:spPr>
+          <a:xfrm>
+            <a:off x="27432" y="91440"/>
+            <a:ext cx="585216" cy="475488"/>
+          </a:xfrm>
+          <a:prstGeom prst="rect">
+            <a:avLst/>
+          </a:prstGeom>
+          <a:extLst>
+            <a:ext uri="{C572A759-6A51-4108-AA02-DFA0A04FC94B}">
+              <ma14:wrappingTextBoxFlag xmlns:ma14="http://schemas.microsoft.com/office/mac/drawingml/2011/main" val="0"/>
+            </a:ext>
+          </a:extLst>
+        </p:spPr>
+        <p:txBody>
+          <a:bodyPr/>
+          <a:lstStyle>
+            <a:lvl1pPr>
+              <a:defRPr sz="2000">
+                <a:solidFill>
+                  <a:srgbClr val="FFFFFF"/>
+                </a:solidFill>
+                <a:latin typeface="Calibri"/>
+                <a:ea typeface="Calibri"/>
+                <a:cs typeface="Calibri"/>
+              </a:defRPr>
+            </a:lvl1pPr>
+          </a:lstStyle>
+          <a:p>
+            <a:pPr algn="ctr"/>
+            <a:fld id="{F7021451-1387-4CA6-816F-3879F97B5CBC}" type="slidenum">
+              <a:rPr b="1" lang="en-US"/>
+              <a:t>44</a:t>
+            </a:fld>
+            <a:endParaRPr lang="en-US"/>
+          </a:p>
+        </p:txBody>
+      </p:sp>
+    </p:spTree>
+  </p:cSld>
+  <p:clrMapOvr>
+    <a:masterClrMapping/>
+  </p:clrMapOvr>
+</p:sld>
+</file>
+
+<file path=ppt/slides/slide45.xml><?xml version="1.0" encoding="utf-8"?>
+<p:sld xmlns:a="http://schemas.openxmlformats.org/drawingml/2006/main" xmlns:r="http://schemas.openxmlformats.org/officeDocument/2006/relationships" xmlns:p="http://schemas.openxmlformats.org/presentationml/2006/main">
+  <p:cSld name="Slide 45">
+    <p:spTree>
+      <p:nvGrpSpPr>
+        <p:cNvPr id="1" name=""/>
+        <p:cNvGrpSpPr/>
+        <p:nvPr/>
+      </p:nvGrpSpPr>
+      <p:grpSpPr>
+        <a:xfrm>
+          <a:off x="0" y="0"/>
+          <a:ext cx="0" cy="0"/>
+          <a:chOff x="0" y="0"/>
+          <a:chExt cx="0" cy="0"/>
+        </a:xfrm>
+      </p:grpSpPr>
+      <p:sp>
+        <p:nvSpPr>
+          <p:cNvPr id="2" name="Text 0"/>
+          <p:cNvSpPr/>
+          <p:nvPr/>
+        </p:nvSpPr>
+        <p:spPr>
+          <a:xfrm>
+            <a:off x="457200" y="713232"/>
+            <a:ext cx="11368735" cy="274320"/>
+          </a:xfrm>
+          <a:prstGeom prst="rect">
+            <a:avLst/>
+          </a:prstGeom>
+          <a:noFill/>
+          <a:ln/>
+        </p:spPr>
+        <p:txBody>
+          <a:bodyPr wrap="square" lIns="0" tIns="0" rIns="0" bIns="0" rtlCol="0" anchor="ctr"/>
+          <a:lstStyle/>
+          <a:p>
+            <a:pPr algn="r" indent="0" marL="0">
+              <a:buNone/>
+            </a:pPr>
+            <a:r>
+              <a:rPr lang="en-US" sz="1400" b="1" dirty="0">
+                <a:solidFill>
+                  <a:srgbClr val="1C3F6E"/>
+                </a:solidFill>
+                <a:latin typeface="Calibri" pitchFamily="34" charset="0"/>
+                <a:ea typeface="Calibri" pitchFamily="34" charset="-122"/>
+                <a:cs typeface="Calibri" pitchFamily="34" charset="-120"/>
+              </a:rPr>
               <a:t>BILINGUAL GAME</a:t>
             </a:r>
             <a:endParaRPr lang="en-US" sz="1400" dirty="0"/>
@@ -14796,7 +16077,7 @@
       </p:sp>
       <p:graphicFrame>
         <p:nvGraphicFramePr>
-          <p:cNvPr id="42" name="Table 0"/>
+          <p:cNvPr id="46" name="Table 0"/>
           <p:cNvGraphicFramePr>
             <a:graphicFrameLocks noGrp="1"/>
           </p:cNvGraphicFramePr>
@@ -16108,7 +17389,7 @@
             <a:pPr algn="ctr"/>
             <a:fld id="{F7021451-1387-4CA6-816F-3879F97B5CBC}" type="slidenum">
               <a:rPr b="1" lang="en-US"/>
-              <a:t>41</a:t>
+              <a:t>45</a:t>
             </a:fld>
             <a:endParaRPr lang="en-US"/>
           </a:p>
@@ -16122,9 +17403,9 @@
 </p:sld>
 </file>
 
-<file path=ppt/slides/slide42.xml><?xml version="1.0" encoding="utf-8"?>
+<file path=ppt/slides/slide46.xml><?xml version="1.0" encoding="utf-8"?>
 <p:sld xmlns:a="http://schemas.openxmlformats.org/drawingml/2006/main" xmlns:r="http://schemas.openxmlformats.org/officeDocument/2006/relationships" xmlns:p="http://schemas.openxmlformats.org/presentationml/2006/main">
-  <p:cSld name="Slide 42">
+  <p:cSld name="Slide 46">
     <p:spTree>
       <p:nvGrpSpPr>
         <p:cNvPr id="1" name=""/>
@@ -16219,7 +17500,7 @@
       </p:sp>
       <p:graphicFrame>
         <p:nvGraphicFramePr>
-          <p:cNvPr id="43" name="Table 0"/>
+          <p:cNvPr id="47" name="Table 0"/>
           <p:cNvGraphicFramePr>
             <a:graphicFrameLocks noGrp="1"/>
           </p:cNvGraphicFramePr>
@@ -16467,7 +17748,7 @@
                           <a:ea typeface="Calibri" pitchFamily="34" charset="-122"/>
                           <a:cs typeface="Calibri" pitchFamily="34" charset="-120"/>
                         </a:rPr>
-                        <a:t>Lesson 9: The Theory of Continental Drift</a:t>
+                        <a:t>Lesson 9: The Theories of the Earth's Structure: Continental Drift</a:t>
                       </a:r>
                       <a:endParaRPr lang="en-US" sz="1600" dirty="0">
                         <a:latin typeface="Calibri" charset="0"/>
@@ -16605,7 +17886,7 @@
                           <a:ea typeface="Calibri" pitchFamily="34" charset="-122"/>
                           <a:cs typeface="Calibri" pitchFamily="34" charset="-120"/>
                         </a:rPr>
-                        <a:t>State the theory of continental drift. Describe the break-up of Pangaea. Explain the evidence for continental drift.</a:t>
+                        <a:t>State the main idea of the theory of continental drift. Illustrate the drifting of the continents. Explain the evidence for continental drift.</a:t>
                       </a:r>
                       <a:endParaRPr lang="en-US" sz="1600" dirty="0">
                         <a:latin typeface="Calibri" charset="0"/>
@@ -16841,7 +18122,7 @@
             <a:pPr algn="ctr"/>
             <a:fld id="{F7021451-1387-4CA6-816F-3879F97B5CBC}" type="slidenum">
               <a:rPr b="1" lang="en-US"/>
-              <a:t>42</a:t>
+              <a:t>46</a:t>
             </a:fld>
             <a:endParaRPr lang="en-US"/>
           </a:p>
@@ -16855,9 +18136,9 @@
 </p:sld>
 </file>
 
-<file path=ppt/slides/slide43.xml><?xml version="1.0" encoding="utf-8"?>
+<file path=ppt/slides/slide47.xml><?xml version="1.0" encoding="utf-8"?>
 <p:sld xmlns:a="http://schemas.openxmlformats.org/drawingml/2006/main" xmlns:r="http://schemas.openxmlformats.org/officeDocument/2006/relationships" xmlns:p="http://schemas.openxmlformats.org/presentationml/2006/main">
-  <p:cSld name="Slide 43">
+  <p:cSld name="Slide 47">
     <p:spTree>
       <p:nvGrpSpPr>
         <p:cNvPr id="1" name=""/>
@@ -16952,7 +18233,7 @@
       </p:sp>
       <p:graphicFrame>
         <p:nvGraphicFramePr>
-          <p:cNvPr id="44" name="Table 0"/>
+          <p:cNvPr id="48" name="Table 0"/>
           <p:cNvGraphicFramePr>
             <a:graphicFrameLocks noGrp="1"/>
           </p:cNvGraphicFramePr>
@@ -17062,7 +18343,7 @@
                           <a:ea typeface="Calibri" pitchFamily="34" charset="-122"/>
                           <a:cs typeface="Calibri" pitchFamily="34" charset="-120"/>
                         </a:rPr>
-                        <a:t>The Theory of Continental Drift; Evidence of Continental Drift.</a:t>
+                        <a:t>Main Idea of the Theory; Illustration of Drifting; Evidence of Continental Drift.</a:t>
                       </a:r>
                       <a:endParaRPr lang="en-US" sz="1600" dirty="0">
                         <a:latin typeface="Calibri" charset="0"/>
@@ -17712,7 +18993,7 @@
             <a:pPr algn="ctr"/>
             <a:fld id="{F7021451-1387-4CA6-816F-3879F97B5CBC}" type="slidenum">
               <a:rPr b="1" lang="en-US"/>
-              <a:t>43</a:t>
+              <a:t>47</a:t>
             </a:fld>
             <a:endParaRPr lang="en-US"/>
           </a:p>
@@ -17726,9 +19007,9 @@
 </p:sld>
 </file>
 
-<file path=ppt/slides/slide44.xml><?xml version="1.0" encoding="utf-8"?>
+<file path=ppt/slides/slide48.xml><?xml version="1.0" encoding="utf-8"?>
 <p:sld xmlns:a="http://schemas.openxmlformats.org/drawingml/2006/main" xmlns:r="http://schemas.openxmlformats.org/officeDocument/2006/relationships" xmlns:p="http://schemas.openxmlformats.org/presentationml/2006/main">
-  <p:cSld name="Slide 44">
+  <p:cSld name="Slide 48">
     <p:spTree>
       <p:nvGrpSpPr>
         <p:cNvPr id="1" name=""/>
@@ -17947,7 +19228,7 @@
                 <a:ea typeface="Calibri" pitchFamily="34" charset="-122"/>
                 <a:cs typeface="Calibri" pitchFamily="34" charset="-120"/>
               </a:rPr>
-              <a:t>Without the projector (Activity 2): explain: this small animal could not swim across the ocean.</a:t>
+              <a:t>Without the projector (Activity 2): draw the three stages on the board.</a:t>
             </a:r>
             <a:endParaRPr lang="en-US" sz="2000" dirty="0"/>
           </a:p>
@@ -17968,7 +19249,7 @@
                 <a:ea typeface="Calibri" pitchFamily="34" charset="-122"/>
                 <a:cs typeface="Calibri" pitchFamily="34" charset="-120"/>
               </a:rPr>
-              <a:t>Without the projector (Activity 3): push two books apart slowly on the table.</a:t>
+              <a:t>Without the projector (Activity 3): explain: this small animal could not swim across the ocean.</a:t>
             </a:r>
             <a:endParaRPr lang="en-US" sz="2000" dirty="0"/>
           </a:p>
@@ -18016,7 +19297,7 @@
             <a:pPr algn="ctr"/>
             <a:fld id="{F7021451-1387-4CA6-816F-3879F97B5CBC}" type="slidenum">
               <a:rPr b="1" lang="en-US"/>
-              <a:t>44</a:t>
+              <a:t>48</a:t>
             </a:fld>
             <a:endParaRPr lang="en-US"/>
           </a:p>
@@ -18030,9 +19311,9 @@
 </p:sld>
 </file>
 
-<file path=ppt/slides/slide45.xml><?xml version="1.0" encoding="utf-8"?>
+<file path=ppt/slides/slide49.xml><?xml version="1.0" encoding="utf-8"?>
 <p:sld xmlns:a="http://schemas.openxmlformats.org/drawingml/2006/main" xmlns:r="http://schemas.openxmlformats.org/officeDocument/2006/relationships" xmlns:p="http://schemas.openxmlformats.org/presentationml/2006/main">
-  <p:cSld name="Slide 45">
+  <p:cSld name="Slide 49">
     <p:spTree>
       <p:nvGrpSpPr>
         <p:cNvPr id="1" name=""/>
@@ -18230,7 +19511,7 @@
                 <a:ea typeface="Calibri" pitchFamily="34" charset="-122"/>
                 <a:cs typeface="Calibri" pitchFamily="34" charset="-120"/>
               </a:rPr>
-              <a:t>Photo, Activity 2: “Marble Skin Fish Fossil” by Bold Frontiers, CC BY 2.0, via Flickr (https://www.flickr.com/photos/82955120@N05/14091612527)</a:t>
+              <a:t>Photo, Activity 3: “Marble Skin Fish Fossil” by Bold Frontiers, CC BY 2.0, via Flickr (https://www.flickr.com/photos/82955120@N05/14091612527)</a:t>
             </a:r>
             <a:endParaRPr lang="en-US" sz="1800" dirty="0"/>
           </a:p>
@@ -18251,27 +19532,6 @@
                 <a:ea typeface="Calibri" pitchFamily="34" charset="-122"/>
                 <a:cs typeface="Calibri" pitchFamily="34" charset="-120"/>
               </a:rPr>
-              <a:t>Photo, Activity 3: “Silfra Fissure” by Daveography.ca, CC BY-NC-SA 2.0, via Flickr (https://www.flickr.com/photos/71482738@N00/32857247053)</a:t>
-            </a:r>
-            <a:endParaRPr lang="en-US" sz="1800" dirty="0"/>
-          </a:p>
-          <a:p>
-            <a:pPr algn="l" marL="342900" indent="-342900">
-              <a:spcAft>
-                <a:spcPts val="800"/>
-              </a:spcAft>
-              <a:buSzPct val="100000"/>
-              <a:buChar char="•"/>
-            </a:pPr>
-            <a:r>
-              <a:rPr lang="en-US" sz="1800" dirty="0">
-                <a:solidFill>
-                  <a:srgbClr val="111111"/>
-                </a:solidFill>
-                <a:latin typeface="Calibri" pitchFamily="34" charset="0"/>
-                <a:ea typeface="Calibri" pitchFamily="34" charset="-122"/>
-                <a:cs typeface="Calibri" pitchFamily="34" charset="-120"/>
-              </a:rPr>
               <a:t>Diagrams and animations: drawn for this lesson (Geography Department).</a:t>
             </a:r>
             <a:endParaRPr lang="en-US" sz="1800" dirty="0"/>
@@ -18320,7 +19580,7 @@
             <a:pPr algn="ctr"/>
             <a:fld id="{F7021451-1387-4CA6-816F-3879F97B5CBC}" type="slidenum">
               <a:rPr b="1" lang="en-US"/>
-              <a:t>45</a:t>
+              <a:t>49</a:t>
             </a:fld>
             <a:endParaRPr lang="en-US"/>
           </a:p>
@@ -18957,7 +20217,7 @@
         <p:spPr>
           <a:xfrm>
             <a:off x="0" y="658368"/>
-            <a:ext cx="2468880" cy="5833872"/>
+            <a:ext cx="5120640" cy="5833872"/>
           </a:xfrm>
           <a:prstGeom prst="rect">
             <a:avLst/>
@@ -18972,8 +20232,8 @@
         </p:nvSpPr>
         <p:spPr>
           <a:xfrm>
-            <a:off x="2697480" y="1005840"/>
-            <a:ext cx="9174175" cy="731520"/>
+            <a:off x="5349240" y="1005840"/>
+            <a:ext cx="6522415" cy="731520"/>
           </a:xfrm>
           <a:prstGeom prst="rect">
             <a:avLst/>
@@ -19013,8 +20273,8 @@
         </p:nvSpPr>
         <p:spPr>
           <a:xfrm>
-            <a:off x="2697480" y="1783080"/>
-            <a:ext cx="9174175" cy="4663440"/>
+            <a:off x="5349240" y="1783080"/>
+            <a:ext cx="6522415" cy="4663440"/>
           </a:xfrm>
           <a:prstGeom prst="rect">
             <a:avLst/>
@@ -19063,7 +20323,7 @@
                 <a:ea typeface="Times New Roman" pitchFamily="34" charset="-122"/>
                 <a:cs typeface="Times New Roman" pitchFamily="34" charset="-120"/>
               </a:rPr>
-              <a:t>State the theory of continental drift.</a:t>
+              <a:t>State the main idea of the theory of continental drift.</a:t>
             </a:r>
             <a:endParaRPr lang="en-US" sz="4000" dirty="0"/>
           </a:p>
@@ -19085,29 +20345,7 @@
                 <a:ea typeface="Times New Roman" pitchFamily="34" charset="-122"/>
                 <a:cs typeface="Times New Roman" pitchFamily="34" charset="-120"/>
               </a:rPr>
-              <a:t>Describe the break-up of Pangaea.</a:t>
-            </a:r>
-            <a:endParaRPr lang="en-US" sz="4000" dirty="0"/>
-          </a:p>
-          <a:p>
-            <a:pPr algn="l" marL="342900" indent="-342900">
-              <a:spcAft>
-                <a:spcPts val="800"/>
-              </a:spcAft>
-              <a:buSzPct val="100000"/>
-              <a:buFont typeface="+mj-lt"/>
-              <a:buAutoNum type="arabicPeriod" startAt="1"/>
-            </a:pPr>
-            <a:r>
-              <a:rPr lang="en-US" sz="4000" dirty="0">
-                <a:solidFill>
-                  <a:srgbClr val="111111"/>
-                </a:solidFill>
-                <a:latin typeface="Times New Roman" pitchFamily="34" charset="0"/>
-                <a:ea typeface="Times New Roman" pitchFamily="34" charset="-122"/>
-                <a:cs typeface="Times New Roman" pitchFamily="34" charset="-120"/>
-              </a:rPr>
-              <a:t>Explain the evidence for continental drift.</a:t>
+              <a:t>Illustrate the drifting of the continents.</a:t>
             </a:r>
             <a:endParaRPr lang="en-US" sz="4000" dirty="0"/>
           </a:p>
@@ -19219,7 +20457,7 @@
                 <a:ea typeface="Calibri" pitchFamily="34" charset="-122"/>
                 <a:cs typeface="Calibri" pitchFamily="34" charset="-120"/>
               </a:rPr>
-              <a:t>PREVIOUS KNOWLEDGE</a:t>
+              <a:t>OBJECTIVES</a:t>
             </a:r>
             <a:endParaRPr lang="en-US" sz="1400" dirty="0"/>
           </a:p>
@@ -19284,7 +20522,7 @@
                 <a:ea typeface="Times New Roman" pitchFamily="34" charset="-122"/>
                 <a:cs typeface="Times New Roman" pitchFamily="34" charset="-120"/>
               </a:rPr>
-              <a:t>Previous Knowledge</a:t>
+              <a:t>Objectives (continued)</a:t>
             </a:r>
             <a:endParaRPr lang="en-US" sz="3600" dirty="0"/>
           </a:p>
@@ -19316,7 +20554,8 @@
                 <a:spcPts val="800"/>
               </a:spcAft>
               <a:buSzPct val="100000"/>
-              <a:buChar char="•"/>
+              <a:buFont typeface="+mj-lt"/>
+              <a:buAutoNum type="arabicPeriod" startAt="1"/>
             </a:pPr>
             <a:r>
               <a:rPr lang="en-US" sz="4000" dirty="0">
@@ -19327,49 +20566,7 @@
                 <a:ea typeface="Times New Roman" pitchFamily="34" charset="-122"/>
                 <a:cs typeface="Times New Roman" pitchFamily="34" charset="-120"/>
               </a:rPr>
-              <a:t>The crust is broken and lies on the very hot mantle.</a:t>
-            </a:r>
-            <a:endParaRPr lang="en-US" sz="4000" dirty="0"/>
-          </a:p>
-          <a:p>
-            <a:pPr algn="l" marL="342900" indent="-342900">
-              <a:spcAft>
-                <a:spcPts val="800"/>
-              </a:spcAft>
-              <a:buSzPct val="100000"/>
-              <a:buChar char="•"/>
-            </a:pPr>
-            <a:r>
-              <a:rPr lang="en-US" sz="4000" dirty="0">
-                <a:solidFill>
-                  <a:srgbClr val="111111"/>
-                </a:solidFill>
-                <a:latin typeface="Times New Roman" pitchFamily="34" charset="0"/>
-                <a:ea typeface="Times New Roman" pitchFamily="34" charset="-122"/>
-                <a:cs typeface="Times New Roman" pitchFamily="34" charset="-120"/>
-              </a:rPr>
-              <a:t>The mantle flows very slowly.</a:t>
-            </a:r>
-            <a:endParaRPr lang="en-US" sz="4000" dirty="0"/>
-          </a:p>
-          <a:p>
-            <a:pPr algn="l" marL="342900" indent="-342900">
-              <a:spcAft>
-                <a:spcPts val="800"/>
-              </a:spcAft>
-              <a:buSzPct val="100000"/>
-              <a:buChar char="•"/>
-            </a:pPr>
-            <a:r>
-              <a:rPr lang="en-US" sz="4000" dirty="0">
-                <a:solidFill>
-                  <a:srgbClr val="111111"/>
-                </a:solidFill>
-                <a:latin typeface="Times New Roman" pitchFamily="34" charset="0"/>
-                <a:ea typeface="Times New Roman" pitchFamily="34" charset="-122"/>
-                <a:cs typeface="Times New Roman" pitchFamily="34" charset="-120"/>
-              </a:rPr>
-              <a:t>Fossils are found mainly in sedimentary rocks.</a:t>
+              <a:t>Explain the evidence for continental drift.</a:t>
             </a:r>
             <a:endParaRPr lang="en-US" sz="4000" dirty="0"/>
           </a:p>
@@ -19481,7 +20678,7 @@
                 <a:ea typeface="Calibri" pitchFamily="34" charset="-122"/>
                 <a:cs typeface="Calibri" pitchFamily="34" charset="-120"/>
               </a:rPr>
-              <a:t>REAL-LIFE SITUATION</a:t>
+              <a:t>PREVIOUS KNOWLEDGE</a:t>
             </a:r>
             <a:endParaRPr lang="en-US" sz="1400" dirty="0"/>
           </a:p>
@@ -19546,7 +20743,7 @@
                 <a:ea typeface="Times New Roman" pitchFamily="34" charset="-122"/>
                 <a:cs typeface="Times New Roman" pitchFamily="34" charset="-120"/>
               </a:rPr>
-              <a:t>Situation in Real Life</a:t>
+              <a:t>Previous Knowledge</a:t>
             </a:r>
             <a:endParaRPr lang="en-US" sz="3600" dirty="0"/>
           </a:p>
@@ -19573,11 +20770,12 @@
           <a:bodyPr wrap="square" lIns="0" tIns="0" rIns="0" bIns="0" rtlCol="0" anchor="t"/>
           <a:lstStyle/>
           <a:p>
-            <a:pPr algn="l" indent="0" marL="0">
+            <a:pPr algn="l" marL="342900" indent="-342900">
               <a:spcAft>
                 <a:spcPts val="800"/>
               </a:spcAft>
-              <a:buNone/>
+              <a:buSzPct val="100000"/>
+              <a:buChar char="•"/>
             </a:pPr>
             <a:r>
               <a:rPr lang="en-US" sz="4000" dirty="0">
@@ -19588,7 +20786,49 @@
                 <a:ea typeface="Times New Roman" pitchFamily="34" charset="-122"/>
                 <a:cs typeface="Times New Roman" pitchFamily="34" charset="-120"/>
               </a:rPr>
-              <a:t>Djibrilla looks at a map. The coast of Africa and the coast of South America look like two pieces of a puzzle. He wonders if they were once joined.</a:t>
+              <a:t>The crust is broken and lies on the very hot mantle.</a:t>
+            </a:r>
+            <a:endParaRPr lang="en-US" sz="4000" dirty="0"/>
+          </a:p>
+          <a:p>
+            <a:pPr algn="l" marL="342900" indent="-342900">
+              <a:spcAft>
+                <a:spcPts val="800"/>
+              </a:spcAft>
+              <a:buSzPct val="100000"/>
+              <a:buChar char="•"/>
+            </a:pPr>
+            <a:r>
+              <a:rPr lang="en-US" sz="4000" dirty="0">
+                <a:solidFill>
+                  <a:srgbClr val="111111"/>
+                </a:solidFill>
+                <a:latin typeface="Times New Roman" pitchFamily="34" charset="0"/>
+                <a:ea typeface="Times New Roman" pitchFamily="34" charset="-122"/>
+                <a:cs typeface="Times New Roman" pitchFamily="34" charset="-120"/>
+              </a:rPr>
+              <a:t>The mantle flows very slowly.</a:t>
+            </a:r>
+            <a:endParaRPr lang="en-US" sz="4000" dirty="0"/>
+          </a:p>
+          <a:p>
+            <a:pPr algn="l" marL="342900" indent="-342900">
+              <a:spcAft>
+                <a:spcPts val="800"/>
+              </a:spcAft>
+              <a:buSzPct val="100000"/>
+              <a:buChar char="•"/>
+            </a:pPr>
+            <a:r>
+              <a:rPr lang="en-US" sz="4000" dirty="0">
+                <a:solidFill>
+                  <a:srgbClr val="111111"/>
+                </a:solidFill>
+                <a:latin typeface="Times New Roman" pitchFamily="34" charset="0"/>
+                <a:ea typeface="Times New Roman" pitchFamily="34" charset="-122"/>
+                <a:cs typeface="Times New Roman" pitchFamily="34" charset="-120"/>
+              </a:rPr>
+              <a:t>Fossils are found mainly in sedimentary rocks.</a:t>
             </a:r>
             <a:endParaRPr lang="en-US" sz="4000" dirty="0"/>
           </a:p>
